--- a/Fire_Extinguisher_Detection_Presentation.pptx
+++ b/Fire_Extinguisher_Detection_Presentation.pptx
@@ -2275,14 +2275,14 @@
               <a:buNone/>
             </a:pPr>
             <a:r>
-              <a:rPr lang="en-US" sz="3600" b="1" dirty="0">
+              <a:rPr lang="en-US" sz="3200" b="1" dirty="0">
                 <a:solidFill>
                   <a:srgbClr val="1E2761"/>
                 </a:solidFill>
               </a:rPr>
-              <a:t>Stage 3: 3D Localization and Tracking</a:t>
-            </a:r>
-            <a:endParaRPr lang="en-US" sz="3600" dirty="0"/>
+              <a:t>Stage 2: Edge Cases - Missed Real Objects</a:t>
+            </a:r>
+            <a:endParaRPr lang="en-US" sz="3200" dirty="0"/>
           </a:p>
         </p:txBody>
       </p:sp>
@@ -2294,8 +2294,8 @@
         </p:nvSpPr>
         <p:spPr>
           <a:xfrm>
-            <a:off x="457200" y="868680"/>
-            <a:ext cx="8229600" cy="274320"/>
+            <a:off x="731520" y="1005840"/>
+            <a:ext cx="3657600" cy="274320"/>
           </a:xfrm>
           <a:prstGeom prst="rect">
             <a:avLst/>
@@ -2307,31 +2307,55 @@
           <a:bodyPr wrap="square" rtlCol="0" anchor="ctr"/>
           <a:lstStyle/>
           <a:p>
-            <a:pPr indent="0" marL="0">
-              <a:buNone/>
-            </a:pPr>
-            <a:r>
-              <a:rPr lang="en-US" sz="1400" i="1" dirty="0">
-                <a:solidFill>
-                  <a:srgbClr val="028090"/>
-                </a:solidFill>
-              </a:rPr>
-              <a:t>Responsible: Thanigaiarasu Shanmugam</a:t>
+            <a:pPr algn="ctr" indent="0" marL="0">
+              <a:buNone/>
+            </a:pPr>
+            <a:r>
+              <a:rPr lang="en-US" sz="1400" b="1" dirty="0">
+                <a:solidFill>
+                  <a:srgbClr val="F96167"/>
+                </a:solidFill>
+              </a:rPr>
+              <a:t>Real Missed (2 objects)</a:t>
             </a:r>
             <a:endParaRPr lang="en-US" sz="1400" dirty="0"/>
           </a:p>
         </p:txBody>
       </p:sp>
-      <p:sp>
-        <p:nvSpPr>
-          <p:cNvPr id="4" name="Text 2"/>
+      <p:pic>
+        <p:nvPicPr>
+          <p:cNvPr id="4" name="Image 0" descr="/Users/kelechiezekwe/Workspace/Computer_vision_lab/Project_work/outputs/figures/ev_real_missed.png">    </p:cNvPr>
+          <p:cNvPicPr>
+            <a:picLocks noChangeAspect="1"/>
+          </p:cNvPicPr>
+          <p:nvPr/>
+        </p:nvPicPr>
+        <p:blipFill>
+          <a:blip r:embed="rId1"/>
+          <a:stretch>
+            <a:fillRect/>
+          </a:stretch>
+        </p:blipFill>
+        <p:spPr>
+          <a:xfrm>
+            <a:off x="731520" y="1371600"/>
+            <a:ext cx="3657600" cy="2560320"/>
+          </a:xfrm>
+          <a:prstGeom prst="rect">
+            <a:avLst/>
+          </a:prstGeom>
+        </p:spPr>
+      </p:pic>
+      <p:sp>
+        <p:nvSpPr>
+          <p:cNvPr id="5" name="Text 2"/>
           <p:cNvSpPr txBox="1"/>
           <p:nvPr/>
         </p:nvSpPr>
         <p:spPr>
           <a:xfrm>
-            <a:off x="731520" y="1371600"/>
-            <a:ext cx="7680960" cy="274320"/>
+            <a:off x="4754880" y="1005840"/>
+            <a:ext cx="3657600" cy="274320"/>
           </a:xfrm>
           <a:prstGeom prst="rect">
             <a:avLst/>
@@ -2343,31 +2367,55 @@
           <a:bodyPr wrap="square" rtlCol="0" anchor="ctr"/>
           <a:lstStyle/>
           <a:p>
-            <a:pPr indent="0" marL="0">
-              <a:buNone/>
-            </a:pPr>
-            <a:r>
-              <a:rPr lang="en-US" sz="1800" b="1" dirty="0">
-                <a:solidFill>
-                  <a:srgbClr val="1E2761"/>
-                </a:solidFill>
-              </a:rPr>
-              <a:t>3D Coordinate Calculation:</a:t>
-            </a:r>
-            <a:endParaRPr lang="en-US" sz="1800" dirty="0"/>
-          </a:p>
-        </p:txBody>
-      </p:sp>
-      <p:sp>
-        <p:nvSpPr>
-          <p:cNvPr id="5" name="Text 3"/>
+            <a:pPr algn="ctr" indent="0" marL="0">
+              <a:buNone/>
+            </a:pPr>
+            <a:r>
+              <a:rPr lang="en-US" sz="1400" b="1" dirty="0">
+                <a:solidFill>
+                  <a:srgbClr val="2C5F2D"/>
+                </a:solidFill>
+              </a:rPr>
+              <a:t>Rescued by Tracking</a:t>
+            </a:r>
+            <a:endParaRPr lang="en-US" sz="1400" dirty="0"/>
+          </a:p>
+        </p:txBody>
+      </p:sp>
+      <p:pic>
+        <p:nvPicPr>
+          <p:cNvPr id="6" name="Image 1" descr="/Users/kelechiezekwe/Workspace/Computer_vision_lab/Project_work/outputs/figures/ev_real_rescued.png">    </p:cNvPr>
+          <p:cNvPicPr>
+            <a:picLocks noChangeAspect="1"/>
+          </p:cNvPicPr>
+          <p:nvPr/>
+        </p:nvPicPr>
+        <p:blipFill>
+          <a:blip r:embed="rId2"/>
+          <a:stretch>
+            <a:fillRect/>
+          </a:stretch>
+        </p:blipFill>
+        <p:spPr>
+          <a:xfrm>
+            <a:off x="4754880" y="1371600"/>
+            <a:ext cx="3657600" cy="2560320"/>
+          </a:xfrm>
+          <a:prstGeom prst="rect">
+            <a:avLst/>
+          </a:prstGeom>
+        </p:spPr>
+      </p:pic>
+      <p:sp>
+        <p:nvSpPr>
+          <p:cNvPr id="7" name="Text 3"/>
           <p:cNvSpPr txBox="1"/>
           <p:nvPr/>
         </p:nvSpPr>
         <p:spPr>
           <a:xfrm>
-            <a:off x="731520" y="1737360"/>
-            <a:ext cx="7680960" cy="822960"/>
+            <a:off x="731520" y="4206240"/>
+            <a:ext cx="7680960" cy="548640"/>
           </a:xfrm>
           <a:prstGeom prst="rect">
             <a:avLst/>
@@ -2379,152 +2427,32 @@
           <a:bodyPr wrap="square" rtlCol="0" anchor="ctr"/>
           <a:lstStyle/>
           <a:p>
-            <a:pPr marL="342900" indent="-342900">
-              <a:buSzPct val="100000"/>
-              <a:buChar char="•"/>
-            </a:pPr>
-            <a:r>
-              <a:rPr lang="en-US" sz="1500" dirty="0">
+            <a:pPr algn="ctr" indent="0" marL="0">
+              <a:buNone/>
+            </a:pPr>
+            <a:r>
+              <a:rPr lang="en-US" sz="1300" i="1" dirty="0">
                 <a:solidFill>
                   <a:srgbClr val="2C2C2C"/>
                 </a:solidFill>
               </a:rPr>
-              <a:t>• Histogram-based depth segmentation</a:t>
-            </a:r>
-            <a:endParaRPr lang="en-US" sz="1500" dirty="0"/>
-          </a:p>
-          <a:p>
-            <a:pPr marL="342900" indent="-342900">
-              <a:buSzPct val="100000"/>
-              <a:buChar char="•"/>
-            </a:pPr>
-            <a:r>
-              <a:rPr lang="en-US" sz="1500" dirty="0">
+              <a:t>Root cause: Colour/depth timing mismatch during camera motion</a:t>
+            </a:r>
+            <a:endParaRPr lang="en-US" sz="1300" dirty="0"/>
+          </a:p>
+          <a:p>
+            <a:pPr algn="ctr" indent="0" marL="0">
+              <a:buNone/>
+            </a:pPr>
+            <a:r>
+              <a:rPr lang="en-US" sz="1300" i="1" dirty="0">
                 <a:solidFill>
                   <a:srgbClr val="2C2C2C"/>
                 </a:solidFill>
               </a:rPr>
-              <a:t>• Cylinder center = front surface + 0.067m</a:t>
-            </a:r>
-            <a:endParaRPr lang="en-US" sz="1500" dirty="0"/>
-          </a:p>
-          <a:p>
-            <a:pPr marL="342900" indent="-342900">
-              <a:buSzPct val="100000"/>
-              <a:buChar char="•"/>
-            </a:pPr>
-            <a:r>
-              <a:rPr lang="en-US" sz="1500" dirty="0">
-                <a:solidFill>
-                  <a:srgbClr val="2C2C2C"/>
-                </a:solidFill>
-              </a:rPr>
-              <a:t>• Back-projection: X = (u-cx)×Z/fx, Y = (v-cy)×Z/fy</a:t>
-            </a:r>
-            <a:endParaRPr lang="en-US" sz="1500" dirty="0"/>
-          </a:p>
-        </p:txBody>
-      </p:sp>
-      <p:sp>
-        <p:nvSpPr>
-          <p:cNvPr id="6" name="Text 4"/>
-          <p:cNvSpPr txBox="1"/>
-          <p:nvPr/>
-        </p:nvSpPr>
-        <p:spPr>
-          <a:xfrm>
-            <a:off x="731520" y="2834640"/>
-            <a:ext cx="7680960" cy="274320"/>
-          </a:xfrm>
-          <a:prstGeom prst="rect">
-            <a:avLst/>
-          </a:prstGeom>
-          <a:noFill/>
-          <a:ln/>
-        </p:spPr>
-        <p:txBody>
-          <a:bodyPr wrap="square" rtlCol="0" anchor="ctr"/>
-          <a:lstStyle/>
-          <a:p>
-            <a:pPr indent="0" marL="0">
-              <a:buNone/>
-            </a:pPr>
-            <a:r>
-              <a:rPr lang="en-US" sz="1800" b="1" dirty="0">
-                <a:solidFill>
-                  <a:srgbClr val="1E2761"/>
-                </a:solidFill>
-              </a:rPr>
-              <a:t>Tracking Extension:</a:t>
-            </a:r>
-            <a:endParaRPr lang="en-US" sz="1800" dirty="0"/>
-          </a:p>
-        </p:txBody>
-      </p:sp>
-      <p:sp>
-        <p:nvSpPr>
-          <p:cNvPr id="7" name="Text 5"/>
-          <p:cNvSpPr txBox="1"/>
-          <p:nvPr/>
-        </p:nvSpPr>
-        <p:spPr>
-          <a:xfrm>
-            <a:off x="731520" y="3200400"/>
-            <a:ext cx="7680960" cy="822960"/>
-          </a:xfrm>
-          <a:prstGeom prst="rect">
-            <a:avLst/>
-          </a:prstGeom>
-          <a:noFill/>
-          <a:ln/>
-        </p:spPr>
-        <p:txBody>
-          <a:bodyPr wrap="square" rtlCol="0" anchor="ctr"/>
-          <a:lstStyle/>
-          <a:p>
-            <a:pPr marL="342900" indent="-342900">
-              <a:buSzPct val="100000"/>
-              <a:buChar char="•"/>
-            </a:pPr>
-            <a:r>
-              <a:rPr lang="en-US" sz="1500" dirty="0">
-                <a:solidFill>
-                  <a:srgbClr val="2C2C2C"/>
-                </a:solidFill>
-              </a:rPr>
-              <a:t>• Conservative rescue criteria</a:t>
-            </a:r>
-            <a:endParaRPr lang="en-US" sz="1500" dirty="0"/>
-          </a:p>
-          <a:p>
-            <a:pPr marL="342900" indent="-342900">
-              <a:buSzPct val="100000"/>
-              <a:buChar char="•"/>
-            </a:pPr>
-            <a:r>
-              <a:rPr lang="en-US" sz="1500" dirty="0">
-                <a:solidFill>
-                  <a:srgbClr val="2C2C2C"/>
-                </a:solidFill>
-              </a:rPr>
-              <a:t>• Recovers temporal edge cases</a:t>
-            </a:r>
-            <a:endParaRPr lang="en-US" sz="1500" dirty="0"/>
-          </a:p>
-          <a:p>
-            <a:pPr marL="342900" indent="-342900">
-              <a:buSzPct val="100000"/>
-              <a:buChar char="•"/>
-            </a:pPr>
-            <a:r>
-              <a:rPr lang="en-US" sz="1500" dirty="0">
-                <a:solidFill>
-                  <a:srgbClr val="2C2C2C"/>
-                </a:solidFill>
-              </a:rPr>
-              <a:t>• Maintains 0% FPR</a:t>
-            </a:r>
-            <a:endParaRPr lang="en-US" sz="1500" dirty="0"/>
+              <a:t>Solution: Stage 3 tracking recovers both!</a:t>
+            </a:r>
+            <a:endParaRPr lang="en-US" sz="1300" dirty="0"/>
           </a:p>
         </p:txBody>
       </p:sp>
@@ -2590,7 +2518,7 @@
                   <a:srgbClr val="1E2761"/>
                 </a:solidFill>
               </a:rPr>
-              <a:t>Stage 3: Perfect Final Performance</a:t>
+              <a:t>Stage 3: 3D Localization Method</a:t>
             </a:r>
             <a:endParaRPr lang="en-US" sz="3600" dirty="0"/>
           </a:p>
@@ -2604,8 +2532,8 @@
         </p:nvSpPr>
         <p:spPr>
           <a:xfrm>
-            <a:off x="731520" y="1097280"/>
-            <a:ext cx="3657600" cy="274320"/>
+            <a:off x="457200" y="868680"/>
+            <a:ext cx="8229600" cy="274320"/>
           </a:xfrm>
           <a:prstGeom prst="rect">
             <a:avLst/>
@@ -2621,27 +2549,107 @@
               <a:buNone/>
             </a:pPr>
             <a:r>
-              <a:rPr lang="en-US" sz="1800" b="1" dirty="0">
+              <a:rPr lang="en-US" sz="1400" i="1" dirty="0">
                 <a:solidFill>
                   <a:srgbClr val="028090"/>
                 </a:solidFill>
               </a:rPr>
-              <a:t>3D Accuracy:</a:t>
-            </a:r>
-            <a:endParaRPr lang="en-US" sz="1800" dirty="0"/>
-          </a:p>
-        </p:txBody>
-      </p:sp>
-      <p:sp>
-        <p:nvSpPr>
-          <p:cNvPr id="4" name="Text 2"/>
+              <a:t>Responsible: Thanigaiarasu Shanmugam</a:t>
+            </a:r>
+            <a:endParaRPr lang="en-US" sz="1400" dirty="0"/>
+          </a:p>
+        </p:txBody>
+      </p:sp>
+      <p:pic>
+        <p:nvPicPr>
+          <p:cNvPr id="4" name="Image 0" descr="/Users/kelechiezekwe/Workspace/Computer_vision_lab/Project_work/outputs/figures/fig_3d_method.png">    </p:cNvPr>
+          <p:cNvPicPr>
+            <a:picLocks noChangeAspect="1"/>
+          </p:cNvPicPr>
+          <p:nvPr/>
+        </p:nvPicPr>
+        <p:blipFill>
+          <a:blip r:embed="rId1"/>
+          <a:stretch>
+            <a:fillRect/>
+          </a:stretch>
+        </p:blipFill>
+        <p:spPr>
+          <a:xfrm>
+            <a:off x="731520" y="1371600"/>
+            <a:ext cx="3657600" cy="3200400"/>
+          </a:xfrm>
+          <a:prstGeom prst="rect">
+            <a:avLst/>
+          </a:prstGeom>
+        </p:spPr>
+      </p:pic>
+      <p:sp>
+        <p:nvSpPr>
+          <p:cNvPr id="5" name="Shape 2"/>
+          <p:cNvSpPr/>
+          <p:nvPr/>
+        </p:nvSpPr>
+        <p:spPr>
+          <a:xfrm>
+            <a:off x="4754880" y="1371600"/>
+            <a:ext cx="3657600" cy="2011680"/>
+          </a:xfrm>
+          <a:prstGeom prst="rect">
+            <a:avLst/>
+          </a:prstGeom>
+          <a:solidFill>
+            <a:srgbClr val="F5F5F5"/>
+          </a:solidFill>
+          <a:ln/>
+        </p:spPr>
+      </p:sp>
+      <p:sp>
+        <p:nvSpPr>
+          <p:cNvPr id="6" name="Text 3"/>
           <p:cNvSpPr txBox="1"/>
           <p:nvPr/>
         </p:nvSpPr>
         <p:spPr>
           <a:xfrm>
-            <a:off x="731520" y="1463040"/>
-            <a:ext cx="3657600" cy="822960"/>
+            <a:off x="4937760" y="1463040"/>
+            <a:ext cx="3291840" cy="274320"/>
+          </a:xfrm>
+          <a:prstGeom prst="rect">
+            <a:avLst/>
+          </a:prstGeom>
+          <a:noFill/>
+          <a:ln/>
+        </p:spPr>
+        <p:txBody>
+          <a:bodyPr wrap="square" rtlCol="0" anchor="ctr"/>
+          <a:lstStyle/>
+          <a:p>
+            <a:pPr indent="0" marL="0">
+              <a:buNone/>
+            </a:pPr>
+            <a:r>
+              <a:rPr lang="en-US" sz="1400" b="1" dirty="0">
+                <a:solidFill>
+                  <a:srgbClr val="1E2761"/>
+                </a:solidFill>
+              </a:rPr>
+              <a:t>3D Coordinate Calculation:</a:t>
+            </a:r>
+            <a:endParaRPr lang="en-US" sz="1400" dirty="0"/>
+          </a:p>
+        </p:txBody>
+      </p:sp>
+      <p:sp>
+        <p:nvSpPr>
+          <p:cNvPr id="7" name="Text 4"/>
+          <p:cNvSpPr txBox="1"/>
+          <p:nvPr/>
+        </p:nvSpPr>
+        <p:spPr>
+          <a:xfrm>
+            <a:off x="4937760" y="1828800"/>
+            <a:ext cx="3291840" cy="1097280"/>
           </a:xfrm>
           <a:prstGeom prst="rect">
             <a:avLst/>
@@ -2658,14 +2666,14 @@
               <a:buChar char="•"/>
             </a:pPr>
             <a:r>
-              <a:rPr lang="en-US" sz="1400" dirty="0">
+              <a:rPr lang="en-US" sz="1200" dirty="0">
                 <a:solidFill>
                   <a:srgbClr val="2C2C2C"/>
                 </a:solidFill>
               </a:rPr>
-              <a:t>• Height above floor: 0.49 ± 0.05m</a:t>
-            </a:r>
-            <a:endParaRPr lang="en-US" sz="1400" dirty="0"/>
+              <a:t>• Histogram-based depth segmentation</a:t>
+            </a:r>
+            <a:endParaRPr lang="en-US" sz="1200" dirty="0"/>
           </a:p>
           <a:p>
             <a:pPr marL="342900" indent="-342900">
@@ -2673,14 +2681,14 @@
               <a:buChar char="•"/>
             </a:pPr>
             <a:r>
-              <a:rPr lang="en-US" sz="1400" dirty="0">
+              <a:rPr lang="en-US" sz="1200" dirty="0">
                 <a:solidFill>
                   <a:srgbClr val="2C2C2C"/>
                 </a:solidFill>
               </a:rPr>
-              <a:t>• Consistent across all frames</a:t>
-            </a:r>
-            <a:endParaRPr lang="en-US" sz="1400" dirty="0"/>
+              <a:t>• Cylinder center = front + 0.067m</a:t>
+            </a:r>
+            <a:endParaRPr lang="en-US" sz="1200" dirty="0"/>
           </a:p>
           <a:p>
             <a:pPr marL="342900" indent="-342900">
@@ -2688,165 +2696,78 @@
               <a:buChar char="•"/>
             </a:pPr>
             <a:r>
-              <a:rPr lang="en-US" sz="1400" dirty="0">
+              <a:rPr lang="en-US" sz="1200" dirty="0">
                 <a:solidFill>
                   <a:srgbClr val="2C2C2C"/>
                 </a:solidFill>
               </a:rPr>
-              <a:t>• Validates 3D estimation accuracy</a:t>
-            </a:r>
-            <a:endParaRPr lang="en-US" sz="1400" dirty="0"/>
-          </a:p>
-        </p:txBody>
-      </p:sp>
-      <p:sp>
-        <p:nvSpPr>
-          <p:cNvPr id="5" name="Text 3"/>
-          <p:cNvSpPr txBox="1"/>
-          <p:nvPr/>
-        </p:nvSpPr>
-        <p:spPr>
-          <a:xfrm>
-            <a:off x="4754880" y="1097280"/>
-            <a:ext cx="3657600" cy="274320"/>
-          </a:xfrm>
-          <a:prstGeom prst="rect">
-            <a:avLst/>
-          </a:prstGeom>
-          <a:noFill/>
-          <a:ln/>
-        </p:spPr>
-        <p:txBody>
-          <a:bodyPr wrap="square" rtlCol="0" anchor="ctr"/>
-          <a:lstStyle/>
-          <a:p>
-            <a:pPr indent="0" marL="0">
-              <a:buNone/>
-            </a:pPr>
-            <a:r>
-              <a:rPr lang="en-US" sz="1800" b="1" dirty="0">
-                <a:solidFill>
-                  <a:srgbClr val="028090"/>
-                </a:solidFill>
-              </a:rPr>
-              <a:t>Tracking Results:</a:t>
-            </a:r>
-            <a:endParaRPr lang="en-US" sz="1800" dirty="0"/>
-          </a:p>
-        </p:txBody>
-      </p:sp>
-      <p:sp>
-        <p:nvSpPr>
-          <p:cNvPr id="6" name="Text 4"/>
-          <p:cNvSpPr txBox="1"/>
-          <p:nvPr/>
-        </p:nvSpPr>
-        <p:spPr>
-          <a:xfrm>
-            <a:off x="4754880" y="1463040"/>
-            <a:ext cx="3657600" cy="1097280"/>
-          </a:xfrm>
-          <a:prstGeom prst="rect">
-            <a:avLst/>
-          </a:prstGeom>
-          <a:noFill/>
-          <a:ln/>
-        </p:spPr>
-        <p:txBody>
-          <a:bodyPr wrap="square" rtlCol="0" anchor="ctr"/>
-          <a:lstStyle/>
+              <a:t>• X = (u-cx)×Z/fx</a:t>
+            </a:r>
+            <a:endParaRPr lang="en-US" sz="1200" dirty="0"/>
+          </a:p>
           <a:p>
             <a:pPr marL="342900" indent="-342900">
               <a:buSzPct val="100000"/>
               <a:buChar char="•"/>
             </a:pPr>
             <a:r>
+              <a:rPr lang="en-US" sz="1200" dirty="0">
+                <a:solidFill>
+                  <a:srgbClr val="2C2C2C"/>
+                </a:solidFill>
+              </a:rPr>
+              <a:t>• Y = (v-cy)×Z/fy</a:t>
+            </a:r>
+            <a:endParaRPr lang="en-US" sz="1200" dirty="0"/>
+          </a:p>
+        </p:txBody>
+      </p:sp>
+      <p:sp>
+        <p:nvSpPr>
+          <p:cNvPr id="8" name="Text 5"/>
+          <p:cNvSpPr txBox="1"/>
+          <p:nvPr/>
+        </p:nvSpPr>
+        <p:spPr>
+          <a:xfrm>
+            <a:off x="4937760" y="3108960"/>
+            <a:ext cx="3291840" cy="228600"/>
+          </a:xfrm>
+          <a:prstGeom prst="rect">
+            <a:avLst/>
+          </a:prstGeom>
+          <a:noFill/>
+          <a:ln/>
+        </p:spPr>
+        <p:txBody>
+          <a:bodyPr wrap="square" rtlCol="0" anchor="ctr"/>
+          <a:lstStyle/>
+          <a:p>
+            <a:pPr indent="0" marL="0">
+              <a:buNone/>
+            </a:pPr>
+            <a:r>
               <a:rPr lang="en-US" sz="1400" b="1" dirty="0">
                 <a:solidFill>
-                  <a:srgbClr val="2C5F2D"/>
-                </a:solidFill>
-              </a:rPr>
-              <a:t>• 2 real objects rescued (timing issues)</a:t>
+                  <a:srgbClr val="1E2761"/>
+                </a:solidFill>
+              </a:rPr>
+              <a:t>Tracking Extension:</a:t>
             </a:r>
             <a:endParaRPr lang="en-US" sz="1400" dirty="0"/>
           </a:p>
-          <a:p>
-            <a:pPr marL="342900" indent="-342900">
-              <a:buSzPct val="100000"/>
-              <a:buChar char="•"/>
-            </a:pPr>
-            <a:r>
-              <a:rPr lang="en-US" sz="1400" b="1" dirty="0">
-                <a:solidFill>
-                  <a:srgbClr val="2C5F2D"/>
-                </a:solidFill>
-              </a:rPr>
-              <a:t>• 0 decoys added (conservative)</a:t>
-            </a:r>
-            <a:endParaRPr lang="en-US" sz="1400" dirty="0"/>
-          </a:p>
-          <a:p>
-            <a:pPr marL="342900" indent="-342900">
-              <a:buSzPct val="100000"/>
-              <a:buChar char="•"/>
-            </a:pPr>
-            <a:r>
-              <a:rPr lang="en-US" sz="1400" b="1" dirty="0">
-                <a:solidFill>
-                  <a:srgbClr val="2C5F2D"/>
-                </a:solidFill>
-              </a:rPr>
-              <a:t>• Final TPR: 100% (45/45)</a:t>
-            </a:r>
-            <a:endParaRPr lang="en-US" sz="1400" dirty="0"/>
-          </a:p>
-          <a:p>
-            <a:pPr marL="342900" indent="-342900">
-              <a:buSzPct val="100000"/>
-              <a:buChar char="•"/>
-            </a:pPr>
-            <a:r>
-              <a:rPr lang="en-US" sz="1400" b="1" dirty="0">
-                <a:solidFill>
-                  <a:srgbClr val="2C5F2D"/>
-                </a:solidFill>
-              </a:rPr>
-              <a:t>• Final FPR: 0% (0/103)</a:t>
-            </a:r>
-            <a:endParaRPr lang="en-US" sz="1400" dirty="0"/>
-          </a:p>
-        </p:txBody>
-      </p:sp>
-      <p:sp>
-        <p:nvSpPr>
-          <p:cNvPr id="7" name="Shape 5"/>
-          <p:cNvSpPr/>
-          <p:nvPr/>
-        </p:nvSpPr>
-        <p:spPr>
-          <a:xfrm>
-            <a:off x="1371600" y="3017520"/>
-            <a:ext cx="6400800" cy="640080"/>
-          </a:xfrm>
-          <a:prstGeom prst="rect">
-            <a:avLst/>
-          </a:prstGeom>
-          <a:solidFill>
-            <a:srgbClr val="2C5F2D"/>
-          </a:solidFill>
-          <a:ln/>
-        </p:spPr>
-      </p:sp>
-      <p:sp>
-        <p:nvSpPr>
-          <p:cNvPr id="8" name="Text 6"/>
+        </p:txBody>
+      </p:sp>
+      <p:sp>
+        <p:nvSpPr>
+          <p:cNvPr id="9" name="Text 6"/>
           <p:cNvSpPr txBox="1"/>
           <p:nvPr/>
         </p:nvSpPr>
         <p:spPr>
           <a:xfrm>
-            <a:off x="1554480" y="3154680"/>
-            <a:ext cx="6035040" cy="365760"/>
+            <a:off x="4937760" y="3383280"/>
+            <a:ext cx="3291840" cy="457200"/>
           </a:xfrm>
           <a:prstGeom prst="rect">
             <a:avLst/>
@@ -2858,52 +2779,30 @@
           <a:bodyPr wrap="square" rtlCol="0" anchor="ctr"/>
           <a:lstStyle/>
           <a:p>
-            <a:pPr algn="ctr" indent="0" marL="0">
-              <a:buNone/>
-            </a:pPr>
-            <a:r>
-              <a:rPr lang="en-US" sz="2200" b="1" dirty="0">
-                <a:solidFill>
-                  <a:srgbClr val="FFFFFF"/>
-                </a:solidFill>
-              </a:rPr>
-              <a:t>Perfect Final System: 100% TPR, 0% FPR</a:t>
-            </a:r>
-            <a:endParaRPr lang="en-US" sz="2200" dirty="0"/>
-          </a:p>
-        </p:txBody>
-      </p:sp>
-      <p:sp>
-        <p:nvSpPr>
-          <p:cNvPr id="9" name="Text 7"/>
-          <p:cNvSpPr txBox="1"/>
-          <p:nvPr/>
-        </p:nvSpPr>
-        <p:spPr>
-          <a:xfrm>
-            <a:off x="731520" y="4114800"/>
-            <a:ext cx="7680960" cy="274320"/>
-          </a:xfrm>
-          <a:prstGeom prst="rect">
-            <a:avLst/>
-          </a:prstGeom>
-          <a:noFill/>
-          <a:ln/>
-        </p:spPr>
-        <p:txBody>
-          <a:bodyPr wrap="square" rtlCol="0" anchor="ctr"/>
-          <a:lstStyle/>
-          <a:p>
             <a:pPr indent="0" marL="0">
               <a:buNone/>
             </a:pPr>
             <a:r>
-              <a:rPr lang="en-US" sz="1200" i="1" dirty="0">
+              <a:rPr lang="en-US" sz="1200" dirty="0">
                 <a:solidFill>
                   <a:srgbClr val="2C2C2C"/>
                 </a:solidFill>
               </a:rPr>
-              <a:t>Reference: See Figure 10 (Height Consistency graph)</a:t>
+              <a:t>Conservative rescue criteria</a:t>
+            </a:r>
+            <a:endParaRPr lang="en-US" sz="1200" dirty="0"/>
+          </a:p>
+          <a:p>
+            <a:pPr indent="0" marL="0">
+              <a:buNone/>
+            </a:pPr>
+            <a:r>
+              <a:rPr lang="en-US" sz="1200" dirty="0">
+                <a:solidFill>
+                  <a:srgbClr val="2C2C2C"/>
+                </a:solidFill>
+              </a:rPr>
+              <a:t>Recovering temporal edge cases</a:t>
             </a:r>
             <a:endParaRPr lang="en-US" sz="1200" dirty="0"/>
           </a:p>
@@ -2971,1064 +2870,56 @@
                   <a:srgbClr val="1E2761"/>
                 </a:solidFill>
               </a:rPr>
-              <a:t>Final System Performance</a:t>
+              <a:t>Stage 3: 3D Accuracy Validation</a:t>
             </a:r>
             <a:endParaRPr lang="en-US" sz="3600" dirty="0"/>
           </a:p>
         </p:txBody>
       </p:sp>
-      <p:sp>
-        <p:nvSpPr>
-          <p:cNvPr id="3" name="Text 1"/>
-          <p:cNvSpPr txBox="1"/>
-          <p:nvPr/>
-        </p:nvSpPr>
-        <p:spPr>
-          <a:xfrm>
-            <a:off x="731520" y="1005840"/>
-            <a:ext cx="7680960" cy="274320"/>
-          </a:xfrm>
-          <a:prstGeom prst="rect">
-            <a:avLst/>
-          </a:prstGeom>
-          <a:noFill/>
-          <a:ln/>
-        </p:spPr>
-        <p:txBody>
-          <a:bodyPr wrap="square" rtlCol="0" anchor="ctr"/>
-          <a:lstStyle/>
-          <a:p>
-            <a:pPr indent="0" marL="0">
-              <a:buNone/>
-            </a:pPr>
-            <a:r>
-              <a:rPr lang="en-US" sz="1600" i="1" dirty="0">
-                <a:solidFill>
-                  <a:srgbClr val="2C2C2C"/>
-                </a:solidFill>
-              </a:rPr>
-              <a:t>Test Set (67 frames, 148 objects):</a:t>
-            </a:r>
-            <a:endParaRPr lang="en-US" sz="1600" dirty="0"/>
-          </a:p>
-        </p:txBody>
-      </p:sp>
-      <p:graphicFrame>
-        <p:nvGraphicFramePr>
-          <p:cNvPr id="13" name="Table 0"/>
-          <p:cNvGraphicFramePr>
-            <a:graphicFrameLocks noGrp="1"/>
-          </p:cNvGraphicFramePr>
-          <p:nvPr>
-            <p:extLst>
-              <p:ext uri="{D42A27DB-BD31-4B8C-83A1-F6EECF244321}">
-                <p14:modId xmlns:p14="http://schemas.microsoft.com/office/powerpoint/2010/main" val="1579011935"/>
-              </p:ext>
-            </p:extLst>
-          </p:nvPr>
-        </p:nvGraphicFramePr>
-        <p:xfrm>
-          <a:off x="731520" y="1463040"/>
-          <a:ext cx="7680960" cy="1371600"/>
-        </p:xfrm>
-        <a:graphic>
-          <a:graphicData uri="http://schemas.openxmlformats.org/drawingml/2006/table">
-            <a:tbl>
-              <a:tblPr/>
-              <a:tblGrid>
-                <a:gridCol w="1920240"/>
-                <a:gridCol w="1920240"/>
-                <a:gridCol w="1920240"/>
-                <a:gridCol w="1920240"/>
-              </a:tblGrid>
-              <a:tr h="342900">
-                <a:tc>
-                  <a:txBody>
-                    <a:bodyPr/>
-                    <a:lstStyle/>
-                    <a:p>
-                      <a:pPr algn="ctr" indent="0" marL="0">
-                        <a:buNone/>
-                      </a:pPr>
-                      <a:r>
-                        <a:rPr lang="en-US" sz="1400" dirty="0">
-                          <a:solidFill>
-                            <a:srgbClr val="2C2C2C"/>
-                          </a:solidFill>
-                        </a:rPr>
-                        <a:t>Metric</a:t>
-                      </a:r>
-                      <a:endParaRPr lang="en-US" sz="1400" dirty="0"/>
-                    </a:p>
-                  </a:txBody>
-                  <a:tcPr marL="91440" marR="91440" marT="45720" marB="45720" anchor="ctr">
-                    <a:lnL w="12700" cap="flat" cmpd="sng" algn="ctr">
-                      <a:solidFill>
-                        <a:srgbClr val="1E2761"/>
-                      </a:solidFill>
-                      <a:prstDash val="solid"/>
-                      <a:round/>
-                      <a:headEnd type="none" w="med" len="med"/>
-                      <a:tailEnd type="none" w="med" len="med"/>
-                    </a:lnL>
-                    <a:lnR w="12700" cap="flat" cmpd="sng" algn="ctr">
-                      <a:solidFill>
-                        <a:srgbClr val="1E2761"/>
-                      </a:solidFill>
-                      <a:prstDash val="solid"/>
-                      <a:round/>
-                      <a:headEnd type="none" w="med" len="med"/>
-                      <a:tailEnd type="none" w="med" len="med"/>
-                    </a:lnR>
-                    <a:lnT w="12700" cap="flat" cmpd="sng" algn="ctr">
-                      <a:solidFill>
-                        <a:srgbClr val="1E2761"/>
-                      </a:solidFill>
-                      <a:prstDash val="solid"/>
-                      <a:round/>
-                      <a:headEnd type="none" w="med" len="med"/>
-                      <a:tailEnd type="none" w="med" len="med"/>
-                    </a:lnT>
-                    <a:lnB w="12700" cap="flat" cmpd="sng" algn="ctr">
-                      <a:solidFill>
-                        <a:srgbClr val="1E2761"/>
-                      </a:solidFill>
-                      <a:prstDash val="solid"/>
-                      <a:round/>
-                      <a:headEnd type="none" w="med" len="med"/>
-                      <a:tailEnd type="none" w="med" len="med"/>
-                    </a:lnB>
-                    <a:solidFill>
-                      <a:srgbClr val="F5F5F5"/>
-                    </a:solidFill>
-                  </a:tcPr>
-                </a:tc>
-                <a:tc>
-                  <a:txBody>
-                    <a:bodyPr/>
-                    <a:lstStyle/>
-                    <a:p>
-                      <a:pPr algn="ctr" indent="0" marL="0">
-                        <a:buNone/>
-                      </a:pPr>
-                      <a:r>
-                        <a:rPr lang="en-US" sz="1400" dirty="0">
-                          <a:solidFill>
-                            <a:srgbClr val="2C2C2C"/>
-                          </a:solidFill>
-                        </a:rPr>
-                        <a:t>Target</a:t>
-                      </a:r>
-                      <a:endParaRPr lang="en-US" sz="1400" dirty="0"/>
-                    </a:p>
-                  </a:txBody>
-                  <a:tcPr marL="91440" marR="91440" marT="45720" marB="45720" anchor="ctr">
-                    <a:lnL w="12700" cap="flat" cmpd="sng" algn="ctr">
-                      <a:solidFill>
-                        <a:srgbClr val="1E2761"/>
-                      </a:solidFill>
-                      <a:prstDash val="solid"/>
-                      <a:round/>
-                      <a:headEnd type="none" w="med" len="med"/>
-                      <a:tailEnd type="none" w="med" len="med"/>
-                    </a:lnL>
-                    <a:lnR w="12700" cap="flat" cmpd="sng" algn="ctr">
-                      <a:solidFill>
-                        <a:srgbClr val="1E2761"/>
-                      </a:solidFill>
-                      <a:prstDash val="solid"/>
-                      <a:round/>
-                      <a:headEnd type="none" w="med" len="med"/>
-                      <a:tailEnd type="none" w="med" len="med"/>
-                    </a:lnR>
-                    <a:lnT w="12700" cap="flat" cmpd="sng" algn="ctr">
-                      <a:solidFill>
-                        <a:srgbClr val="1E2761"/>
-                      </a:solidFill>
-                      <a:prstDash val="solid"/>
-                      <a:round/>
-                      <a:headEnd type="none" w="med" len="med"/>
-                      <a:tailEnd type="none" w="med" len="med"/>
-                    </a:lnT>
-                    <a:lnB w="12700" cap="flat" cmpd="sng" algn="ctr">
-                      <a:solidFill>
-                        <a:srgbClr val="1E2761"/>
-                      </a:solidFill>
-                      <a:prstDash val="solid"/>
-                      <a:round/>
-                      <a:headEnd type="none" w="med" len="med"/>
-                      <a:tailEnd type="none" w="med" len="med"/>
-                    </a:lnB>
-                    <a:solidFill>
-                      <a:srgbClr val="F5F5F5"/>
-                    </a:solidFill>
-                  </a:tcPr>
-                </a:tc>
-                <a:tc>
-                  <a:txBody>
-                    <a:bodyPr/>
-                    <a:lstStyle/>
-                    <a:p>
-                      <a:pPr algn="ctr" indent="0" marL="0">
-                        <a:buNone/>
-                      </a:pPr>
-                      <a:r>
-                        <a:rPr lang="en-US" sz="1400" dirty="0">
-                          <a:solidFill>
-                            <a:srgbClr val="2C2C2C"/>
-                          </a:solidFill>
-                        </a:rPr>
-                        <a:t>Achieved</a:t>
-                      </a:r>
-                      <a:endParaRPr lang="en-US" sz="1400" dirty="0"/>
-                    </a:p>
-                  </a:txBody>
-                  <a:tcPr marL="91440" marR="91440" marT="45720" marB="45720" anchor="ctr">
-                    <a:lnL w="12700" cap="flat" cmpd="sng" algn="ctr">
-                      <a:solidFill>
-                        <a:srgbClr val="1E2761"/>
-                      </a:solidFill>
-                      <a:prstDash val="solid"/>
-                      <a:round/>
-                      <a:headEnd type="none" w="med" len="med"/>
-                      <a:tailEnd type="none" w="med" len="med"/>
-                    </a:lnL>
-                    <a:lnR w="12700" cap="flat" cmpd="sng" algn="ctr">
-                      <a:solidFill>
-                        <a:srgbClr val="1E2761"/>
-                      </a:solidFill>
-                      <a:prstDash val="solid"/>
-                      <a:round/>
-                      <a:headEnd type="none" w="med" len="med"/>
-                      <a:tailEnd type="none" w="med" len="med"/>
-                    </a:lnR>
-                    <a:lnT w="12700" cap="flat" cmpd="sng" algn="ctr">
-                      <a:solidFill>
-                        <a:srgbClr val="1E2761"/>
-                      </a:solidFill>
-                      <a:prstDash val="solid"/>
-                      <a:round/>
-                      <a:headEnd type="none" w="med" len="med"/>
-                      <a:tailEnd type="none" w="med" len="med"/>
-                    </a:lnT>
-                    <a:lnB w="12700" cap="flat" cmpd="sng" algn="ctr">
-                      <a:solidFill>
-                        <a:srgbClr val="1E2761"/>
-                      </a:solidFill>
-                      <a:prstDash val="solid"/>
-                      <a:round/>
-                      <a:headEnd type="none" w="med" len="med"/>
-                      <a:tailEnd type="none" w="med" len="med"/>
-                    </a:lnB>
-                    <a:solidFill>
-                      <a:srgbClr val="F5F5F5"/>
-                    </a:solidFill>
-                  </a:tcPr>
-                </a:tc>
-                <a:tc>
-                  <a:txBody>
-                    <a:bodyPr/>
-                    <a:lstStyle/>
-                    <a:p>
-                      <a:pPr algn="ctr" indent="0" marL="0">
-                        <a:buNone/>
-                      </a:pPr>
-                      <a:r>
-                        <a:rPr lang="en-US" sz="1400" dirty="0">
-                          <a:solidFill>
-                            <a:srgbClr val="2C2C2C"/>
-                          </a:solidFill>
-                        </a:rPr>
-                        <a:t>Status</a:t>
-                      </a:r>
-                      <a:endParaRPr lang="en-US" sz="1400" dirty="0"/>
-                    </a:p>
-                  </a:txBody>
-                  <a:tcPr marL="91440" marR="91440" marT="45720" marB="45720" anchor="ctr">
-                    <a:lnL w="12700" cap="flat" cmpd="sng" algn="ctr">
-                      <a:solidFill>
-                        <a:srgbClr val="1E2761"/>
-                      </a:solidFill>
-                      <a:prstDash val="solid"/>
-                      <a:round/>
-                      <a:headEnd type="none" w="med" len="med"/>
-                      <a:tailEnd type="none" w="med" len="med"/>
-                    </a:lnL>
-                    <a:lnR w="12700" cap="flat" cmpd="sng" algn="ctr">
-                      <a:solidFill>
-                        <a:srgbClr val="1E2761"/>
-                      </a:solidFill>
-                      <a:prstDash val="solid"/>
-                      <a:round/>
-                      <a:headEnd type="none" w="med" len="med"/>
-                      <a:tailEnd type="none" w="med" len="med"/>
-                    </a:lnR>
-                    <a:lnT w="12700" cap="flat" cmpd="sng" algn="ctr">
-                      <a:solidFill>
-                        <a:srgbClr val="1E2761"/>
-                      </a:solidFill>
-                      <a:prstDash val="solid"/>
-                      <a:round/>
-                      <a:headEnd type="none" w="med" len="med"/>
-                      <a:tailEnd type="none" w="med" len="med"/>
-                    </a:lnT>
-                    <a:lnB w="12700" cap="flat" cmpd="sng" algn="ctr">
-                      <a:solidFill>
-                        <a:srgbClr val="1E2761"/>
-                      </a:solidFill>
-                      <a:prstDash val="solid"/>
-                      <a:round/>
-                      <a:headEnd type="none" w="med" len="med"/>
-                      <a:tailEnd type="none" w="med" len="med"/>
-                    </a:lnB>
-                    <a:solidFill>
-                      <a:srgbClr val="F5F5F5"/>
-                    </a:solidFill>
-                  </a:tcPr>
-                </a:tc>
-              </a:tr>
-              <a:tr h="342900">
-                <a:tc>
-                  <a:txBody>
-                    <a:bodyPr/>
-                    <a:lstStyle/>
-                    <a:p>
-                      <a:pPr algn="ctr" indent="0" marL="0">
-                        <a:buNone/>
-                      </a:pPr>
-                      <a:r>
-                        <a:rPr lang="en-US" sz="1400" dirty="0">
-                          <a:solidFill>
-                            <a:srgbClr val="2C2C2C"/>
-                          </a:solidFill>
-                        </a:rPr>
-                        <a:t>Real-object TPR</a:t>
-                      </a:r>
-                      <a:endParaRPr lang="en-US" sz="1400" dirty="0"/>
-                    </a:p>
-                  </a:txBody>
-                  <a:tcPr marL="91440" marR="91440" marT="45720" marB="45720" anchor="ctr">
-                    <a:lnL w="12700" cap="flat" cmpd="sng" algn="ctr">
-                      <a:solidFill>
-                        <a:srgbClr val="1E2761"/>
-                      </a:solidFill>
-                      <a:prstDash val="solid"/>
-                      <a:round/>
-                      <a:headEnd type="none" w="med" len="med"/>
-                      <a:tailEnd type="none" w="med" len="med"/>
-                    </a:lnL>
-                    <a:lnR w="12700" cap="flat" cmpd="sng" algn="ctr">
-                      <a:solidFill>
-                        <a:srgbClr val="1E2761"/>
-                      </a:solidFill>
-                      <a:prstDash val="solid"/>
-                      <a:round/>
-                      <a:headEnd type="none" w="med" len="med"/>
-                      <a:tailEnd type="none" w="med" len="med"/>
-                    </a:lnR>
-                    <a:lnT w="12700" cap="flat" cmpd="sng" algn="ctr">
-                      <a:solidFill>
-                        <a:srgbClr val="1E2761"/>
-                      </a:solidFill>
-                      <a:prstDash val="solid"/>
-                      <a:round/>
-                      <a:headEnd type="none" w="med" len="med"/>
-                      <a:tailEnd type="none" w="med" len="med"/>
-                    </a:lnT>
-                    <a:lnB w="12700" cap="flat" cmpd="sng" algn="ctr">
-                      <a:solidFill>
-                        <a:srgbClr val="1E2761"/>
-                      </a:solidFill>
-                      <a:prstDash val="solid"/>
-                      <a:round/>
-                      <a:headEnd type="none" w="med" len="med"/>
-                      <a:tailEnd type="none" w="med" len="med"/>
-                    </a:lnB>
-                    <a:solidFill>
-                      <a:srgbClr val="F5F5F5"/>
-                    </a:solidFill>
-                  </a:tcPr>
-                </a:tc>
-                <a:tc>
-                  <a:txBody>
-                    <a:bodyPr/>
-                    <a:lstStyle/>
-                    <a:p>
-                      <a:pPr algn="ctr" indent="0" marL="0">
-                        <a:buNone/>
-                      </a:pPr>
-                      <a:r>
-                        <a:rPr lang="en-US" sz="1400" dirty="0">
-                          <a:solidFill>
-                            <a:srgbClr val="2C2C2C"/>
-                          </a:solidFill>
-                        </a:rPr>
-                        <a:t>≥75%</a:t>
-                      </a:r>
-                      <a:endParaRPr lang="en-US" sz="1400" dirty="0"/>
-                    </a:p>
-                  </a:txBody>
-                  <a:tcPr marL="91440" marR="91440" marT="45720" marB="45720" anchor="ctr">
-                    <a:lnL w="12700" cap="flat" cmpd="sng" algn="ctr">
-                      <a:solidFill>
-                        <a:srgbClr val="1E2761"/>
-                      </a:solidFill>
-                      <a:prstDash val="solid"/>
-                      <a:round/>
-                      <a:headEnd type="none" w="med" len="med"/>
-                      <a:tailEnd type="none" w="med" len="med"/>
-                    </a:lnL>
-                    <a:lnR w="12700" cap="flat" cmpd="sng" algn="ctr">
-                      <a:solidFill>
-                        <a:srgbClr val="1E2761"/>
-                      </a:solidFill>
-                      <a:prstDash val="solid"/>
-                      <a:round/>
-                      <a:headEnd type="none" w="med" len="med"/>
-                      <a:tailEnd type="none" w="med" len="med"/>
-                    </a:lnR>
-                    <a:lnT w="12700" cap="flat" cmpd="sng" algn="ctr">
-                      <a:solidFill>
-                        <a:srgbClr val="1E2761"/>
-                      </a:solidFill>
-                      <a:prstDash val="solid"/>
-                      <a:round/>
-                      <a:headEnd type="none" w="med" len="med"/>
-                      <a:tailEnd type="none" w="med" len="med"/>
-                    </a:lnT>
-                    <a:lnB w="12700" cap="flat" cmpd="sng" algn="ctr">
-                      <a:solidFill>
-                        <a:srgbClr val="1E2761"/>
-                      </a:solidFill>
-                      <a:prstDash val="solid"/>
-                      <a:round/>
-                      <a:headEnd type="none" w="med" len="med"/>
-                      <a:tailEnd type="none" w="med" len="med"/>
-                    </a:lnB>
-                    <a:solidFill>
-                      <a:srgbClr val="F5F5F5"/>
-                    </a:solidFill>
-                  </a:tcPr>
-                </a:tc>
-                <a:tc>
-                  <a:txBody>
-                    <a:bodyPr/>
-                    <a:lstStyle/>
-                    <a:p>
-                      <a:pPr algn="ctr" indent="0" marL="0">
-                        <a:buNone/>
-                      </a:pPr>
-                      <a:r>
-                        <a:rPr lang="en-US" sz="1400" dirty="0">
-                          <a:solidFill>
-                            <a:srgbClr val="2C2C2C"/>
-                          </a:solidFill>
-                        </a:rPr>
-                        <a:t>100%</a:t>
-                      </a:r>
-                      <a:endParaRPr lang="en-US" sz="1400" dirty="0"/>
-                    </a:p>
-                  </a:txBody>
-                  <a:tcPr marL="91440" marR="91440" marT="45720" marB="45720" anchor="ctr">
-                    <a:lnL w="12700" cap="flat" cmpd="sng" algn="ctr">
-                      <a:solidFill>
-                        <a:srgbClr val="1E2761"/>
-                      </a:solidFill>
-                      <a:prstDash val="solid"/>
-                      <a:round/>
-                      <a:headEnd type="none" w="med" len="med"/>
-                      <a:tailEnd type="none" w="med" len="med"/>
-                    </a:lnL>
-                    <a:lnR w="12700" cap="flat" cmpd="sng" algn="ctr">
-                      <a:solidFill>
-                        <a:srgbClr val="1E2761"/>
-                      </a:solidFill>
-                      <a:prstDash val="solid"/>
-                      <a:round/>
-                      <a:headEnd type="none" w="med" len="med"/>
-                      <a:tailEnd type="none" w="med" len="med"/>
-                    </a:lnR>
-                    <a:lnT w="12700" cap="flat" cmpd="sng" algn="ctr">
-                      <a:solidFill>
-                        <a:srgbClr val="1E2761"/>
-                      </a:solidFill>
-                      <a:prstDash val="solid"/>
-                      <a:round/>
-                      <a:headEnd type="none" w="med" len="med"/>
-                      <a:tailEnd type="none" w="med" len="med"/>
-                    </a:lnT>
-                    <a:lnB w="12700" cap="flat" cmpd="sng" algn="ctr">
-                      <a:solidFill>
-                        <a:srgbClr val="1E2761"/>
-                      </a:solidFill>
-                      <a:prstDash val="solid"/>
-                      <a:round/>
-                      <a:headEnd type="none" w="med" len="med"/>
-                      <a:tailEnd type="none" w="med" len="med"/>
-                    </a:lnB>
-                    <a:solidFill>
-                      <a:srgbClr val="F5F5F5"/>
-                    </a:solidFill>
-                  </a:tcPr>
-                </a:tc>
-                <a:tc>
-                  <a:txBody>
-                    <a:bodyPr/>
-                    <a:lstStyle/>
-                    <a:p>
-                      <a:pPr algn="ctr" indent="0" marL="0">
-                        <a:buNone/>
-                      </a:pPr>
-                      <a:r>
-                        <a:rPr lang="en-US" sz="1400" dirty="0">
-                          <a:solidFill>
-                            <a:srgbClr val="2C2C2C"/>
-                          </a:solidFill>
-                        </a:rPr>
-                        <a:t>+25 points!</a:t>
-                      </a:r>
-                      <a:endParaRPr lang="en-US" sz="1400" dirty="0"/>
-                    </a:p>
-                  </a:txBody>
-                  <a:tcPr marL="91440" marR="91440" marT="45720" marB="45720" anchor="ctr">
-                    <a:lnL w="12700" cap="flat" cmpd="sng" algn="ctr">
-                      <a:solidFill>
-                        <a:srgbClr val="1E2761"/>
-                      </a:solidFill>
-                      <a:prstDash val="solid"/>
-                      <a:round/>
-                      <a:headEnd type="none" w="med" len="med"/>
-                      <a:tailEnd type="none" w="med" len="med"/>
-                    </a:lnL>
-                    <a:lnR w="12700" cap="flat" cmpd="sng" algn="ctr">
-                      <a:solidFill>
-                        <a:srgbClr val="1E2761"/>
-                      </a:solidFill>
-                      <a:prstDash val="solid"/>
-                      <a:round/>
-                      <a:headEnd type="none" w="med" len="med"/>
-                      <a:tailEnd type="none" w="med" len="med"/>
-                    </a:lnR>
-                    <a:lnT w="12700" cap="flat" cmpd="sng" algn="ctr">
-                      <a:solidFill>
-                        <a:srgbClr val="1E2761"/>
-                      </a:solidFill>
-                      <a:prstDash val="solid"/>
-                      <a:round/>
-                      <a:headEnd type="none" w="med" len="med"/>
-                      <a:tailEnd type="none" w="med" len="med"/>
-                    </a:lnT>
-                    <a:lnB w="12700" cap="flat" cmpd="sng" algn="ctr">
-                      <a:solidFill>
-                        <a:srgbClr val="1E2761"/>
-                      </a:solidFill>
-                      <a:prstDash val="solid"/>
-                      <a:round/>
-                      <a:headEnd type="none" w="med" len="med"/>
-                      <a:tailEnd type="none" w="med" len="med"/>
-                    </a:lnB>
-                    <a:solidFill>
-                      <a:srgbClr val="F5F5F5"/>
-                    </a:solidFill>
-                  </a:tcPr>
-                </a:tc>
-              </a:tr>
-              <a:tr h="342900">
-                <a:tc>
-                  <a:txBody>
-                    <a:bodyPr/>
-                    <a:lstStyle/>
-                    <a:p>
-                      <a:pPr algn="ctr" indent="0" marL="0">
-                        <a:buNone/>
-                      </a:pPr>
-                      <a:r>
-                        <a:rPr lang="en-US" sz="1400" dirty="0">
-                          <a:solidFill>
-                            <a:srgbClr val="2C2C2C"/>
-                          </a:solidFill>
-                        </a:rPr>
-                        <a:t>Decoy FPR</a:t>
-                      </a:r>
-                      <a:endParaRPr lang="en-US" sz="1400" dirty="0"/>
-                    </a:p>
-                  </a:txBody>
-                  <a:tcPr marL="91440" marR="91440" marT="45720" marB="45720" anchor="ctr">
-                    <a:lnL w="12700" cap="flat" cmpd="sng" algn="ctr">
-                      <a:solidFill>
-                        <a:srgbClr val="1E2761"/>
-                      </a:solidFill>
-                      <a:prstDash val="solid"/>
-                      <a:round/>
-                      <a:headEnd type="none" w="med" len="med"/>
-                      <a:tailEnd type="none" w="med" len="med"/>
-                    </a:lnL>
-                    <a:lnR w="12700" cap="flat" cmpd="sng" algn="ctr">
-                      <a:solidFill>
-                        <a:srgbClr val="1E2761"/>
-                      </a:solidFill>
-                      <a:prstDash val="solid"/>
-                      <a:round/>
-                      <a:headEnd type="none" w="med" len="med"/>
-                      <a:tailEnd type="none" w="med" len="med"/>
-                    </a:lnR>
-                    <a:lnT w="12700" cap="flat" cmpd="sng" algn="ctr">
-                      <a:solidFill>
-                        <a:srgbClr val="1E2761"/>
-                      </a:solidFill>
-                      <a:prstDash val="solid"/>
-                      <a:round/>
-                      <a:headEnd type="none" w="med" len="med"/>
-                      <a:tailEnd type="none" w="med" len="med"/>
-                    </a:lnT>
-                    <a:lnB w="12700" cap="flat" cmpd="sng" algn="ctr">
-                      <a:solidFill>
-                        <a:srgbClr val="1E2761"/>
-                      </a:solidFill>
-                      <a:prstDash val="solid"/>
-                      <a:round/>
-                      <a:headEnd type="none" w="med" len="med"/>
-                      <a:tailEnd type="none" w="med" len="med"/>
-                    </a:lnB>
-                    <a:solidFill>
-                      <a:srgbClr val="F5F5F5"/>
-                    </a:solidFill>
-                  </a:tcPr>
-                </a:tc>
-                <a:tc>
-                  <a:txBody>
-                    <a:bodyPr/>
-                    <a:lstStyle/>
-                    <a:p>
-                      <a:pPr algn="ctr" indent="0" marL="0">
-                        <a:buNone/>
-                      </a:pPr>
-                      <a:r>
-                        <a:rPr lang="en-US" sz="1400" dirty="0">
-                          <a:solidFill>
-                            <a:srgbClr val="2C2C2C"/>
-                          </a:solidFill>
-                        </a:rPr>
-                        <a:t>≤15%</a:t>
-                      </a:r>
-                      <a:endParaRPr lang="en-US" sz="1400" dirty="0"/>
-                    </a:p>
-                  </a:txBody>
-                  <a:tcPr marL="91440" marR="91440" marT="45720" marB="45720" anchor="ctr">
-                    <a:lnL w="12700" cap="flat" cmpd="sng" algn="ctr">
-                      <a:solidFill>
-                        <a:srgbClr val="1E2761"/>
-                      </a:solidFill>
-                      <a:prstDash val="solid"/>
-                      <a:round/>
-                      <a:headEnd type="none" w="med" len="med"/>
-                      <a:tailEnd type="none" w="med" len="med"/>
-                    </a:lnL>
-                    <a:lnR w="12700" cap="flat" cmpd="sng" algn="ctr">
-                      <a:solidFill>
-                        <a:srgbClr val="1E2761"/>
-                      </a:solidFill>
-                      <a:prstDash val="solid"/>
-                      <a:round/>
-                      <a:headEnd type="none" w="med" len="med"/>
-                      <a:tailEnd type="none" w="med" len="med"/>
-                    </a:lnR>
-                    <a:lnT w="12700" cap="flat" cmpd="sng" algn="ctr">
-                      <a:solidFill>
-                        <a:srgbClr val="1E2761"/>
-                      </a:solidFill>
-                      <a:prstDash val="solid"/>
-                      <a:round/>
-                      <a:headEnd type="none" w="med" len="med"/>
-                      <a:tailEnd type="none" w="med" len="med"/>
-                    </a:lnT>
-                    <a:lnB w="12700" cap="flat" cmpd="sng" algn="ctr">
-                      <a:solidFill>
-                        <a:srgbClr val="1E2761"/>
-                      </a:solidFill>
-                      <a:prstDash val="solid"/>
-                      <a:round/>
-                      <a:headEnd type="none" w="med" len="med"/>
-                      <a:tailEnd type="none" w="med" len="med"/>
-                    </a:lnB>
-                    <a:solidFill>
-                      <a:srgbClr val="F5F5F5"/>
-                    </a:solidFill>
-                  </a:tcPr>
-                </a:tc>
-                <a:tc>
-                  <a:txBody>
-                    <a:bodyPr/>
-                    <a:lstStyle/>
-                    <a:p>
-                      <a:pPr algn="ctr" indent="0" marL="0">
-                        <a:buNone/>
-                      </a:pPr>
-                      <a:r>
-                        <a:rPr lang="en-US" sz="1400" dirty="0">
-                          <a:solidFill>
-                            <a:srgbClr val="2C2C2C"/>
-                          </a:solidFill>
-                        </a:rPr>
-                        <a:t>0%</a:t>
-                      </a:r>
-                      <a:endParaRPr lang="en-US" sz="1400" dirty="0"/>
-                    </a:p>
-                  </a:txBody>
-                  <a:tcPr marL="91440" marR="91440" marT="45720" marB="45720" anchor="ctr">
-                    <a:lnL w="12700" cap="flat" cmpd="sng" algn="ctr">
-                      <a:solidFill>
-                        <a:srgbClr val="1E2761"/>
-                      </a:solidFill>
-                      <a:prstDash val="solid"/>
-                      <a:round/>
-                      <a:headEnd type="none" w="med" len="med"/>
-                      <a:tailEnd type="none" w="med" len="med"/>
-                    </a:lnL>
-                    <a:lnR w="12700" cap="flat" cmpd="sng" algn="ctr">
-                      <a:solidFill>
-                        <a:srgbClr val="1E2761"/>
-                      </a:solidFill>
-                      <a:prstDash val="solid"/>
-                      <a:round/>
-                      <a:headEnd type="none" w="med" len="med"/>
-                      <a:tailEnd type="none" w="med" len="med"/>
-                    </a:lnR>
-                    <a:lnT w="12700" cap="flat" cmpd="sng" algn="ctr">
-                      <a:solidFill>
-                        <a:srgbClr val="1E2761"/>
-                      </a:solidFill>
-                      <a:prstDash val="solid"/>
-                      <a:round/>
-                      <a:headEnd type="none" w="med" len="med"/>
-                      <a:tailEnd type="none" w="med" len="med"/>
-                    </a:lnT>
-                    <a:lnB w="12700" cap="flat" cmpd="sng" algn="ctr">
-                      <a:solidFill>
-                        <a:srgbClr val="1E2761"/>
-                      </a:solidFill>
-                      <a:prstDash val="solid"/>
-                      <a:round/>
-                      <a:headEnd type="none" w="med" len="med"/>
-                      <a:tailEnd type="none" w="med" len="med"/>
-                    </a:lnB>
-                    <a:solidFill>
-                      <a:srgbClr val="F5F5F5"/>
-                    </a:solidFill>
-                  </a:tcPr>
-                </a:tc>
-                <a:tc>
-                  <a:txBody>
-                    <a:bodyPr/>
-                    <a:lstStyle/>
-                    <a:p>
-                      <a:pPr algn="ctr" indent="0" marL="0">
-                        <a:buNone/>
-                      </a:pPr>
-                      <a:r>
-                        <a:rPr lang="en-US" sz="1400" dirty="0">
-                          <a:solidFill>
-                            <a:srgbClr val="2C2C2C"/>
-                          </a:solidFill>
-                        </a:rPr>
-                        <a:t>+15 points!</a:t>
-                      </a:r>
-                      <a:endParaRPr lang="en-US" sz="1400" dirty="0"/>
-                    </a:p>
-                  </a:txBody>
-                  <a:tcPr marL="91440" marR="91440" marT="45720" marB="45720" anchor="ctr">
-                    <a:lnL w="12700" cap="flat" cmpd="sng" algn="ctr">
-                      <a:solidFill>
-                        <a:srgbClr val="1E2761"/>
-                      </a:solidFill>
-                      <a:prstDash val="solid"/>
-                      <a:round/>
-                      <a:headEnd type="none" w="med" len="med"/>
-                      <a:tailEnd type="none" w="med" len="med"/>
-                    </a:lnL>
-                    <a:lnR w="12700" cap="flat" cmpd="sng" algn="ctr">
-                      <a:solidFill>
-                        <a:srgbClr val="1E2761"/>
-                      </a:solidFill>
-                      <a:prstDash val="solid"/>
-                      <a:round/>
-                      <a:headEnd type="none" w="med" len="med"/>
-                      <a:tailEnd type="none" w="med" len="med"/>
-                    </a:lnR>
-                    <a:lnT w="12700" cap="flat" cmpd="sng" algn="ctr">
-                      <a:solidFill>
-                        <a:srgbClr val="1E2761"/>
-                      </a:solidFill>
-                      <a:prstDash val="solid"/>
-                      <a:round/>
-                      <a:headEnd type="none" w="med" len="med"/>
-                      <a:tailEnd type="none" w="med" len="med"/>
-                    </a:lnT>
-                    <a:lnB w="12700" cap="flat" cmpd="sng" algn="ctr">
-                      <a:solidFill>
-                        <a:srgbClr val="1E2761"/>
-                      </a:solidFill>
-                      <a:prstDash val="solid"/>
-                      <a:round/>
-                      <a:headEnd type="none" w="med" len="med"/>
-                      <a:tailEnd type="none" w="med" len="med"/>
-                    </a:lnB>
-                    <a:solidFill>
-                      <a:srgbClr val="F5F5F5"/>
-                    </a:solidFill>
-                  </a:tcPr>
-                </a:tc>
-              </a:tr>
-              <a:tr h="342900">
-                <a:tc>
-                  <a:txBody>
-                    <a:bodyPr/>
-                    <a:lstStyle/>
-                    <a:p>
-                      <a:pPr algn="ctr" indent="0" marL="0">
-                        <a:buNone/>
-                      </a:pPr>
-                      <a:r>
-                        <a:rPr lang="en-US" sz="1400" dirty="0">
-                          <a:solidFill>
-                            <a:srgbClr val="2C2C2C"/>
-                          </a:solidFill>
-                        </a:rPr>
-                        <a:t>Speed</a:t>
-                      </a:r>
-                      <a:endParaRPr lang="en-US" sz="1400" dirty="0"/>
-                    </a:p>
-                  </a:txBody>
-                  <a:tcPr marL="91440" marR="91440" marT="45720" marB="45720" anchor="ctr">
-                    <a:lnL w="12700" cap="flat" cmpd="sng" algn="ctr">
-                      <a:solidFill>
-                        <a:srgbClr val="1E2761"/>
-                      </a:solidFill>
-                      <a:prstDash val="solid"/>
-                      <a:round/>
-                      <a:headEnd type="none" w="med" len="med"/>
-                      <a:tailEnd type="none" w="med" len="med"/>
-                    </a:lnL>
-                    <a:lnR w="12700" cap="flat" cmpd="sng" algn="ctr">
-                      <a:solidFill>
-                        <a:srgbClr val="1E2761"/>
-                      </a:solidFill>
-                      <a:prstDash val="solid"/>
-                      <a:round/>
-                      <a:headEnd type="none" w="med" len="med"/>
-                      <a:tailEnd type="none" w="med" len="med"/>
-                    </a:lnR>
-                    <a:lnT w="12700" cap="flat" cmpd="sng" algn="ctr">
-                      <a:solidFill>
-                        <a:srgbClr val="1E2761"/>
-                      </a:solidFill>
-                      <a:prstDash val="solid"/>
-                      <a:round/>
-                      <a:headEnd type="none" w="med" len="med"/>
-                      <a:tailEnd type="none" w="med" len="med"/>
-                    </a:lnT>
-                    <a:lnB w="12700" cap="flat" cmpd="sng" algn="ctr">
-                      <a:solidFill>
-                        <a:srgbClr val="1E2761"/>
-                      </a:solidFill>
-                      <a:prstDash val="solid"/>
-                      <a:round/>
-                      <a:headEnd type="none" w="med" len="med"/>
-                      <a:tailEnd type="none" w="med" len="med"/>
-                    </a:lnB>
-                    <a:solidFill>
-                      <a:srgbClr val="F5F5F5"/>
-                    </a:solidFill>
-                  </a:tcPr>
-                </a:tc>
-                <a:tc>
-                  <a:txBody>
-                    <a:bodyPr/>
-                    <a:lstStyle/>
-                    <a:p>
-                      <a:pPr algn="ctr" indent="0" marL="0">
-                        <a:buNone/>
-                      </a:pPr>
-                      <a:r>
-                        <a:rPr lang="en-US" sz="1400" dirty="0">
-                          <a:solidFill>
-                            <a:srgbClr val="2C2C2C"/>
-                          </a:solidFill>
-                        </a:rPr>
-                        <a:t>≥30 FPS</a:t>
-                      </a:r>
-                      <a:endParaRPr lang="en-US" sz="1400" dirty="0"/>
-                    </a:p>
-                  </a:txBody>
-                  <a:tcPr marL="91440" marR="91440" marT="45720" marB="45720" anchor="ctr">
-                    <a:lnL w="12700" cap="flat" cmpd="sng" algn="ctr">
-                      <a:solidFill>
-                        <a:srgbClr val="1E2761"/>
-                      </a:solidFill>
-                      <a:prstDash val="solid"/>
-                      <a:round/>
-                      <a:headEnd type="none" w="med" len="med"/>
-                      <a:tailEnd type="none" w="med" len="med"/>
-                    </a:lnL>
-                    <a:lnR w="12700" cap="flat" cmpd="sng" algn="ctr">
-                      <a:solidFill>
-                        <a:srgbClr val="1E2761"/>
-                      </a:solidFill>
-                      <a:prstDash val="solid"/>
-                      <a:round/>
-                      <a:headEnd type="none" w="med" len="med"/>
-                      <a:tailEnd type="none" w="med" len="med"/>
-                    </a:lnR>
-                    <a:lnT w="12700" cap="flat" cmpd="sng" algn="ctr">
-                      <a:solidFill>
-                        <a:srgbClr val="1E2761"/>
-                      </a:solidFill>
-                      <a:prstDash val="solid"/>
-                      <a:round/>
-                      <a:headEnd type="none" w="med" len="med"/>
-                      <a:tailEnd type="none" w="med" len="med"/>
-                    </a:lnT>
-                    <a:lnB w="12700" cap="flat" cmpd="sng" algn="ctr">
-                      <a:solidFill>
-                        <a:srgbClr val="1E2761"/>
-                      </a:solidFill>
-                      <a:prstDash val="solid"/>
-                      <a:round/>
-                      <a:headEnd type="none" w="med" len="med"/>
-                      <a:tailEnd type="none" w="med" len="med"/>
-                    </a:lnB>
-                    <a:solidFill>
-                      <a:srgbClr val="F5F5F5"/>
-                    </a:solidFill>
-                  </a:tcPr>
-                </a:tc>
-                <a:tc>
-                  <a:txBody>
-                    <a:bodyPr/>
-                    <a:lstStyle/>
-                    <a:p>
-                      <a:pPr algn="ctr" indent="0" marL="0">
-                        <a:buNone/>
-                      </a:pPr>
-                      <a:r>
-                        <a:rPr lang="en-US" sz="1400" dirty="0">
-                          <a:solidFill>
-                            <a:srgbClr val="2C2C2C"/>
-                          </a:solidFill>
-                        </a:rPr>
-                        <a:t>66 FPS</a:t>
-                      </a:r>
-                      <a:endParaRPr lang="en-US" sz="1400" dirty="0"/>
-                    </a:p>
-                  </a:txBody>
-                  <a:tcPr marL="91440" marR="91440" marT="45720" marB="45720" anchor="ctr">
-                    <a:lnL w="12700" cap="flat" cmpd="sng" algn="ctr">
-                      <a:solidFill>
-                        <a:srgbClr val="1E2761"/>
-                      </a:solidFill>
-                      <a:prstDash val="solid"/>
-                      <a:round/>
-                      <a:headEnd type="none" w="med" len="med"/>
-                      <a:tailEnd type="none" w="med" len="med"/>
-                    </a:lnL>
-                    <a:lnR w="12700" cap="flat" cmpd="sng" algn="ctr">
-                      <a:solidFill>
-                        <a:srgbClr val="1E2761"/>
-                      </a:solidFill>
-                      <a:prstDash val="solid"/>
-                      <a:round/>
-                      <a:headEnd type="none" w="med" len="med"/>
-                      <a:tailEnd type="none" w="med" len="med"/>
-                    </a:lnR>
-                    <a:lnT w="12700" cap="flat" cmpd="sng" algn="ctr">
-                      <a:solidFill>
-                        <a:srgbClr val="1E2761"/>
-                      </a:solidFill>
-                      <a:prstDash val="solid"/>
-                      <a:round/>
-                      <a:headEnd type="none" w="med" len="med"/>
-                      <a:tailEnd type="none" w="med" len="med"/>
-                    </a:lnT>
-                    <a:lnB w="12700" cap="flat" cmpd="sng" algn="ctr">
-                      <a:solidFill>
-                        <a:srgbClr val="1E2761"/>
-                      </a:solidFill>
-                      <a:prstDash val="solid"/>
-                      <a:round/>
-                      <a:headEnd type="none" w="med" len="med"/>
-                      <a:tailEnd type="none" w="med" len="med"/>
-                    </a:lnB>
-                    <a:solidFill>
-                      <a:srgbClr val="F5F5F5"/>
-                    </a:solidFill>
-                  </a:tcPr>
-                </a:tc>
-                <a:tc>
-                  <a:txBody>
-                    <a:bodyPr/>
-                    <a:lstStyle/>
-                    <a:p>
-                      <a:pPr algn="ctr" indent="0" marL="0">
-                        <a:buNone/>
-                      </a:pPr>
-                      <a:r>
-                        <a:rPr lang="en-US" sz="1400" dirty="0">
-                          <a:solidFill>
-                            <a:srgbClr val="2C2C2C"/>
-                          </a:solidFill>
-                        </a:rPr>
-                        <a:t>✓</a:t>
-                      </a:r>
-                      <a:endParaRPr lang="en-US" sz="1400" dirty="0"/>
-                    </a:p>
-                  </a:txBody>
-                  <a:tcPr marL="91440" marR="91440" marT="45720" marB="45720" anchor="ctr">
-                    <a:lnL w="12700" cap="flat" cmpd="sng" algn="ctr">
-                      <a:solidFill>
-                        <a:srgbClr val="1E2761"/>
-                      </a:solidFill>
-                      <a:prstDash val="solid"/>
-                      <a:round/>
-                      <a:headEnd type="none" w="med" len="med"/>
-                      <a:tailEnd type="none" w="med" len="med"/>
-                    </a:lnL>
-                    <a:lnR w="12700" cap="flat" cmpd="sng" algn="ctr">
-                      <a:solidFill>
-                        <a:srgbClr val="1E2761"/>
-                      </a:solidFill>
-                      <a:prstDash val="solid"/>
-                      <a:round/>
-                      <a:headEnd type="none" w="med" len="med"/>
-                      <a:tailEnd type="none" w="med" len="med"/>
-                    </a:lnR>
-                    <a:lnT w="12700" cap="flat" cmpd="sng" algn="ctr">
-                      <a:solidFill>
-                        <a:srgbClr val="1E2761"/>
-                      </a:solidFill>
-                      <a:prstDash val="solid"/>
-                      <a:round/>
-                      <a:headEnd type="none" w="med" len="med"/>
-                      <a:tailEnd type="none" w="med" len="med"/>
-                    </a:lnT>
-                    <a:lnB w="12700" cap="flat" cmpd="sng" algn="ctr">
-                      <a:solidFill>
-                        <a:srgbClr val="1E2761"/>
-                      </a:solidFill>
-                      <a:prstDash val="solid"/>
-                      <a:round/>
-                      <a:headEnd type="none" w="med" len="med"/>
-                      <a:tailEnd type="none" w="med" len="med"/>
-                    </a:lnB>
-                    <a:solidFill>
-                      <a:srgbClr val="F5F5F5"/>
-                    </a:solidFill>
-                  </a:tcPr>
-                </a:tc>
-              </a:tr>
-            </a:tbl>
-          </a:graphicData>
-        </a:graphic>
-      </p:graphicFrame>
+      <p:pic>
+        <p:nvPicPr>
+          <p:cNvPr id="3" name="Image 0" descr="/Users/kelechiezekwe/Workspace/Computer_vision_lab/Project_work/outputs/figures/fig_height.png">    </p:cNvPr>
+          <p:cNvPicPr>
+            <a:picLocks noChangeAspect="1"/>
+          </p:cNvPicPr>
+          <p:nvPr/>
+        </p:nvPicPr>
+        <p:blipFill>
+          <a:blip r:embed="rId1"/>
+          <a:stretch>
+            <a:fillRect/>
+          </a:stretch>
+        </p:blipFill>
+        <p:spPr>
+          <a:xfrm>
+            <a:off x="914400" y="1097280"/>
+            <a:ext cx="7315200" cy="3200400"/>
+          </a:xfrm>
+          <a:prstGeom prst="rect">
+            <a:avLst/>
+          </a:prstGeom>
+        </p:spPr>
+      </p:pic>
+      <p:sp>
+        <p:nvSpPr>
+          <p:cNvPr id="4" name="Shape 1"/>
+          <p:cNvSpPr/>
+          <p:nvPr/>
+        </p:nvSpPr>
+        <p:spPr>
+          <a:xfrm>
+            <a:off x="1828800" y="4480560"/>
+            <a:ext cx="5486400" cy="548640"/>
+          </a:xfrm>
+          <a:prstGeom prst="rect">
+            <a:avLst/>
+          </a:prstGeom>
+          <a:solidFill>
+            <a:srgbClr val="2C5F2D"/>
+          </a:solidFill>
+          <a:ln/>
+        </p:spPr>
+      </p:sp>
       <p:sp>
         <p:nvSpPr>
           <p:cNvPr id="5" name="Text 2"/>
@@ -4037,8 +2928,8 @@
         </p:nvSpPr>
         <p:spPr>
           <a:xfrm>
-            <a:off x="731520" y="3108960"/>
-            <a:ext cx="7680960" cy="274320"/>
+            <a:off x="2011680" y="4572000"/>
+            <a:ext cx="5120640" cy="365760"/>
           </a:xfrm>
           <a:prstGeom prst="rect">
             <a:avLst/>
@@ -4050,118 +2941,18 @@
           <a:bodyPr wrap="square" rtlCol="0" anchor="ctr"/>
           <a:lstStyle/>
           <a:p>
-            <a:pPr indent="0" marL="0">
+            <a:pPr algn="ctr" indent="0" marL="0">
               <a:buNone/>
             </a:pPr>
             <a:r>
               <a:rPr lang="en-US" sz="1800" b="1" dirty="0">
                 <a:solidFill>
-                  <a:srgbClr val="028090"/>
-                </a:solidFill>
-              </a:rPr>
-              <a:t>System Progression:</a:t>
+                  <a:srgbClr val="FFFFFF"/>
+                </a:solidFill>
+              </a:rPr>
+              <a:t>Height: 0.49 ± 0.05m (consistent validation)</a:t>
             </a:r>
             <a:endParaRPr lang="en-US" sz="1800" dirty="0"/>
-          </a:p>
-        </p:txBody>
-      </p:sp>
-      <p:sp>
-        <p:nvSpPr>
-          <p:cNvPr id="6" name="Text 3"/>
-          <p:cNvSpPr txBox="1"/>
-          <p:nvPr/>
-        </p:nvSpPr>
-        <p:spPr>
-          <a:xfrm>
-            <a:off x="731520" y="3474720"/>
-            <a:ext cx="7680960" cy="822960"/>
-          </a:xfrm>
-          <a:prstGeom prst="rect">
-            <a:avLst/>
-          </a:prstGeom>
-          <a:noFill/>
-          <a:ln/>
-        </p:spPr>
-        <p:txBody>
-          <a:bodyPr wrap="square" rtlCol="0" anchor="ctr"/>
-          <a:lstStyle/>
-          <a:p>
-            <a:pPr algn="ctr" indent="0" marL="0">
-              <a:buNone/>
-            </a:pPr>
-            <a:r>
-              <a:rPr lang="en-US" sz="1500" dirty="0">
-                <a:solidFill>
-                  <a:srgbClr val="2C2C2C"/>
-                </a:solidFill>
-              </a:rPr>
-              <a:t>Stage 1: TPR=100%, FPR=60%</a:t>
-            </a:r>
-            <a:endParaRPr lang="en-US" sz="1500" dirty="0"/>
-          </a:p>
-          <a:p>
-            <a:pPr algn="ctr" indent="0" marL="0">
-              <a:buNone/>
-            </a:pPr>
-            <a:r>
-              <a:rPr lang="en-US" sz="1500" dirty="0">
-                <a:solidFill>
-                  <a:srgbClr val="2C2C2C"/>
-                </a:solidFill>
-              </a:rPr>
-              <a:t>Stage 2: TPR=96%, FPR=0%</a:t>
-            </a:r>
-            <a:endParaRPr lang="en-US" sz="1500" dirty="0"/>
-          </a:p>
-          <a:p>
-            <a:pPr algn="ctr" indent="0" marL="0">
-              <a:buNone/>
-            </a:pPr>
-            <a:r>
-              <a:rPr lang="en-US" sz="1500" dirty="0">
-                <a:solidFill>
-                  <a:srgbClr val="2C2C2C"/>
-                </a:solidFill>
-              </a:rPr>
-              <a:t>Stage 3: TPR=100%, FPR=0%</a:t>
-            </a:r>
-            <a:endParaRPr lang="en-US" sz="1500" dirty="0"/>
-          </a:p>
-        </p:txBody>
-      </p:sp>
-      <p:sp>
-        <p:nvSpPr>
-          <p:cNvPr id="7" name="Text 4"/>
-          <p:cNvSpPr txBox="1"/>
-          <p:nvPr/>
-        </p:nvSpPr>
-        <p:spPr>
-          <a:xfrm>
-            <a:off x="731520" y="4480560"/>
-            <a:ext cx="7680960" cy="274320"/>
-          </a:xfrm>
-          <a:prstGeom prst="rect">
-            <a:avLst/>
-          </a:prstGeom>
-          <a:noFill/>
-          <a:ln/>
-        </p:spPr>
-        <p:txBody>
-          <a:bodyPr wrap="square" rtlCol="0" anchor="ctr"/>
-          <a:lstStyle/>
-          <a:p>
-            <a:pPr algn="ctr" indent="0" marL="0">
-              <a:buNone/>
-            </a:pPr>
-            <a:r>
-              <a:rPr lang="en-US" sz="1600" b="1" dirty="0">
-                <a:solidFill>
-                  <a:srgbClr val="F96167"/>
-                </a:solidFill>
-              </a:rPr>
-              <a:t>Both targets significantly exceeded! ✓</a:t>
-            </a:r>
-            <a:endParaRPr lang="en-US" sz="1600" dirty="0"/>
           </a:p>
         </p:txBody>
       </p:sp>
@@ -4227,289 +3018,36 @@
                   <a:srgbClr val="1E2761"/>
                 </a:solidFill>
               </a:rPr>
-              <a:t>What We Achieved</a:t>
+              <a:t>Final System Performance</a:t>
             </a:r>
             <a:endParaRPr lang="en-US" sz="3600" dirty="0"/>
           </a:p>
         </p:txBody>
       </p:sp>
-      <p:sp>
-        <p:nvSpPr>
-          <p:cNvPr id="3" name="Text 1"/>
-          <p:cNvSpPr txBox="1"/>
-          <p:nvPr/>
-        </p:nvSpPr>
-        <p:spPr>
-          <a:xfrm>
-            <a:off x="731520" y="1097280"/>
-            <a:ext cx="7680960" cy="274320"/>
-          </a:xfrm>
-          <a:prstGeom prst="rect">
-            <a:avLst/>
-          </a:prstGeom>
-          <a:noFill/>
-          <a:ln/>
-        </p:spPr>
-        <p:txBody>
-          <a:bodyPr wrap="square" rtlCol="0" anchor="ctr"/>
-          <a:lstStyle/>
-          <a:p>
-            <a:pPr indent="0" marL="0">
-              <a:buNone/>
-            </a:pPr>
-            <a:r>
-              <a:rPr lang="en-US" sz="1800" b="1" dirty="0">
-                <a:solidFill>
-                  <a:srgbClr val="028090"/>
-                </a:solidFill>
-              </a:rPr>
-              <a:t>Technical Innovations:</a:t>
-            </a:r>
-            <a:endParaRPr lang="en-US" sz="1800" dirty="0"/>
-          </a:p>
-        </p:txBody>
-      </p:sp>
-      <p:sp>
-        <p:nvSpPr>
-          <p:cNvPr id="4" name="Text 2"/>
-          <p:cNvSpPr txBox="1"/>
-          <p:nvPr/>
-        </p:nvSpPr>
-        <p:spPr>
-          <a:xfrm>
-            <a:off x="731520" y="1463040"/>
-            <a:ext cx="7680960" cy="1097280"/>
-          </a:xfrm>
-          <a:prstGeom prst="rect">
-            <a:avLst/>
-          </a:prstGeom>
-          <a:noFill/>
-          <a:ln/>
-        </p:spPr>
-        <p:txBody>
-          <a:bodyPr wrap="square" rtlCol="0" anchor="ctr"/>
-          <a:lstStyle/>
-          <a:p>
-            <a:pPr marL="342900" indent="-342900">
-              <a:buSzPct val="100000"/>
-              <a:buChar char="•"/>
-            </a:pPr>
-            <a:r>
-              <a:rPr lang="en-US" sz="1400" dirty="0">
-                <a:solidFill>
-                  <a:srgbClr val="2C2C2C"/>
-                </a:solidFill>
-              </a:rPr>
-              <a:t>✓ Modular architecture enabling perfect performance</a:t>
-            </a:r>
-            <a:endParaRPr lang="en-US" sz="1400" dirty="0"/>
-          </a:p>
-          <a:p>
-            <a:pPr marL="342900" indent="-342900">
-              <a:buSzPct val="100000"/>
-              <a:buChar char="•"/>
-            </a:pPr>
-            <a:r>
-              <a:rPr lang="en-US" sz="1400" dirty="0">
-                <a:solidFill>
-                  <a:srgbClr val="2C2C2C"/>
-                </a:solidFill>
-              </a:rPr>
-              <a:t>✓ Intentional high-sensitivity baseline design</a:t>
-            </a:r>
-            <a:endParaRPr lang="en-US" sz="1400" dirty="0"/>
-          </a:p>
-          <a:p>
-            <a:pPr marL="342900" indent="-342900">
-              <a:buSzPct val="100000"/>
-              <a:buChar char="•"/>
-            </a:pPr>
-            <a:r>
-              <a:rPr lang="en-US" sz="1400" dirty="0">
-                <a:solidFill>
-                  <a:srgbClr val="2C2C2C"/>
-                </a:solidFill>
-              </a:rPr>
-              <a:t>✓ Simple depth cues achieving 0% FPR</a:t>
-            </a:r>
-            <a:endParaRPr lang="en-US" sz="1400" dirty="0"/>
-          </a:p>
-          <a:p>
-            <a:pPr marL="342900" indent="-342900">
-              <a:buSzPct val="100000"/>
-              <a:buChar char="•"/>
-            </a:pPr>
-            <a:r>
-              <a:rPr lang="en-US" sz="1400" dirty="0">
-                <a:solidFill>
-                  <a:srgbClr val="2C2C2C"/>
-                </a:solidFill>
-              </a:rPr>
-              <a:t>✓ Conservative tracking for edge case recovery</a:t>
-            </a:r>
-            <a:endParaRPr lang="en-US" sz="1400" dirty="0"/>
-          </a:p>
-        </p:txBody>
-      </p:sp>
-      <p:sp>
-        <p:nvSpPr>
-          <p:cNvPr id="5" name="Text 3"/>
-          <p:cNvSpPr txBox="1"/>
-          <p:nvPr/>
-        </p:nvSpPr>
-        <p:spPr>
-          <a:xfrm>
-            <a:off x="731520" y="2743200"/>
-            <a:ext cx="7680960" cy="274320"/>
-          </a:xfrm>
-          <a:prstGeom prst="rect">
-            <a:avLst/>
-          </a:prstGeom>
-          <a:noFill/>
-          <a:ln/>
-        </p:spPr>
-        <p:txBody>
-          <a:bodyPr wrap="square" rtlCol="0" anchor="ctr"/>
-          <a:lstStyle/>
-          <a:p>
-            <a:pPr indent="0" marL="0">
-              <a:buNone/>
-            </a:pPr>
-            <a:r>
-              <a:rPr lang="en-US" sz="1800" b="1" dirty="0">
-                <a:solidFill>
-                  <a:srgbClr val="028090"/>
-                </a:solidFill>
-              </a:rPr>
-              <a:t>Team Contributions:</a:t>
-            </a:r>
-            <a:endParaRPr lang="en-US" sz="1800" dirty="0"/>
-          </a:p>
-        </p:txBody>
-      </p:sp>
-      <p:sp>
-        <p:nvSpPr>
-          <p:cNvPr id="6" name="Text 4"/>
-          <p:cNvSpPr txBox="1"/>
-          <p:nvPr/>
-        </p:nvSpPr>
-        <p:spPr>
-          <a:xfrm>
-            <a:off x="731520" y="3108960"/>
-            <a:ext cx="7680960" cy="822960"/>
-          </a:xfrm>
-          <a:prstGeom prst="rect">
-            <a:avLst/>
-          </a:prstGeom>
-          <a:noFill/>
-          <a:ln/>
-        </p:spPr>
-        <p:txBody>
-          <a:bodyPr wrap="square" rtlCol="0" anchor="ctr"/>
-          <a:lstStyle/>
-          <a:p>
-            <a:pPr marL="342900" indent="-342900">
-              <a:buSzPct val="100000"/>
-              <a:buChar char="•"/>
-            </a:pPr>
-            <a:r>
-              <a:rPr lang="en-US" sz="1400" dirty="0">
-                <a:solidFill>
-                  <a:srgbClr val="2C2C2C"/>
-                </a:solidFill>
-              </a:rPr>
-              <a:t>• Kelechi: Perfect detection baseline (100% TPR)</a:t>
-            </a:r>
-            <a:endParaRPr lang="en-US" sz="1400" dirty="0"/>
-          </a:p>
-          <a:p>
-            <a:pPr marL="342900" indent="-342900">
-              <a:buSzPct val="100000"/>
-              <a:buChar char="•"/>
-            </a:pPr>
-            <a:r>
-              <a:rPr lang="en-US" sz="1400" dirty="0">
-                <a:solidFill>
-                  <a:srgbClr val="2C2C2C"/>
-                </a:solidFill>
-              </a:rPr>
-              <a:t>• Shravani: Perfect decoy rejection (0% FPR)</a:t>
-            </a:r>
-            <a:endParaRPr lang="en-US" sz="1400" dirty="0"/>
-          </a:p>
-          <a:p>
-            <a:pPr marL="342900" indent="-342900">
-              <a:buSzPct val="100000"/>
-              <a:buChar char="•"/>
-            </a:pPr>
-            <a:r>
-              <a:rPr lang="en-US" sz="1400" dirty="0">
-                <a:solidFill>
-                  <a:srgbClr val="2C2C2C"/>
-                </a:solidFill>
-              </a:rPr>
-              <a:t>• Thanigaiarasu: Accurate 3D + tracking (100% final TPR)</a:t>
-            </a:r>
-            <a:endParaRPr lang="en-US" sz="1400" dirty="0"/>
-          </a:p>
-        </p:txBody>
-      </p:sp>
-      <p:sp>
-        <p:nvSpPr>
-          <p:cNvPr id="7" name="Shape 5"/>
-          <p:cNvSpPr/>
-          <p:nvPr/>
-        </p:nvSpPr>
-        <p:spPr>
-          <a:xfrm>
-            <a:off x="2286000" y="4206240"/>
-            <a:ext cx="4572000" cy="548640"/>
-          </a:xfrm>
-          <a:prstGeom prst="rect">
-            <a:avLst/>
-          </a:prstGeom>
-          <a:solidFill>
-            <a:srgbClr val="028090"/>
-          </a:solidFill>
-          <a:ln/>
-        </p:spPr>
-      </p:sp>
-      <p:sp>
-        <p:nvSpPr>
-          <p:cNvPr id="8" name="Text 6"/>
-          <p:cNvSpPr txBox="1"/>
-          <p:nvPr/>
-        </p:nvSpPr>
-        <p:spPr>
-          <a:xfrm>
-            <a:off x="2468880" y="4297680"/>
-            <a:ext cx="4206240" cy="365760"/>
-          </a:xfrm>
-          <a:prstGeom prst="rect">
-            <a:avLst/>
-          </a:prstGeom>
-          <a:noFill/>
-          <a:ln/>
-        </p:spPr>
-        <p:txBody>
-          <a:bodyPr wrap="square" rtlCol="0" anchor="ctr"/>
-          <a:lstStyle/>
-          <a:p>
-            <a:pPr algn="ctr" indent="0" marL="0">
-              <a:buNone/>
-            </a:pPr>
-            <a:r>
-              <a:rPr lang="en-US" sz="1800" b="1" dirty="0">
-                <a:solidFill>
-                  <a:srgbClr val="FFFFFF"/>
-                </a:solidFill>
-              </a:rPr>
-              <a:t>Real-time: 15.2 ms/frame (66 FPS)</a:t>
-            </a:r>
-            <a:endParaRPr lang="en-US" sz="1800" dirty="0"/>
-          </a:p>
-        </p:txBody>
-      </p:sp>
+      <p:pic>
+        <p:nvPicPr>
+          <p:cNvPr id="3" name="Image 0" descr="/Users/kelechiezekwe/Workspace/Computer_vision_lab/Project_work/outputs/visualizations/6_summary_dashboard.png">    </p:cNvPr>
+          <p:cNvPicPr>
+            <a:picLocks noChangeAspect="1"/>
+          </p:cNvPicPr>
+          <p:nvPr/>
+        </p:nvPicPr>
+        <p:blipFill>
+          <a:blip r:embed="rId1"/>
+          <a:stretch>
+            <a:fillRect/>
+          </a:stretch>
+        </p:blipFill>
+        <p:spPr>
+          <a:xfrm>
+            <a:off x="457200" y="1005840"/>
+            <a:ext cx="8229600" cy="3931920"/>
+          </a:xfrm>
+          <a:prstGeom prst="rect">
+            <a:avLst/>
+          </a:prstGeom>
+        </p:spPr>
+      </p:pic>
     </p:spTree>
   </p:cSld>
   <p:clrMapOvr>
@@ -4660,7 +3198,7 @@
                   <a:srgbClr val="FFFFFF"/>
                 </a:solidFill>
               </a:rPr>
-              <a:t>✓ Real-time capable: 66 FPS on commodity hardware</a:t>
+              <a:t>✓ Real-time capable: 66 FPS</a:t>
             </a:r>
             <a:endParaRPr lang="en-US" sz="1300" dirty="0"/>
           </a:p>
@@ -4675,7 +3213,7 @@
                   <a:srgbClr val="FFFFFF"/>
                 </a:solidFill>
               </a:rPr>
-              <a:t>✓ Accurate 3D: 0.49 ± 0.05m validated</a:t>
+              <a:t>✓ Accurate 3D: 0.49 ± 0.05m</a:t>
             </a:r>
             <a:endParaRPr lang="en-US" sz="1300" dirty="0"/>
           </a:p>
@@ -4690,7 +3228,7 @@
                   <a:srgbClr val="FFFFFF"/>
                 </a:solidFill>
               </a:rPr>
-              <a:t>✓ Interpretable: Can explain every decision</a:t>
+              <a:t>✓ Interpretable: Explainable decisions</a:t>
             </a:r>
             <a:endParaRPr lang="en-US" sz="1300" dirty="0"/>
           </a:p>
@@ -4763,7 +3301,7 @@
                   <a:srgbClr val="FFFFFF"/>
                 </a:solidFill>
               </a:rPr>
-              <a:t>• Modular design enables effective debugging</a:t>
+              <a:t>• Modular design enables debugging</a:t>
             </a:r>
             <a:endParaRPr lang="en-US" sz="1300" dirty="0"/>
           </a:p>
@@ -4778,7 +3316,7 @@
                   <a:srgbClr val="FFFFFF"/>
                 </a:solidFill>
               </a:rPr>
-              <a:t>• Simple methods work when physics is clear</a:t>
+              <a:t>• Simple methods work with clear physics</a:t>
             </a:r>
             <a:endParaRPr lang="en-US" sz="1300" dirty="0"/>
           </a:p>
@@ -4793,7 +3331,7 @@
                   <a:srgbClr val="FFFFFF"/>
                 </a:solidFill>
               </a:rPr>
-              <a:t>• High baseline sensitivity provides robustness</a:t>
+              <a:t>• High baseline sensitivity = robustness</a:t>
             </a:r>
             <a:endParaRPr lang="en-US" sz="1300" dirty="0"/>
           </a:p>
@@ -4808,7 +3346,7 @@
                   <a:srgbClr val="FFFFFF"/>
                 </a:solidFill>
               </a:rPr>
-              <a:t>• Conservative extensions add value safely</a:t>
+              <a:t>• Conservative extensions add value</a:t>
             </a:r>
             <a:endParaRPr lang="en-US" sz="1300" dirty="0"/>
           </a:p>
@@ -5971,7 +4509,7 @@
                   <a:srgbClr val="1E2761"/>
                 </a:solidFill>
               </a:rPr>
-              <a:t>Stage 1: Fire Extinguisher Detection</a:t>
+              <a:t>Stage 1: Perfect Detection Performance</a:t>
             </a:r>
             <a:endParaRPr lang="en-US" sz="3600" dirty="0"/>
           </a:p>
@@ -6013,16 +4551,40 @@
           </a:p>
         </p:txBody>
       </p:sp>
-      <p:sp>
-        <p:nvSpPr>
-          <p:cNvPr id="4" name="Text 2"/>
+      <p:pic>
+        <p:nvPicPr>
+          <p:cNvPr id="4" name="Image 0" descr="/Users/kelechiezekwe/Workspace/Computer_vision_lab/Project_work/outputs/visualizations/1_tpr_fpr_comparison.png">    </p:cNvPr>
+          <p:cNvPicPr>
+            <a:picLocks noChangeAspect="1"/>
+          </p:cNvPicPr>
+          <p:nvPr/>
+        </p:nvPicPr>
+        <p:blipFill>
+          <a:blip r:embed="rId1"/>
+          <a:stretch>
+            <a:fillRect/>
+          </a:stretch>
+        </p:blipFill>
+        <p:spPr>
+          <a:xfrm>
+            <a:off x="1371600" y="1371600"/>
+            <a:ext cx="6400800" cy="3200400"/>
+          </a:xfrm>
+          <a:prstGeom prst="rect">
+            <a:avLst/>
+          </a:prstGeom>
+        </p:spPr>
+      </p:pic>
+      <p:sp>
+        <p:nvSpPr>
+          <p:cNvPr id="5" name="Text 2"/>
           <p:cNvSpPr txBox="1"/>
           <p:nvPr/>
         </p:nvSpPr>
         <p:spPr>
           <a:xfrm>
-            <a:off x="731520" y="1371600"/>
-            <a:ext cx="7680960" cy="1097280"/>
+            <a:off x="731520" y="4663440"/>
+            <a:ext cx="7680960" cy="274320"/>
           </a:xfrm>
           <a:prstGeom prst="rect">
             <a:avLst/>
@@ -6034,206 +4596,18 @@
           <a:bodyPr wrap="square" rtlCol="0" anchor="ctr"/>
           <a:lstStyle/>
           <a:p>
-            <a:pPr marL="342900" indent="-342900">
-              <a:buSzPct val="100000"/>
-              <a:buChar char="•"/>
-            </a:pPr>
-            <a:r>
-              <a:rPr lang="en-US" sz="1600" dirty="0">
-                <a:solidFill>
-                  <a:srgbClr val="2C2C2C"/>
-                </a:solidFill>
-              </a:rPr>
-              <a:t>• Model: YOLOv11n (nano variant)</a:t>
+            <a:pPr algn="ctr" indent="0" marL="0">
+              <a:buNone/>
+            </a:pPr>
+            <a:r>
+              <a:rPr lang="en-US" sz="1600" b="1" dirty="0">
+                <a:solidFill>
+                  <a:srgbClr val="2C5F2D"/>
+                </a:solidFill>
+              </a:rPr>
+              <a:t>100% TPR on both eval and test sets - Zero misses!</a:t>
             </a:r>
             <a:endParaRPr lang="en-US" sz="1600" dirty="0"/>
-          </a:p>
-          <a:p>
-            <a:pPr marL="342900" indent="-342900">
-              <a:buSzPct val="100000"/>
-              <a:buChar char="•"/>
-            </a:pPr>
-            <a:r>
-              <a:rPr lang="en-US" sz="1600" dirty="0">
-                <a:solidFill>
-                  <a:srgbClr val="2C2C2C"/>
-                </a:solidFill>
-              </a:rPr>
-              <a:t>• Training: Roboflow FireExtinguisher v2 (~500 images)</a:t>
-            </a:r>
-            <a:endParaRPr lang="en-US" sz="1600" dirty="0"/>
-          </a:p>
-          <a:p>
-            <a:pPr marL="342900" indent="-342900">
-              <a:buSzPct val="100000"/>
-              <a:buChar char="•"/>
-            </a:pPr>
-            <a:r>
-              <a:rPr lang="en-US" sz="1600" dirty="0">
-                <a:solidFill>
-                  <a:srgbClr val="2C2C2C"/>
-                </a:solidFill>
-              </a:rPr>
-              <a:t>• Confidence threshold: 0.10 (intentionally low)</a:t>
-            </a:r>
-            <a:endParaRPr lang="en-US" sz="1600" dirty="0"/>
-          </a:p>
-          <a:p>
-            <a:pPr marL="342900" indent="-342900">
-              <a:buSzPct val="100000"/>
-              <a:buChar char="•"/>
-            </a:pPr>
-            <a:r>
-              <a:rPr lang="en-US" sz="1600" dirty="0">
-                <a:solidFill>
-                  <a:srgbClr val="2C2C2C"/>
-                </a:solidFill>
-              </a:rPr>
-              <a:t>• Platform: Google Colab (T4 GPU)</a:t>
-            </a:r>
-            <a:endParaRPr lang="en-US" sz="1600" dirty="0"/>
-          </a:p>
-        </p:txBody>
-      </p:sp>
-      <p:sp>
-        <p:nvSpPr>
-          <p:cNvPr id="5" name="Shape 3"/>
-          <p:cNvSpPr/>
-          <p:nvPr/>
-        </p:nvSpPr>
-        <p:spPr>
-          <a:xfrm>
-            <a:off x="1371600" y="2926080"/>
-            <a:ext cx="6400800" cy="731520"/>
-          </a:xfrm>
-          <a:prstGeom prst="rect">
-            <a:avLst/>
-          </a:prstGeom>
-          <a:solidFill>
-            <a:srgbClr val="F96167"/>
-          </a:solidFill>
-          <a:ln/>
-        </p:spPr>
-      </p:sp>
-      <p:sp>
-        <p:nvSpPr>
-          <p:cNvPr id="6" name="Text 4"/>
-          <p:cNvSpPr txBox="1"/>
-          <p:nvPr/>
-        </p:nvSpPr>
-        <p:spPr>
-          <a:xfrm>
-            <a:off x="1554480" y="3017520"/>
-            <a:ext cx="6035040" cy="274320"/>
-          </a:xfrm>
-          <a:prstGeom prst="rect">
-            <a:avLst/>
-          </a:prstGeom>
-          <a:noFill/>
-          <a:ln/>
-        </p:spPr>
-        <p:txBody>
-          <a:bodyPr wrap="square" rtlCol="0" anchor="ctr"/>
-          <a:lstStyle/>
-          <a:p>
-            <a:pPr indent="0" marL="0">
-              <a:buNone/>
-            </a:pPr>
-            <a:r>
-              <a:rPr lang="en-US" sz="1800" b="1" dirty="0">
-                <a:solidFill>
-                  <a:srgbClr val="FFFFFF"/>
-                </a:solidFill>
-              </a:rPr>
-              <a:t>Key Achievement:</a:t>
-            </a:r>
-            <a:endParaRPr lang="en-US" sz="1800" dirty="0"/>
-          </a:p>
-        </p:txBody>
-      </p:sp>
-      <p:sp>
-        <p:nvSpPr>
-          <p:cNvPr id="7" name="Text 5"/>
-          <p:cNvSpPr txBox="1"/>
-          <p:nvPr/>
-        </p:nvSpPr>
-        <p:spPr>
-          <a:xfrm>
-            <a:off x="1554480" y="3337560"/>
-            <a:ext cx="6035040" cy="274320"/>
-          </a:xfrm>
-          <a:prstGeom prst="rect">
-            <a:avLst/>
-          </a:prstGeom>
-          <a:noFill/>
-          <a:ln/>
-        </p:spPr>
-        <p:txBody>
-          <a:bodyPr wrap="square" rtlCol="0" anchor="ctr"/>
-          <a:lstStyle/>
-          <a:p>
-            <a:pPr indent="0" marL="0">
-              <a:buNone/>
-            </a:pPr>
-            <a:r>
-              <a:rPr lang="en-US" sz="2000" b="1" dirty="0">
-                <a:solidFill>
-                  <a:srgbClr val="FFFFFF"/>
-                </a:solidFill>
-              </a:rPr>
-              <a:t>100% TPR on both eval and test sets</a:t>
-            </a:r>
-            <a:endParaRPr lang="en-US" sz="2000" dirty="0"/>
-          </a:p>
-        </p:txBody>
-      </p:sp>
-      <p:sp>
-        <p:nvSpPr>
-          <p:cNvPr id="8" name="Text 6"/>
-          <p:cNvSpPr txBox="1"/>
-          <p:nvPr/>
-        </p:nvSpPr>
-        <p:spPr>
-          <a:xfrm>
-            <a:off x="731520" y="3931920"/>
-            <a:ext cx="7680960" cy="548640"/>
-          </a:xfrm>
-          <a:prstGeom prst="rect">
-            <a:avLst/>
-          </a:prstGeom>
-          <a:noFill/>
-          <a:ln/>
-        </p:spPr>
-        <p:txBody>
-          <a:bodyPr wrap="square" rtlCol="0" anchor="ctr"/>
-          <a:lstStyle/>
-          <a:p>
-            <a:pPr algn="ctr" indent="0" marL="0">
-              <a:buNone/>
-            </a:pPr>
-            <a:r>
-              <a:rPr lang="en-US" sz="1400" dirty="0">
-                <a:solidFill>
-                  <a:srgbClr val="2C2C2C"/>
-                </a:solidFill>
-              </a:rPr>
-              <a:t>Perfect detection of all real fire extinguishers</a:t>
-            </a:r>
-            <a:endParaRPr lang="en-US" sz="1400" dirty="0"/>
-          </a:p>
-          <a:p>
-            <a:pPr algn="ctr" indent="0" marL="0">
-              <a:buNone/>
-            </a:pPr>
-            <a:r>
-              <a:rPr lang="en-US" sz="1400" dirty="0">
-                <a:solidFill>
-                  <a:srgbClr val="2C2C2C"/>
-                </a:solidFill>
-              </a:rPr>
-              <a:t>Zero misses - safety-critical requirement met</a:t>
-            </a:r>
-            <a:endParaRPr lang="en-US" sz="1400" dirty="0"/>
           </a:p>
         </p:txBody>
       </p:sp>
@@ -6294,26 +4668,50 @@
               <a:buNone/>
             </a:pPr>
             <a:r>
-              <a:rPr lang="en-US" sz="3200" b="1" dirty="0">
+              <a:rPr lang="en-US" sz="3600" b="1" dirty="0">
                 <a:solidFill>
                   <a:srgbClr val="1E2761"/>
                 </a:solidFill>
               </a:rPr>
-              <a:t>Design Choice: Intentional High False Positive Rate</a:t>
-            </a:r>
-            <a:endParaRPr lang="en-US" sz="3200" dirty="0"/>
-          </a:p>
-        </p:txBody>
-      </p:sp>
-      <p:sp>
-        <p:nvSpPr>
-          <p:cNvPr id="3" name="Text 1"/>
+              <a:t>Stage 1: Detection Breakdown Analysis</a:t>
+            </a:r>
+            <a:endParaRPr lang="en-US" sz="3600" dirty="0"/>
+          </a:p>
+        </p:txBody>
+      </p:sp>
+      <p:pic>
+        <p:nvPicPr>
+          <p:cNvPr id="3" name="Image 0" descr="/Users/kelechiezekwe/Workspace/Computer_vision_lab/Project_work/outputs/visualizations/2_detection_breakdown.png">    </p:cNvPr>
+          <p:cNvPicPr>
+            <a:picLocks noChangeAspect="1"/>
+          </p:cNvPicPr>
+          <p:nvPr/>
+        </p:nvPicPr>
+        <p:blipFill>
+          <a:blip r:embed="rId1"/>
+          <a:stretch>
+            <a:fillRect/>
+          </a:stretch>
+        </p:blipFill>
+        <p:spPr>
+          <a:xfrm>
+            <a:off x="731520" y="1097280"/>
+            <a:ext cx="7680960" cy="3474720"/>
+          </a:xfrm>
+          <a:prstGeom prst="rect">
+            <a:avLst/>
+          </a:prstGeom>
+        </p:spPr>
+      </p:pic>
+      <p:sp>
+        <p:nvSpPr>
+          <p:cNvPr id="4" name="Text 1"/>
           <p:cNvSpPr txBox="1"/>
           <p:nvPr/>
         </p:nvSpPr>
         <p:spPr>
           <a:xfrm>
-            <a:off x="731520" y="1097280"/>
+            <a:off x="731520" y="4663440"/>
             <a:ext cx="7680960" cy="274320"/>
           </a:xfrm>
           <a:prstGeom prst="rect">
@@ -6326,258 +4724,18 @@
           <a:bodyPr wrap="square" rtlCol="0" anchor="ctr"/>
           <a:lstStyle/>
           <a:p>
-            <a:pPr indent="0" marL="0">
-              <a:buNone/>
-            </a:pPr>
-            <a:r>
-              <a:rPr lang="en-US" sz="1800" b="1" dirty="0">
-                <a:solidFill>
-                  <a:srgbClr val="028090"/>
-                </a:solidFill>
-              </a:rPr>
-              <a:t>The Argument:</a:t>
-            </a:r>
-            <a:endParaRPr lang="en-US" sz="1800" dirty="0"/>
-          </a:p>
-        </p:txBody>
-      </p:sp>
-      <p:sp>
-        <p:nvSpPr>
-          <p:cNvPr id="4" name="Text 2"/>
-          <p:cNvSpPr txBox="1"/>
-          <p:nvPr/>
-        </p:nvSpPr>
-        <p:spPr>
-          <a:xfrm>
-            <a:off x="731520" y="1463040"/>
-            <a:ext cx="7680960" cy="822960"/>
-          </a:xfrm>
-          <a:prstGeom prst="rect">
-            <a:avLst/>
-          </a:prstGeom>
-          <a:noFill/>
-          <a:ln/>
-        </p:spPr>
-        <p:txBody>
-          <a:bodyPr wrap="square" rtlCol="0" anchor="ctr"/>
-          <a:lstStyle/>
-          <a:p>
-            <a:pPr marL="342900" indent="-342900">
-              <a:buSzPct val="100000"/>
-              <a:buChar char="•"/>
-            </a:pPr>
-            <a:r>
-              <a:rPr lang="en-US" sz="1500" dirty="0">
+            <a:pPr algn="ctr" indent="0" marL="0">
+              <a:buNone/>
+            </a:pPr>
+            <a:r>
+              <a:rPr lang="en-US" sz="1400" i="1" dirty="0">
                 <a:solidFill>
                   <a:srgbClr val="2C2C2C"/>
                 </a:solidFill>
               </a:rPr>
-              <a:t>• Stage 1: High sensitivity (TPR=100%, FPR=60%)</a:t>
-            </a:r>
-            <a:endParaRPr lang="en-US" sz="1500" dirty="0"/>
-          </a:p>
-          <a:p>
-            <a:pPr marL="342900" indent="-342900">
-              <a:buSzPct val="100000"/>
-              <a:buChar char="•"/>
-            </a:pPr>
-            <a:r>
-              <a:rPr lang="en-US" sz="1500" dirty="0">
-                <a:solidFill>
-                  <a:srgbClr val="2C2C2C"/>
-                </a:solidFill>
-              </a:rPr>
-              <a:t>• Stage 2: High specificity (filters false positives)</a:t>
-            </a:r>
-            <a:endParaRPr lang="en-US" sz="1500" dirty="0"/>
-          </a:p>
-          <a:p>
-            <a:pPr marL="342900" indent="-342900">
-              <a:buSzPct val="100000"/>
-              <a:buChar char="•"/>
-            </a:pPr>
-            <a:r>
-              <a:rPr lang="en-US" sz="1500" dirty="0">
-                <a:solidFill>
-                  <a:srgbClr val="2C2C2C"/>
-                </a:solidFill>
-              </a:rPr>
-              <a:t>• Result: Perfect final performance</a:t>
-            </a:r>
-            <a:endParaRPr lang="en-US" sz="1500" dirty="0"/>
-          </a:p>
-        </p:txBody>
-      </p:sp>
-      <p:sp>
-        <p:nvSpPr>
-          <p:cNvPr id="5" name="Text 3"/>
-          <p:cNvSpPr txBox="1"/>
-          <p:nvPr/>
-        </p:nvSpPr>
-        <p:spPr>
-          <a:xfrm>
-            <a:off x="731520" y="2468880"/>
-            <a:ext cx="7680960" cy="274320"/>
-          </a:xfrm>
-          <a:prstGeom prst="rect">
-            <a:avLst/>
-          </a:prstGeom>
-          <a:noFill/>
-          <a:ln/>
-        </p:spPr>
-        <p:txBody>
-          <a:bodyPr wrap="square" rtlCol="0" anchor="ctr"/>
-          <a:lstStyle/>
-          <a:p>
-            <a:pPr indent="0" marL="0">
-              <a:buNone/>
-            </a:pPr>
-            <a:r>
-              <a:rPr lang="en-US" sz="1800" b="1" dirty="0">
-                <a:solidFill>
-                  <a:srgbClr val="028090"/>
-                </a:solidFill>
-              </a:rPr>
-              <a:t>Mathematical Justification:</a:t>
-            </a:r>
-            <a:endParaRPr lang="en-US" sz="1800" dirty="0"/>
-          </a:p>
-        </p:txBody>
-      </p:sp>
-      <p:sp>
-        <p:nvSpPr>
-          <p:cNvPr id="6" name="Text 4"/>
-          <p:cNvSpPr txBox="1"/>
-          <p:nvPr/>
-        </p:nvSpPr>
-        <p:spPr>
-          <a:xfrm>
-            <a:off x="731520" y="2834640"/>
-            <a:ext cx="7680960" cy="822960"/>
-          </a:xfrm>
-          <a:prstGeom prst="rect">
-            <a:avLst/>
-          </a:prstGeom>
-          <a:noFill/>
-          <a:ln/>
-        </p:spPr>
-        <p:txBody>
-          <a:bodyPr wrap="square" rtlCol="0" anchor="ctr"/>
-          <a:lstStyle/>
-          <a:p>
-            <a:pPr marL="342900" indent="-342900">
-              <a:buSzPct val="100000"/>
-              <a:buChar char="•"/>
-            </a:pPr>
-            <a:r>
-              <a:rPr lang="en-US" sz="1500" dirty="0">
-                <a:solidFill>
-                  <a:srgbClr val="2C2C2C"/>
-                </a:solidFill>
-              </a:rPr>
-              <a:t>• Final TPR = Stage1_TPR × Stage2_TPR</a:t>
-            </a:r>
-            <a:endParaRPr lang="en-US" sz="1500" dirty="0"/>
-          </a:p>
-          <a:p>
-            <a:pPr marL="342900" indent="-342900">
-              <a:buSzPct val="100000"/>
-              <a:buChar char="•"/>
-            </a:pPr>
-            <a:r>
-              <a:rPr lang="en-US" sz="1500" dirty="0">
-                <a:solidFill>
-                  <a:srgbClr val="2C2C2C"/>
-                </a:solidFill>
-              </a:rPr>
-              <a:t>• Our approach: 1.00 × 0.96 = 0.96 ✓</a:t>
-            </a:r>
-            <a:endParaRPr lang="en-US" sz="1500" dirty="0"/>
-          </a:p>
-          <a:p>
-            <a:pPr marL="342900" indent="-342900">
-              <a:buSzPct val="100000"/>
-              <a:buChar char="•"/>
-            </a:pPr>
-            <a:r>
-              <a:rPr lang="en-US" sz="1500" dirty="0">
-                <a:solidFill>
-                  <a:srgbClr val="2C2C2C"/>
-                </a:solidFill>
-              </a:rPr>
-              <a:t>• Alternative: 0.90 × 1.00 = 0.90 (no safety margin)</a:t>
-            </a:r>
-            <a:endParaRPr lang="en-US" sz="1500" dirty="0"/>
-          </a:p>
-        </p:txBody>
-      </p:sp>
-      <p:sp>
-        <p:nvSpPr>
-          <p:cNvPr id="7" name="Shape 5"/>
-          <p:cNvSpPr/>
-          <p:nvPr/>
-        </p:nvSpPr>
-        <p:spPr>
-          <a:xfrm>
-            <a:off x="914400" y="3931920"/>
-            <a:ext cx="7315200" cy="731520"/>
-          </a:xfrm>
-          <a:prstGeom prst="rect">
-            <a:avLst/>
-          </a:prstGeom>
-          <a:solidFill>
-            <a:srgbClr val="F5F5F5"/>
-          </a:solidFill>
-          <a:ln/>
-        </p:spPr>
-      </p:sp>
-      <p:sp>
-        <p:nvSpPr>
-          <p:cNvPr id="8" name="Text 6"/>
-          <p:cNvSpPr txBox="1"/>
-          <p:nvPr/>
-        </p:nvSpPr>
-        <p:spPr>
-          <a:xfrm>
-            <a:off x="914400" y="4023360"/>
-            <a:ext cx="7315200" cy="548640"/>
-          </a:xfrm>
-          <a:prstGeom prst="rect">
-            <a:avLst/>
-          </a:prstGeom>
-          <a:noFill/>
-          <a:ln/>
-        </p:spPr>
-        <p:txBody>
-          <a:bodyPr wrap="square" rtlCol="0" anchor="ctr"/>
-          <a:lstStyle/>
-          <a:p>
-            <a:pPr algn="ctr" indent="0" marL="0">
-              <a:buNone/>
-            </a:pPr>
-            <a:r>
-              <a:rPr lang="en-US" sz="1600" b="1" dirty="0">
-                <a:solidFill>
-                  <a:srgbClr val="F96167"/>
-                </a:solidFill>
-              </a:rPr>
-              <a:t>The 2 misses from Stage 2 would be unrecoverable</a:t>
-            </a:r>
-            <a:endParaRPr lang="en-US" sz="1600" dirty="0"/>
-          </a:p>
-          <a:p>
-            <a:pPr algn="ctr" indent="0" marL="0">
-              <a:buNone/>
-            </a:pPr>
-            <a:r>
-              <a:rPr lang="en-US" sz="1600" b="1" dirty="0">
-                <a:solidFill>
-                  <a:srgbClr val="F96167"/>
-                </a:solidFill>
-              </a:rPr>
-              <a:t>if Stage 1 missed them!</a:t>
-            </a:r>
-            <a:endParaRPr lang="en-US" sz="1600" dirty="0"/>
+              <a:t>Perfect recall on safety-critical real objects</a:t>
+            </a:r>
+            <a:endParaRPr lang="en-US" sz="1400" dirty="0"/>
           </a:p>
         </p:txBody>
       </p:sp>
@@ -6638,27 +4796,71 @@
               <a:buNone/>
             </a:pPr>
             <a:r>
-              <a:rPr lang="en-US" sz="3600" b="1" dirty="0">
+              <a:rPr lang="en-US" sz="3200" b="1" dirty="0">
                 <a:solidFill>
                   <a:srgbClr val="1E2761"/>
                 </a:solidFill>
               </a:rPr>
-              <a:t>Stage 1: Perfect Detection Performance</a:t>
-            </a:r>
-            <a:endParaRPr lang="en-US" sz="3600" dirty="0"/>
-          </a:p>
-        </p:txBody>
-      </p:sp>
-      <p:sp>
-        <p:nvSpPr>
-          <p:cNvPr id="3" name="Text 1"/>
+              <a:t>Design Choice: Intentional High False Positive Rate</a:t>
+            </a:r>
+            <a:endParaRPr lang="en-US" sz="3200" dirty="0"/>
+          </a:p>
+        </p:txBody>
+      </p:sp>
+      <p:pic>
+        <p:nvPicPr>
+          <p:cNvPr id="3" name="Image 0" descr="/Users/kelechiezekwe/Workspace/Computer_vision_lab/Project_work/outputs/visualizations/3_metrics_comparison.png">    </p:cNvPr>
+          <p:cNvPicPr>
+            <a:picLocks noChangeAspect="1"/>
+          </p:cNvPicPr>
+          <p:nvPr/>
+        </p:nvPicPr>
+        <p:blipFill>
+          <a:blip r:embed="rId1"/>
+          <a:stretch>
+            <a:fillRect/>
+          </a:stretch>
+        </p:blipFill>
+        <p:spPr>
+          <a:xfrm>
+            <a:off x="731520" y="1097280"/>
+            <a:ext cx="3657600" cy="3200400"/>
+          </a:xfrm>
+          <a:prstGeom prst="rect">
+            <a:avLst/>
+          </a:prstGeom>
+        </p:spPr>
+      </p:pic>
+      <p:sp>
+        <p:nvSpPr>
+          <p:cNvPr id="4" name="Shape 1"/>
+          <p:cNvSpPr/>
+          <p:nvPr/>
+        </p:nvSpPr>
+        <p:spPr>
+          <a:xfrm>
+            <a:off x="4754880" y="1097280"/>
+            <a:ext cx="3657600" cy="1645920"/>
+          </a:xfrm>
+          <a:prstGeom prst="rect">
+            <a:avLst/>
+          </a:prstGeom>
+          <a:solidFill>
+            <a:srgbClr val="F5F5F5"/>
+          </a:solidFill>
+          <a:ln/>
+        </p:spPr>
+      </p:sp>
+      <p:sp>
+        <p:nvSpPr>
+          <p:cNvPr id="5" name="Text 2"/>
           <p:cNvSpPr txBox="1"/>
           <p:nvPr/>
         </p:nvSpPr>
         <p:spPr>
           <a:xfrm>
-            <a:off x="731520" y="1097280"/>
-            <a:ext cx="7680960" cy="274320"/>
+            <a:off x="4937760" y="1188720"/>
+            <a:ext cx="3291840" cy="274320"/>
           </a:xfrm>
           <a:prstGeom prst="rect">
             <a:avLst/>
@@ -6674,27 +4876,27 @@
               <a:buNone/>
             </a:pPr>
             <a:r>
-              <a:rPr lang="en-US" sz="2000" b="1" dirty="0">
+              <a:rPr lang="en-US" sz="1600" b="1" dirty="0">
                 <a:solidFill>
                   <a:srgbClr val="028090"/>
                 </a:solidFill>
               </a:rPr>
-              <a:t>Test Set Results:</a:t>
-            </a:r>
-            <a:endParaRPr lang="en-US" sz="2000" dirty="0"/>
-          </a:p>
-        </p:txBody>
-      </p:sp>
-      <p:sp>
-        <p:nvSpPr>
-          <p:cNvPr id="4" name="Text 2"/>
+              <a:t>Mathematical Justification:</a:t>
+            </a:r>
+            <a:endParaRPr lang="en-US" sz="1600" dirty="0"/>
+          </a:p>
+        </p:txBody>
+      </p:sp>
+      <p:sp>
+        <p:nvSpPr>
+          <p:cNvPr id="6" name="Text 3"/>
           <p:cNvSpPr txBox="1"/>
           <p:nvPr/>
         </p:nvSpPr>
         <p:spPr>
           <a:xfrm>
-            <a:off x="731520" y="1463040"/>
-            <a:ext cx="3657600" cy="822960"/>
+            <a:off x="4937760" y="1554480"/>
+            <a:ext cx="3291840" cy="1097280"/>
           </a:xfrm>
           <a:prstGeom prst="rect">
             <a:avLst/>
@@ -6706,62 +4908,119 @@
           <a:bodyPr wrap="square" rtlCol="0" anchor="ctr"/>
           <a:lstStyle/>
           <a:p>
-            <a:pPr marL="342900" indent="-342900">
-              <a:buSzPct val="100000"/>
-              <a:buChar char="•"/>
-            </a:pPr>
-            <a:r>
-              <a:rPr lang="en-US" sz="1500" b="1" dirty="0">
-                <a:solidFill>
-                  <a:srgbClr val="2C5F2D"/>
-                </a:solidFill>
-              </a:rPr>
-              <a:t>• Real detected: 45/45 (100%)</a:t>
-            </a:r>
-            <a:endParaRPr lang="en-US" sz="1500" dirty="0"/>
-          </a:p>
-          <a:p>
-            <a:pPr marL="342900" indent="-342900">
-              <a:buSzPct val="100000"/>
-              <a:buChar char="•"/>
-            </a:pPr>
-            <a:r>
-              <a:rPr lang="en-US" sz="1500" b="1" dirty="0">
-                <a:solidFill>
-                  <a:srgbClr val="2C5F2D"/>
-                </a:solidFill>
-              </a:rPr>
-              <a:t>• Real missed: 0/45 (zero!)</a:t>
-            </a:r>
-            <a:endParaRPr lang="en-US" sz="1500" dirty="0"/>
-          </a:p>
-          <a:p>
-            <a:pPr marL="342900" indent="-342900">
-              <a:buSzPct val="100000"/>
-              <a:buChar char="•"/>
-            </a:pPr>
-            <a:r>
-              <a:rPr lang="en-US" sz="1500" b="1" dirty="0">
-                <a:solidFill>
-                  <a:srgbClr val="2C5F2D"/>
-                </a:solidFill>
-              </a:rPr>
-              <a:t>• TPR: 1.0000 ✓ (target ≥ 0.75)</a:t>
-            </a:r>
-            <a:endParaRPr lang="en-US" sz="1500" dirty="0"/>
-          </a:p>
-        </p:txBody>
-      </p:sp>
-      <p:sp>
-        <p:nvSpPr>
-          <p:cNvPr id="5" name="Text 3"/>
+            <a:pPr indent="0" marL="0">
+              <a:buNone/>
+            </a:pPr>
+            <a:r>
+              <a:rPr lang="en-US" sz="1300" dirty="0">
+                <a:solidFill>
+                  <a:srgbClr val="2C2C2C"/>
+                </a:solidFill>
+              </a:rPr>
+              <a:t>Final TPR = Stage1_TPR × Stage2_TPR</a:t>
+            </a:r>
+            <a:endParaRPr lang="en-US" sz="1300" dirty="0"/>
+          </a:p>
+          <a:p>
+            <a:pPr indent="0" marL="0">
+              <a:buNone/>
+            </a:pPr>
+            <a:endParaRPr lang="en-US" sz="1300" dirty="0"/>
+          </a:p>
+          <a:p>
+            <a:pPr indent="0" marL="0">
+              <a:buNone/>
+            </a:pPr>
+            <a:r>
+              <a:rPr lang="en-US" sz="1300" dirty="0">
+                <a:solidFill>
+                  <a:srgbClr val="2C2C2C"/>
+                </a:solidFill>
+              </a:rPr>
+              <a:t>Our approach:</a:t>
+            </a:r>
+            <a:endParaRPr lang="en-US" sz="1300" dirty="0"/>
+          </a:p>
+          <a:p>
+            <a:pPr indent="0" marL="0">
+              <a:buNone/>
+            </a:pPr>
+            <a:r>
+              <a:rPr lang="en-US" sz="1300" dirty="0">
+                <a:solidFill>
+                  <a:srgbClr val="2C2C2C"/>
+                </a:solidFill>
+              </a:rPr>
+              <a:t>1.00 × 0.96 = 0.96 ✓</a:t>
+            </a:r>
+            <a:endParaRPr lang="en-US" sz="1300" dirty="0"/>
+          </a:p>
+          <a:p>
+            <a:pPr indent="0" marL="0">
+              <a:buNone/>
+            </a:pPr>
+            <a:endParaRPr lang="en-US" sz="1300" dirty="0"/>
+          </a:p>
+          <a:p>
+            <a:pPr indent="0" marL="0">
+              <a:buNone/>
+            </a:pPr>
+            <a:r>
+              <a:rPr lang="en-US" sz="1300" dirty="0">
+                <a:solidFill>
+                  <a:srgbClr val="2C2C2C"/>
+                </a:solidFill>
+              </a:rPr>
+              <a:t>Alternative:</a:t>
+            </a:r>
+            <a:endParaRPr lang="en-US" sz="1300" dirty="0"/>
+          </a:p>
+          <a:p>
+            <a:pPr indent="0" marL="0">
+              <a:buNone/>
+            </a:pPr>
+            <a:r>
+              <a:rPr lang="en-US" sz="1300" dirty="0">
+                <a:solidFill>
+                  <a:srgbClr val="2C2C2C"/>
+                </a:solidFill>
+              </a:rPr>
+              <a:t>0.90 × 1.00 = 0.90 ✗</a:t>
+            </a:r>
+            <a:endParaRPr lang="en-US" sz="1300" dirty="0"/>
+          </a:p>
+        </p:txBody>
+      </p:sp>
+      <p:sp>
+        <p:nvSpPr>
+          <p:cNvPr id="7" name="Shape 4"/>
+          <p:cNvSpPr/>
+          <p:nvPr/>
+        </p:nvSpPr>
+        <p:spPr>
+          <a:xfrm>
+            <a:off x="4754880" y="2926080"/>
+            <a:ext cx="3657600" cy="731520"/>
+          </a:xfrm>
+          <a:prstGeom prst="rect">
+            <a:avLst/>
+          </a:prstGeom>
+          <a:solidFill>
+            <a:srgbClr val="F96167"/>
+          </a:solidFill>
+          <a:ln/>
+        </p:spPr>
+      </p:sp>
+      <p:sp>
+        <p:nvSpPr>
+          <p:cNvPr id="8" name="Text 5"/>
           <p:cNvSpPr txBox="1"/>
           <p:nvPr/>
         </p:nvSpPr>
         <p:spPr>
           <a:xfrm>
-            <a:off x="4754880" y="1463040"/>
-            <a:ext cx="3657600" cy="822960"/>
+            <a:off x="4846320" y="3017520"/>
+            <a:ext cx="3474720" cy="548640"/>
           </a:xfrm>
           <a:prstGeom prst="rect">
             <a:avLst/>
@@ -6773,177 +5032,32 @@
           <a:bodyPr wrap="square" rtlCol="0" anchor="ctr"/>
           <a:lstStyle/>
           <a:p>
-            <a:pPr marL="342900" indent="-342900">
-              <a:buSzPct val="100000"/>
-              <a:buChar char="•"/>
-            </a:pPr>
-            <a:r>
-              <a:rPr lang="en-US" sz="1500" dirty="0">
-                <a:solidFill>
-                  <a:srgbClr val="2C2C2C"/>
-                </a:solidFill>
-              </a:rPr>
-              <a:t>• Decoys detected: 62/103 (60%)</a:t>
-            </a:r>
-            <a:endParaRPr lang="en-US" sz="1500" dirty="0"/>
-          </a:p>
-          <a:p>
-            <a:pPr marL="342900" indent="-342900">
-              <a:buSzPct val="100000"/>
-              <a:buChar char="•"/>
-            </a:pPr>
-            <a:r>
-              <a:rPr lang="en-US" sz="1500" dirty="0">
-                <a:solidFill>
-                  <a:srgbClr val="2C2C2C"/>
-                </a:solidFill>
-              </a:rPr>
-              <a:t>• FPR: 0.6019</a:t>
-            </a:r>
-            <a:endParaRPr lang="en-US" sz="1500" dirty="0"/>
-          </a:p>
-          <a:p>
-            <a:pPr marL="342900" indent="-342900">
-              <a:buSzPct val="100000"/>
-              <a:buChar char="•"/>
-            </a:pPr>
-            <a:r>
-              <a:rPr lang="en-US" sz="1500" dirty="0">
-                <a:solidFill>
-                  <a:srgbClr val="2C2C2C"/>
-                </a:solidFill>
-              </a:rPr>
-              <a:t>  (expected, will be filtered)</a:t>
-            </a:r>
-            <a:endParaRPr lang="en-US" sz="1500" dirty="0"/>
-          </a:p>
-        </p:txBody>
-      </p:sp>
-      <p:sp>
-        <p:nvSpPr>
-          <p:cNvPr id="6" name="Shape 4"/>
-          <p:cNvSpPr/>
-          <p:nvPr/>
-        </p:nvSpPr>
-        <p:spPr>
-          <a:xfrm>
-            <a:off x="1371600" y="2743200"/>
-            <a:ext cx="6400800" cy="731520"/>
-          </a:xfrm>
-          <a:prstGeom prst="rect">
-            <a:avLst/>
-          </a:prstGeom>
-          <a:solidFill>
-            <a:srgbClr val="2C5F2D"/>
-          </a:solidFill>
-          <a:ln/>
-        </p:spPr>
-      </p:sp>
-      <p:sp>
-        <p:nvSpPr>
-          <p:cNvPr id="7" name="Text 5"/>
-          <p:cNvSpPr txBox="1"/>
-          <p:nvPr/>
-        </p:nvSpPr>
-        <p:spPr>
-          <a:xfrm>
-            <a:off x="1554480" y="2834640"/>
-            <a:ext cx="6035040" cy="274320"/>
-          </a:xfrm>
-          <a:prstGeom prst="rect">
-            <a:avLst/>
-          </a:prstGeom>
-          <a:noFill/>
-          <a:ln/>
-        </p:spPr>
-        <p:txBody>
-          <a:bodyPr wrap="square" rtlCol="0" anchor="ctr"/>
-          <a:lstStyle/>
-          <a:p>
-            <a:pPr indent="0" marL="0">
-              <a:buNone/>
-            </a:pPr>
-            <a:r>
-              <a:rPr lang="en-US" sz="1600" dirty="0">
+            <a:pPr algn="ctr" indent="0" marL="0">
+              <a:buNone/>
+            </a:pPr>
+            <a:r>
+              <a:rPr lang="en-US" sz="1300" b="1" dirty="0">
                 <a:solidFill>
                   <a:srgbClr val="FFFFFF"/>
                 </a:solidFill>
               </a:rPr>
-              <a:t>Key Insight:</a:t>
-            </a:r>
-            <a:endParaRPr lang="en-US" sz="1600" dirty="0"/>
-          </a:p>
-        </p:txBody>
-      </p:sp>
-      <p:sp>
-        <p:nvSpPr>
-          <p:cNvPr id="8" name="Text 6"/>
-          <p:cNvSpPr txBox="1"/>
-          <p:nvPr/>
-        </p:nvSpPr>
-        <p:spPr>
-          <a:xfrm>
-            <a:off x="1554480" y="3154680"/>
-            <a:ext cx="6035040" cy="274320"/>
-          </a:xfrm>
-          <a:prstGeom prst="rect">
-            <a:avLst/>
-          </a:prstGeom>
-          <a:noFill/>
-          <a:ln/>
-        </p:spPr>
-        <p:txBody>
-          <a:bodyPr wrap="square" rtlCol="0" anchor="ctr"/>
-          <a:lstStyle/>
-          <a:p>
-            <a:pPr indent="0" marL="0">
-              <a:buNone/>
-            </a:pPr>
-            <a:r>
-              <a:rPr lang="en-US" sz="1800" b="1" dirty="0">
+              <a:t>The 2 misses from Stage 2 would be</a:t>
+            </a:r>
+            <a:endParaRPr lang="en-US" sz="1300" dirty="0"/>
+          </a:p>
+          <a:p>
+            <a:pPr algn="ctr" indent="0" marL="0">
+              <a:buNone/>
+            </a:pPr>
+            <a:r>
+              <a:rPr lang="en-US" sz="1300" b="1" dirty="0">
                 <a:solidFill>
                   <a:srgbClr val="FFFFFF"/>
                 </a:solidFill>
               </a:rPr>
-              <a:t>Perfect recall on safety-critical real objects</a:t>
-            </a:r>
-            <a:endParaRPr lang="en-US" sz="1800" dirty="0"/>
-          </a:p>
-        </p:txBody>
-      </p:sp>
-      <p:sp>
-        <p:nvSpPr>
-          <p:cNvPr id="9" name="Text 7"/>
-          <p:cNvSpPr txBox="1"/>
-          <p:nvPr/>
-        </p:nvSpPr>
-        <p:spPr>
-          <a:xfrm>
-            <a:off x="731520" y="4114800"/>
-            <a:ext cx="7680960" cy="274320"/>
-          </a:xfrm>
-          <a:prstGeom prst="rect">
-            <a:avLst/>
-          </a:prstGeom>
-          <a:noFill/>
-          <a:ln/>
-        </p:spPr>
-        <p:txBody>
-          <a:bodyPr wrap="square" rtlCol="0" anchor="ctr"/>
-          <a:lstStyle/>
-          <a:p>
-            <a:pPr indent="0" marL="0">
-              <a:buNone/>
-            </a:pPr>
-            <a:r>
-              <a:rPr lang="en-US" sz="1200" i="1" dirty="0">
-                <a:solidFill>
-                  <a:srgbClr val="2C2C2C"/>
-                </a:solidFill>
-              </a:rPr>
-              <a:t>Reference: See Figure 3 (TPR/FPR Comparison graph)</a:t>
-            </a:r>
-            <a:endParaRPr lang="en-US" sz="1200" dirty="0"/>
+              <a:t>unrecoverable if Stage 1 missed them!</a:t>
+            </a:r>
+            <a:endParaRPr lang="en-US" sz="1300" dirty="0"/>
           </a:p>
         </p:txBody>
       </p:sp>
@@ -7009,22 +5123,46 @@
                   <a:srgbClr val="1E2761"/>
                 </a:solidFill>
               </a:rPr>
-              <a:t>Stage 2: Real vs Decoy Classification</a:t>
+              <a:t>Stage 1: Confidence Distribution Analysis</a:t>
             </a:r>
             <a:endParaRPr lang="en-US" sz="3600" dirty="0"/>
           </a:p>
         </p:txBody>
       </p:sp>
-      <p:sp>
-        <p:nvSpPr>
-          <p:cNvPr id="3" name="Text 1"/>
+      <p:pic>
+        <p:nvPicPr>
+          <p:cNvPr id="3" name="Image 0" descr="/Users/kelechiezekwe/Workspace/Computer_vision_lab/Project_work/outputs/visualizations/4_confidence_distribution.png">    </p:cNvPr>
+          <p:cNvPicPr>
+            <a:picLocks noChangeAspect="1"/>
+          </p:cNvPicPr>
+          <p:nvPr/>
+        </p:nvPicPr>
+        <p:blipFill>
+          <a:blip r:embed="rId1"/>
+          <a:stretch>
+            <a:fillRect/>
+          </a:stretch>
+        </p:blipFill>
+        <p:spPr>
+          <a:xfrm>
+            <a:off x="731520" y="1097280"/>
+            <a:ext cx="7680960" cy="3474720"/>
+          </a:xfrm>
+          <a:prstGeom prst="rect">
+            <a:avLst/>
+          </a:prstGeom>
+        </p:spPr>
+      </p:pic>
+      <p:sp>
+        <p:nvSpPr>
+          <p:cNvPr id="4" name="Text 1"/>
           <p:cNvSpPr txBox="1"/>
           <p:nvPr/>
         </p:nvSpPr>
         <p:spPr>
           <a:xfrm>
-            <a:off x="457200" y="868680"/>
-            <a:ext cx="8229600" cy="274320"/>
+            <a:off x="731520" y="4663440"/>
+            <a:ext cx="7680960" cy="274320"/>
           </a:xfrm>
           <a:prstGeom prst="rect">
             <a:avLst/>
@@ -7036,306 +5174,18 @@
           <a:bodyPr wrap="square" rtlCol="0" anchor="ctr"/>
           <a:lstStyle/>
           <a:p>
-            <a:pPr indent="0" marL="0">
+            <a:pPr algn="ctr" indent="0" marL="0">
               <a:buNone/>
             </a:pPr>
             <a:r>
               <a:rPr lang="en-US" sz="1400" i="1" dirty="0">
                 <a:solidFill>
-                  <a:srgbClr val="028090"/>
-                </a:solidFill>
-              </a:rPr>
-              <a:t>Responsible: Shravani Kuchi</a:t>
+                  <a:srgbClr val="2C2C2C"/>
+                </a:solidFill>
+              </a:rPr>
+              <a:t>Threshold: 0.10 (intentionally low for maximum sensitivity)</a:t>
             </a:r>
             <a:endParaRPr lang="en-US" sz="1400" dirty="0"/>
-          </a:p>
-        </p:txBody>
-      </p:sp>
-      <p:sp>
-        <p:nvSpPr>
-          <p:cNvPr id="4" name="Text 2"/>
-          <p:cNvSpPr txBox="1"/>
-          <p:nvPr/>
-        </p:nvSpPr>
-        <p:spPr>
-          <a:xfrm>
-            <a:off x="731520" y="1280160"/>
-            <a:ext cx="7680960" cy="274320"/>
-          </a:xfrm>
-          <a:prstGeom prst="rect">
-            <a:avLst/>
-          </a:prstGeom>
-          <a:noFill/>
-          <a:ln/>
-        </p:spPr>
-        <p:txBody>
-          <a:bodyPr wrap="square" rtlCol="0" anchor="ctr"/>
-          <a:lstStyle/>
-          <a:p>
-            <a:pPr indent="0" marL="0">
-              <a:buNone/>
-            </a:pPr>
-            <a:r>
-              <a:rPr lang="en-US" sz="1800" b="1" dirty="0">
-                <a:solidFill>
-                  <a:srgbClr val="1E2761"/>
-                </a:solidFill>
-              </a:rPr>
-              <a:t>Method: Depth-based geometric cues</a:t>
-            </a:r>
-            <a:endParaRPr lang="en-US" sz="1800" dirty="0"/>
-          </a:p>
-        </p:txBody>
-      </p:sp>
-      <p:sp>
-        <p:nvSpPr>
-          <p:cNvPr id="5" name="Shape 3"/>
-          <p:cNvSpPr/>
-          <p:nvPr/>
-        </p:nvSpPr>
-        <p:spPr>
-          <a:xfrm>
-            <a:off x="731520" y="1737360"/>
-            <a:ext cx="7680960" cy="1005840"/>
-          </a:xfrm>
-          <a:prstGeom prst="rect">
-            <a:avLst/>
-          </a:prstGeom>
-          <a:solidFill>
-            <a:srgbClr val="F5F5F5"/>
-          </a:solidFill>
-          <a:ln/>
-        </p:spPr>
-      </p:sp>
-      <p:sp>
-        <p:nvSpPr>
-          <p:cNvPr id="6" name="Text 4"/>
-          <p:cNvSpPr txBox="1"/>
-          <p:nvPr/>
-        </p:nvSpPr>
-        <p:spPr>
-          <a:xfrm>
-            <a:off x="914400" y="1828800"/>
-            <a:ext cx="7315200" cy="274320"/>
-          </a:xfrm>
-          <a:prstGeom prst="rect">
-            <a:avLst/>
-          </a:prstGeom>
-          <a:noFill/>
-          <a:ln/>
-        </p:spPr>
-        <p:txBody>
-          <a:bodyPr wrap="square" rtlCol="0" anchor="ctr"/>
-          <a:lstStyle/>
-          <a:p>
-            <a:pPr indent="0" marL="0">
-              <a:buNone/>
-            </a:pPr>
-            <a:r>
-              <a:rPr lang="en-US" sz="1600" b="1" dirty="0">
-                <a:solidFill>
-                  <a:srgbClr val="028090"/>
-                </a:solidFill>
-              </a:rPr>
-              <a:t>Feature 1: Height in metres</a:t>
-            </a:r>
-            <a:endParaRPr lang="en-US" sz="1600" dirty="0"/>
-          </a:p>
-        </p:txBody>
-      </p:sp>
-      <p:sp>
-        <p:nvSpPr>
-          <p:cNvPr id="7" name="Text 5"/>
-          <p:cNvSpPr txBox="1"/>
-          <p:nvPr/>
-        </p:nvSpPr>
-        <p:spPr>
-          <a:xfrm>
-            <a:off x="914400" y="2148840"/>
-            <a:ext cx="7315200" cy="548640"/>
-          </a:xfrm>
-          <a:prstGeom prst="rect">
-            <a:avLst/>
-          </a:prstGeom>
-          <a:noFill/>
-          <a:ln/>
-        </p:spPr>
-        <p:txBody>
-          <a:bodyPr wrap="square" rtlCol="0" anchor="ctr"/>
-          <a:lstStyle/>
-          <a:p>
-            <a:pPr marL="342900" indent="-342900">
-              <a:buSzPct val="100000"/>
-              <a:buChar char="•"/>
-            </a:pPr>
-            <a:r>
-              <a:rPr lang="en-US" sz="1400" dirty="0">
-                <a:solidFill>
-                  <a:srgbClr val="2C2C2C"/>
-                </a:solidFill>
-              </a:rPr>
-              <a:t>• height_m = box_height × depth / fy</a:t>
-            </a:r>
-            <a:endParaRPr lang="en-US" sz="1400" dirty="0"/>
-          </a:p>
-          <a:p>
-            <a:pPr marL="342900" indent="-342900">
-              <a:buSzPct val="100000"/>
-              <a:buChar char="•"/>
-            </a:pPr>
-            <a:r>
-              <a:rPr lang="en-US" sz="1400" dirty="0">
-                <a:solidFill>
-                  <a:srgbClr val="2C2C2C"/>
-                </a:solidFill>
-              </a:rPr>
-              <a:t>• Real: ~0.58m, Decoy: ~0.31m</a:t>
-            </a:r>
-            <a:endParaRPr lang="en-US" sz="1400" dirty="0"/>
-          </a:p>
-        </p:txBody>
-      </p:sp>
-      <p:sp>
-        <p:nvSpPr>
-          <p:cNvPr id="8" name="Shape 6"/>
-          <p:cNvSpPr/>
-          <p:nvPr/>
-        </p:nvSpPr>
-        <p:spPr>
-          <a:xfrm>
-            <a:off x="731520" y="2926080"/>
-            <a:ext cx="7680960" cy="1005840"/>
-          </a:xfrm>
-          <a:prstGeom prst="rect">
-            <a:avLst/>
-          </a:prstGeom>
-          <a:solidFill>
-            <a:srgbClr val="F5F5F5"/>
-          </a:solidFill>
-          <a:ln/>
-        </p:spPr>
-      </p:sp>
-      <p:sp>
-        <p:nvSpPr>
-          <p:cNvPr id="9" name="Text 7"/>
-          <p:cNvSpPr txBox="1"/>
-          <p:nvPr/>
-        </p:nvSpPr>
-        <p:spPr>
-          <a:xfrm>
-            <a:off x="914400" y="3017520"/>
-            <a:ext cx="7315200" cy="274320"/>
-          </a:xfrm>
-          <a:prstGeom prst="rect">
-            <a:avLst/>
-          </a:prstGeom>
-          <a:noFill/>
-          <a:ln/>
-        </p:spPr>
-        <p:txBody>
-          <a:bodyPr wrap="square" rtlCol="0" anchor="ctr"/>
-          <a:lstStyle/>
-          <a:p>
-            <a:pPr indent="0" marL="0">
-              <a:buNone/>
-            </a:pPr>
-            <a:r>
-              <a:rPr lang="en-US" sz="1600" b="1" dirty="0">
-                <a:solidFill>
-                  <a:srgbClr val="028090"/>
-                </a:solidFill>
-              </a:rPr>
-              <a:t>Feature 2: Depth contrast</a:t>
-            </a:r>
-            <a:endParaRPr lang="en-US" sz="1600" dirty="0"/>
-          </a:p>
-        </p:txBody>
-      </p:sp>
-      <p:sp>
-        <p:nvSpPr>
-          <p:cNvPr id="10" name="Text 8"/>
-          <p:cNvSpPr txBox="1"/>
-          <p:nvPr/>
-        </p:nvSpPr>
-        <p:spPr>
-          <a:xfrm>
-            <a:off x="914400" y="3337560"/>
-            <a:ext cx="7315200" cy="548640"/>
-          </a:xfrm>
-          <a:prstGeom prst="rect">
-            <a:avLst/>
-          </a:prstGeom>
-          <a:noFill/>
-          <a:ln/>
-        </p:spPr>
-        <p:txBody>
-          <a:bodyPr wrap="square" rtlCol="0" anchor="ctr"/>
-          <a:lstStyle/>
-          <a:p>
-            <a:pPr marL="342900" indent="-342900">
-              <a:buSzPct val="100000"/>
-              <a:buChar char="•"/>
-            </a:pPr>
-            <a:r>
-              <a:rPr lang="en-US" sz="1400" dirty="0">
-                <a:solidFill>
-                  <a:srgbClr val="2C2C2C"/>
-                </a:solidFill>
-              </a:rPr>
-              <a:t>• contrast = (ring_depth - object_depth) / depth</a:t>
-            </a:r>
-            <a:endParaRPr lang="en-US" sz="1400" dirty="0"/>
-          </a:p>
-          <a:p>
-            <a:pPr marL="342900" indent="-342900">
-              <a:buSzPct val="100000"/>
-              <a:buChar char="•"/>
-            </a:pPr>
-            <a:r>
-              <a:rPr lang="en-US" sz="1400" dirty="0">
-                <a:solidFill>
-                  <a:srgbClr val="2C2C2C"/>
-                </a:solidFill>
-              </a:rPr>
-              <a:t>• Real: ~0.45 (free space), Decoy: ~0.02 (flat)</a:t>
-            </a:r>
-            <a:endParaRPr lang="en-US" sz="1400" dirty="0"/>
-          </a:p>
-        </p:txBody>
-      </p:sp>
-      <p:sp>
-        <p:nvSpPr>
-          <p:cNvPr id="11" name="Text 9"/>
-          <p:cNvSpPr txBox="1"/>
-          <p:nvPr/>
-        </p:nvSpPr>
-        <p:spPr>
-          <a:xfrm>
-            <a:off x="731520" y="4206240"/>
-            <a:ext cx="7680960" cy="365760"/>
-          </a:xfrm>
-          <a:prstGeom prst="rect">
-            <a:avLst/>
-          </a:prstGeom>
-          <a:noFill/>
-          <a:ln/>
-        </p:spPr>
-        <p:txBody>
-          <a:bodyPr wrap="square" rtlCol="0" anchor="ctr"/>
-          <a:lstStyle/>
-          <a:p>
-            <a:pPr algn="ctr" indent="0" marL="0">
-              <a:buNone/>
-            </a:pPr>
-            <a:r>
-              <a:rPr lang="en-US" sz="1500" b="1" dirty="0">
-                <a:solidFill>
-                  <a:srgbClr val="F96167"/>
-                </a:solidFill>
-              </a:rPr>
-              <a:t>Decision Rule: REAL if height ≥ 0.5554m AND contrast ≥ 0.1922</a:t>
-            </a:r>
-            <a:endParaRPr lang="en-US" sz="1500" dirty="0"/>
           </a:p>
         </p:txBody>
       </p:sp>
@@ -7401,7 +5251,7 @@
                   <a:srgbClr val="1E2761"/>
                 </a:solidFill>
               </a:rPr>
-              <a:t>Stage 2: Zero False Positives Achieved</a:t>
+              <a:t>Stage 2: Real Objects Accepted</a:t>
             </a:r>
             <a:endParaRPr lang="en-US" sz="3600" dirty="0"/>
           </a:p>
@@ -7415,7 +5265,67 @@
         </p:nvSpPr>
         <p:spPr>
           <a:xfrm>
-            <a:off x="731520" y="1097280"/>
+            <a:off x="457200" y="868680"/>
+            <a:ext cx="8229600" cy="274320"/>
+          </a:xfrm>
+          <a:prstGeom prst="rect">
+            <a:avLst/>
+          </a:prstGeom>
+          <a:noFill/>
+          <a:ln/>
+        </p:spPr>
+        <p:txBody>
+          <a:bodyPr wrap="square" rtlCol="0" anchor="ctr"/>
+          <a:lstStyle/>
+          <a:p>
+            <a:pPr indent="0" marL="0">
+              <a:buNone/>
+            </a:pPr>
+            <a:r>
+              <a:rPr lang="en-US" sz="1400" i="1" dirty="0">
+                <a:solidFill>
+                  <a:srgbClr val="028090"/>
+                </a:solidFill>
+              </a:rPr>
+              <a:t>Responsible: Shravani Kuchi | Depth-based Filtering</a:t>
+            </a:r>
+            <a:endParaRPr lang="en-US" sz="1400" dirty="0"/>
+          </a:p>
+        </p:txBody>
+      </p:sp>
+      <p:pic>
+        <p:nvPicPr>
+          <p:cNvPr id="4" name="Image 0" descr="/Users/kelechiezekwe/Workspace/Computer_vision_lab/Project_work/outputs/figures/ev_real_accepted.png">    </p:cNvPr>
+          <p:cNvPicPr>
+            <a:picLocks noChangeAspect="1"/>
+          </p:cNvPicPr>
+          <p:nvPr/>
+        </p:nvPicPr>
+        <p:blipFill>
+          <a:blip r:embed="rId1"/>
+          <a:stretch>
+            <a:fillRect/>
+          </a:stretch>
+        </p:blipFill>
+        <p:spPr>
+          <a:xfrm>
+            <a:off x="914400" y="1371600"/>
+            <a:ext cx="7315200" cy="3200400"/>
+          </a:xfrm>
+          <a:prstGeom prst="rect">
+            <a:avLst/>
+          </a:prstGeom>
+        </p:spPr>
+      </p:pic>
+      <p:sp>
+        <p:nvSpPr>
+          <p:cNvPr id="5" name="Text 2"/>
+          <p:cNvSpPr txBox="1"/>
+          <p:nvPr/>
+        </p:nvSpPr>
+        <p:spPr>
+          <a:xfrm>
+            <a:off x="731520" y="4663440"/>
             <a:ext cx="7680960" cy="274320"/>
           </a:xfrm>
           <a:prstGeom prst="rect">
@@ -7428,259 +5338,18 @@
           <a:bodyPr wrap="square" rtlCol="0" anchor="ctr"/>
           <a:lstStyle/>
           <a:p>
-            <a:pPr indent="0" marL="0">
-              <a:buNone/>
-            </a:pPr>
-            <a:r>
-              <a:rPr lang="en-US" sz="2000" b="1" dirty="0">
-                <a:solidFill>
-                  <a:srgbClr val="028090"/>
-                </a:solidFill>
-              </a:rPr>
-              <a:t>Test Set Results:</a:t>
-            </a:r>
-            <a:endParaRPr lang="en-US" sz="2000" dirty="0"/>
-          </a:p>
-        </p:txBody>
-      </p:sp>
-      <p:sp>
-        <p:nvSpPr>
-          <p:cNvPr id="4" name="Text 2"/>
-          <p:cNvSpPr txBox="1"/>
-          <p:nvPr/>
-        </p:nvSpPr>
-        <p:spPr>
-          <a:xfrm>
-            <a:off x="731520" y="1463040"/>
-            <a:ext cx="3657600" cy="822960"/>
-          </a:xfrm>
-          <a:prstGeom prst="rect">
-            <a:avLst/>
-          </a:prstGeom>
-          <a:noFill/>
-          <a:ln/>
-        </p:spPr>
-        <p:txBody>
-          <a:bodyPr wrap="square" rtlCol="0" anchor="ctr"/>
-          <a:lstStyle/>
-          <a:p>
-            <a:pPr marL="342900" indent="-342900">
-              <a:buSzPct val="100000"/>
-              <a:buChar char="•"/>
-            </a:pPr>
-            <a:r>
-              <a:rPr lang="en-US" sz="1500" b="1" dirty="0">
+            <a:pPr algn="ctr" indent="0" marL="0">
+              <a:buNone/>
+            </a:pPr>
+            <a:r>
+              <a:rPr lang="en-US" sz="1600" b="1" dirty="0">
                 <a:solidFill>
                   <a:srgbClr val="2C5F2D"/>
                 </a:solidFill>
               </a:rPr>
-              <a:t>• Decoys accepted: 0/103 (0%)</a:t>
-            </a:r>
-            <a:endParaRPr lang="en-US" sz="1500" dirty="0"/>
-          </a:p>
-          <a:p>
-            <a:pPr marL="342900" indent="-342900">
-              <a:buSzPct val="100000"/>
-              <a:buChar char="•"/>
-            </a:pPr>
-            <a:r>
-              <a:rPr lang="en-US" sz="1500" b="1" dirty="0">
-                <a:solidFill>
-                  <a:srgbClr val="2C5F2D"/>
-                </a:solidFill>
-              </a:rPr>
-              <a:t>• Decoys rejected: 103/103 (100%)</a:t>
-            </a:r>
-            <a:endParaRPr lang="en-US" sz="1500" dirty="0"/>
-          </a:p>
-          <a:p>
-            <a:pPr marL="342900" indent="-342900">
-              <a:buSzPct val="100000"/>
-              <a:buChar char="•"/>
-            </a:pPr>
-            <a:r>
-              <a:rPr lang="en-US" sz="1500" b="1" dirty="0">
-                <a:solidFill>
-                  <a:srgbClr val="2C5F2D"/>
-                </a:solidFill>
-              </a:rPr>
-              <a:t>• FPR: 0.0000 ✓ (target ≤ 0.15)</a:t>
-            </a:r>
-            <a:endParaRPr lang="en-US" sz="1500" dirty="0"/>
-          </a:p>
-        </p:txBody>
-      </p:sp>
-      <p:sp>
-        <p:nvSpPr>
-          <p:cNvPr id="5" name="Text 3"/>
-          <p:cNvSpPr txBox="1"/>
-          <p:nvPr/>
-        </p:nvSpPr>
-        <p:spPr>
-          <a:xfrm>
-            <a:off x="4754880" y="1463040"/>
-            <a:ext cx="3657600" cy="1097280"/>
-          </a:xfrm>
-          <a:prstGeom prst="rect">
-            <a:avLst/>
-          </a:prstGeom>
-          <a:noFill/>
-          <a:ln/>
-        </p:spPr>
-        <p:txBody>
-          <a:bodyPr wrap="square" rtlCol="0" anchor="ctr"/>
-          <a:lstStyle/>
-          <a:p>
-            <a:pPr marL="342900" indent="-342900">
-              <a:buSzPct val="100000"/>
-              <a:buChar char="•"/>
-            </a:pPr>
-            <a:r>
-              <a:rPr lang="en-US" sz="1500" dirty="0">
-                <a:solidFill>
-                  <a:srgbClr val="2C2C2C"/>
-                </a:solidFill>
-              </a:rPr>
-              <a:t>• Real accepted: 43/45</a:t>
-            </a:r>
-            <a:endParaRPr lang="en-US" sz="1500" dirty="0"/>
-          </a:p>
-          <a:p>
-            <a:pPr marL="342900" indent="-342900">
-              <a:buSzPct val="100000"/>
-              <a:buChar char="•"/>
-            </a:pPr>
-            <a:r>
-              <a:rPr lang="en-US" sz="1500" dirty="0">
-                <a:solidFill>
-                  <a:srgbClr val="2C2C2C"/>
-                </a:solidFill>
-              </a:rPr>
-              <a:t>• Real rejected: 2/45</a:t>
-            </a:r>
-            <a:endParaRPr lang="en-US" sz="1500" dirty="0"/>
-          </a:p>
-          <a:p>
-            <a:pPr marL="342900" indent="-342900">
-              <a:buSzPct val="100000"/>
-              <a:buChar char="•"/>
-            </a:pPr>
-            <a:r>
-              <a:rPr lang="en-US" sz="1500" dirty="0">
-                <a:solidFill>
-                  <a:srgbClr val="2C2C2C"/>
-                </a:solidFill>
-              </a:rPr>
-              <a:t>  (timing edge cases)</a:t>
-            </a:r>
-            <a:endParaRPr lang="en-US" sz="1500" dirty="0"/>
-          </a:p>
-          <a:p>
-            <a:pPr marL="342900" indent="-342900">
-              <a:buSzPct val="100000"/>
-              <a:buChar char="•"/>
-            </a:pPr>
-            <a:r>
-              <a:rPr lang="en-US" sz="1500" dirty="0">
-                <a:solidFill>
-                  <a:srgbClr val="2C2C2C"/>
-                </a:solidFill>
-              </a:rPr>
-              <a:t>• TPR: 0.9556 ✓ (target ≥ 0.75)</a:t>
-            </a:r>
-            <a:endParaRPr lang="en-US" sz="1500" dirty="0"/>
-          </a:p>
-        </p:txBody>
-      </p:sp>
-      <p:sp>
-        <p:nvSpPr>
-          <p:cNvPr id="6" name="Shape 4"/>
-          <p:cNvSpPr/>
-          <p:nvPr/>
-        </p:nvSpPr>
-        <p:spPr>
-          <a:xfrm>
-            <a:off x="1371600" y="2926080"/>
-            <a:ext cx="6400800" cy="640080"/>
-          </a:xfrm>
-          <a:prstGeom prst="rect">
-            <a:avLst/>
-          </a:prstGeom>
-          <a:solidFill>
-            <a:srgbClr val="00A896"/>
-          </a:solidFill>
-          <a:ln/>
-        </p:spPr>
-      </p:sp>
-      <p:sp>
-        <p:nvSpPr>
-          <p:cNvPr id="7" name="Text 5"/>
-          <p:cNvSpPr txBox="1"/>
-          <p:nvPr/>
-        </p:nvSpPr>
-        <p:spPr>
-          <a:xfrm>
-            <a:off x="1554480" y="3063240"/>
-            <a:ext cx="6035040" cy="365760"/>
-          </a:xfrm>
-          <a:prstGeom prst="rect">
-            <a:avLst/>
-          </a:prstGeom>
-          <a:noFill/>
-          <a:ln/>
-        </p:spPr>
-        <p:txBody>
-          <a:bodyPr wrap="square" rtlCol="0" anchor="ctr"/>
-          <a:lstStyle/>
-          <a:p>
-            <a:pPr algn="ctr" indent="0" marL="0">
-              <a:buNone/>
-            </a:pPr>
-            <a:r>
-              <a:rPr lang="en-US" sz="2200" b="1" dirty="0">
-                <a:solidFill>
-                  <a:srgbClr val="FFFFFF"/>
-                </a:solidFill>
-              </a:rPr>
-              <a:t>FPR Improvement: 60% → 0% (perfect!)</a:t>
-            </a:r>
-            <a:endParaRPr lang="en-US" sz="2200" dirty="0"/>
-          </a:p>
-        </p:txBody>
-      </p:sp>
-      <p:sp>
-        <p:nvSpPr>
-          <p:cNvPr id="8" name="Text 6"/>
-          <p:cNvSpPr txBox="1"/>
-          <p:nvPr/>
-        </p:nvSpPr>
-        <p:spPr>
-          <a:xfrm>
-            <a:off x="731520" y="4114800"/>
-            <a:ext cx="7680960" cy="274320"/>
-          </a:xfrm>
-          <a:prstGeom prst="rect">
-            <a:avLst/>
-          </a:prstGeom>
-          <a:noFill/>
-          <a:ln/>
-        </p:spPr>
-        <p:txBody>
-          <a:bodyPr wrap="square" rtlCol="0" anchor="ctr"/>
-          <a:lstStyle/>
-          <a:p>
-            <a:pPr indent="0" marL="0">
-              <a:buNone/>
-            </a:pPr>
-            <a:r>
-              <a:rPr lang="en-US" sz="1200" i="1" dirty="0">
-                <a:solidFill>
-                  <a:srgbClr val="2C2C2C"/>
-                </a:solidFill>
-              </a:rPr>
-              <a:t>Reference: See Figure 8 (Decoys Rejected graph)</a:t>
-            </a:r>
-            <a:endParaRPr lang="en-US" sz="1200" dirty="0"/>
+              <a:t>43/45 real objects accepted (96% TPR)</a:t>
+            </a:r>
+            <a:endParaRPr lang="en-US" sz="1600" dirty="0"/>
           </a:p>
         </p:txBody>
       </p:sp>
@@ -7741,27 +5410,71 @@
               <a:buNone/>
             </a:pPr>
             <a:r>
-              <a:rPr lang="en-US" sz="3200" b="1" dirty="0">
+              <a:rPr lang="en-US" sz="3600" b="1" dirty="0">
                 <a:solidFill>
                   <a:srgbClr val="1E2761"/>
                 </a:solidFill>
               </a:rPr>
-              <a:t>Edge Case Analysis: Why 2 Real Objects Were Rejected</a:t>
-            </a:r>
-            <a:endParaRPr lang="en-US" sz="3200" dirty="0"/>
-          </a:p>
-        </p:txBody>
-      </p:sp>
-      <p:sp>
-        <p:nvSpPr>
-          <p:cNvPr id="3" name="Text 1"/>
+              <a:t>Stage 2: Perfect Decoy Rejection</a:t>
+            </a:r>
+            <a:endParaRPr lang="en-US" sz="3600" dirty="0"/>
+          </a:p>
+        </p:txBody>
+      </p:sp>
+      <p:pic>
+        <p:nvPicPr>
+          <p:cNvPr id="3" name="Image 0" descr="/Users/kelechiezekwe/Workspace/Computer_vision_lab/Project_work/outputs/figures/ev_decoys_rejected.png">    </p:cNvPr>
+          <p:cNvPicPr>
+            <a:picLocks noChangeAspect="1"/>
+          </p:cNvPicPr>
+          <p:nvPr/>
+        </p:nvPicPr>
+        <p:blipFill>
+          <a:blip r:embed="rId1"/>
+          <a:stretch>
+            <a:fillRect/>
+          </a:stretch>
+        </p:blipFill>
+        <p:spPr>
+          <a:xfrm>
+            <a:off x="914400" y="1097280"/>
+            <a:ext cx="7315200" cy="3200400"/>
+          </a:xfrm>
+          <a:prstGeom prst="rect">
+            <a:avLst/>
+          </a:prstGeom>
+        </p:spPr>
+      </p:pic>
+      <p:sp>
+        <p:nvSpPr>
+          <p:cNvPr id="4" name="Shape 1"/>
+          <p:cNvSpPr/>
+          <p:nvPr/>
+        </p:nvSpPr>
+        <p:spPr>
+          <a:xfrm>
+            <a:off x="1828800" y="4480560"/>
+            <a:ext cx="5486400" cy="548640"/>
+          </a:xfrm>
+          <a:prstGeom prst="rect">
+            <a:avLst/>
+          </a:prstGeom>
+          <a:solidFill>
+            <a:srgbClr val="00A896"/>
+          </a:solidFill>
+          <a:ln/>
+        </p:spPr>
+      </p:sp>
+      <p:sp>
+        <p:nvSpPr>
+          <p:cNvPr id="5" name="Text 2"/>
           <p:cNvSpPr txBox="1"/>
           <p:nvPr/>
         </p:nvSpPr>
         <p:spPr>
           <a:xfrm>
-            <a:off x="731520" y="1097280"/>
-            <a:ext cx="7680960" cy="274320"/>
+            <a:off x="2011680" y="4572000"/>
+            <a:ext cx="5120640" cy="365760"/>
           </a:xfrm>
           <a:prstGeom prst="rect">
             <a:avLst/>
@@ -7773,192 +5486,18 @@
           <a:bodyPr wrap="square" rtlCol="0" anchor="ctr"/>
           <a:lstStyle/>
           <a:p>
-            <a:pPr indent="0" marL="0">
+            <a:pPr algn="ctr" indent="0" marL="0">
               <a:buNone/>
             </a:pPr>
             <a:r>
               <a:rPr lang="en-US" sz="2000" b="1" dirty="0">
                 <a:solidFill>
-                  <a:srgbClr val="F96167"/>
-                </a:solidFill>
-              </a:rPr>
-              <a:t>Root Cause: Colour/Depth Timing Mismatch</a:t>
+                  <a:srgbClr val="FFFFFF"/>
+                </a:solidFill>
+              </a:rPr>
+              <a:t>0% FPR - All 103 decoys rejected!</a:t>
             </a:r>
             <a:endParaRPr lang="en-US" sz="2000" dirty="0"/>
-          </a:p>
-        </p:txBody>
-      </p:sp>
-      <p:sp>
-        <p:nvSpPr>
-          <p:cNvPr id="4" name="Text 2"/>
-          <p:cNvSpPr txBox="1"/>
-          <p:nvPr/>
-        </p:nvSpPr>
-        <p:spPr>
-          <a:xfrm>
-            <a:off x="731520" y="1463040"/>
-            <a:ext cx="7680960" cy="1097280"/>
-          </a:xfrm>
-          <a:prstGeom prst="rect">
-            <a:avLst/>
-          </a:prstGeom>
-          <a:noFill/>
-          <a:ln/>
-        </p:spPr>
-        <p:txBody>
-          <a:bodyPr wrap="square" rtlCol="0" anchor="ctr"/>
-          <a:lstStyle/>
-          <a:p>
-            <a:pPr marL="342900" indent="-342900">
-              <a:buSzPct val="100000"/>
-              <a:buChar char="•"/>
-            </a:pPr>
-            <a:r>
-              <a:rPr lang="en-US" sz="1600" dirty="0">
-                <a:solidFill>
-                  <a:srgbClr val="2C2C2C"/>
-                </a:solidFill>
-              </a:rPr>
-              <a:t>• Camera turning rapidly</a:t>
-            </a:r>
-            <a:endParaRPr lang="en-US" sz="1600" dirty="0"/>
-          </a:p>
-          <a:p>
-            <a:pPr marL="342900" indent="-342900">
-              <a:buSzPct val="100000"/>
-              <a:buChar char="•"/>
-            </a:pPr>
-            <a:r>
-              <a:rPr lang="en-US" sz="1600" dirty="0">
-                <a:solidFill>
-                  <a:srgbClr val="2C2C2C"/>
-                </a:solidFill>
-              </a:rPr>
-              <a:t>• Depth frame 28ms and 45ms older than colour</a:t>
-            </a:r>
-            <a:endParaRPr lang="en-US" sz="1600" dirty="0"/>
-          </a:p>
-          <a:p>
-            <a:pPr marL="342900" indent="-342900">
-              <a:buSzPct val="100000"/>
-              <a:buChar char="•"/>
-            </a:pPr>
-            <a:r>
-              <a:rPr lang="en-US" sz="1600" dirty="0">
-                <a:solidFill>
-                  <a:srgbClr val="2C2C2C"/>
-                </a:solidFill>
-              </a:rPr>
-              <a:t>• Object moved between frames</a:t>
-            </a:r>
-            <a:endParaRPr lang="en-US" sz="1600" dirty="0"/>
-          </a:p>
-          <a:p>
-            <a:pPr marL="342900" indent="-342900">
-              <a:buSzPct val="100000"/>
-              <a:buChar char="•"/>
-            </a:pPr>
-            <a:r>
-              <a:rPr lang="en-US" sz="1600" dirty="0">
-                <a:solidFill>
-                  <a:srgbClr val="2C2C2C"/>
-                </a:solidFill>
-              </a:rPr>
-              <a:t>• Detection box sees floor in depth → no contrast</a:t>
-            </a:r>
-            <a:endParaRPr lang="en-US" sz="1600" dirty="0"/>
-          </a:p>
-        </p:txBody>
-      </p:sp>
-      <p:sp>
-        <p:nvSpPr>
-          <p:cNvPr id="5" name="Shape 3"/>
-          <p:cNvSpPr/>
-          <p:nvPr/>
-        </p:nvSpPr>
-        <p:spPr>
-          <a:xfrm>
-            <a:off x="914400" y="2834640"/>
-            <a:ext cx="7315200" cy="548640"/>
-          </a:xfrm>
-          <a:prstGeom prst="rect">
-            <a:avLst/>
-          </a:prstGeom>
-          <a:solidFill>
-            <a:srgbClr val="F5F5F5"/>
-          </a:solidFill>
-          <a:ln/>
-        </p:spPr>
-      </p:sp>
-      <p:sp>
-        <p:nvSpPr>
-          <p:cNvPr id="6" name="Text 4"/>
-          <p:cNvSpPr txBox="1"/>
-          <p:nvPr/>
-        </p:nvSpPr>
-        <p:spPr>
-          <a:xfrm>
-            <a:off x="1097280" y="2971800"/>
-            <a:ext cx="6949440" cy="274320"/>
-          </a:xfrm>
-          <a:prstGeom prst="rect">
-            <a:avLst/>
-          </a:prstGeom>
-          <a:noFill/>
-          <a:ln/>
-        </p:spPr>
-        <p:txBody>
-          <a:bodyPr wrap="square" rtlCol="0" anchor="ctr"/>
-          <a:lstStyle/>
-          <a:p>
-            <a:pPr algn="ctr" indent="0" marL="0">
-              <a:buNone/>
-            </a:pPr>
-            <a:r>
-              <a:rPr lang="en-US" sz="1600" b="1" dirty="0">
-                <a:solidFill>
-                  <a:srgbClr val="1E2761"/>
-                </a:solidFill>
-              </a:rPr>
-              <a:t>This is NOT a filter failure - it's a synchronization issue</a:t>
-            </a:r>
-            <a:endParaRPr lang="en-US" sz="1600" dirty="0"/>
-          </a:p>
-        </p:txBody>
-      </p:sp>
-      <p:sp>
-        <p:nvSpPr>
-          <p:cNvPr id="7" name="Text 5"/>
-          <p:cNvSpPr txBox="1"/>
-          <p:nvPr/>
-        </p:nvSpPr>
-        <p:spPr>
-          <a:xfrm>
-            <a:off x="731520" y="3840480"/>
-            <a:ext cx="7680960" cy="365760"/>
-          </a:xfrm>
-          <a:prstGeom prst="rect">
-            <a:avLst/>
-          </a:prstGeom>
-          <a:noFill/>
-          <a:ln/>
-        </p:spPr>
-        <p:txBody>
-          <a:bodyPr wrap="square" rtlCol="0" anchor="ctr"/>
-          <a:lstStyle/>
-          <a:p>
-            <a:pPr algn="ctr" indent="0" marL="0">
-              <a:buNone/>
-            </a:pPr>
-            <a:r>
-              <a:rPr lang="en-US" sz="1800" b="1" dirty="0">
-                <a:solidFill>
-                  <a:srgbClr val="028090"/>
-                </a:solidFill>
-              </a:rPr>
-              <a:t>Solution: Stage 3 tracking recovers both! →</a:t>
-            </a:r>
-            <a:endParaRPr lang="en-US" sz="1800" dirty="0"/>
           </a:p>
         </p:txBody>
       </p:sp>

--- a/Fire_Extinguisher_Detection_Presentation.pptx
+++ b/Fire_Extinguisher_Detection_Presentation.pptx
@@ -11,9 +11,9 @@
     <p:sldId id="259" r:id="rId10"/>
     <p:sldId id="260" r:id="rId11"/>
     <p:sldId id="261" r:id="rId12"/>
-    <p:sldId id="262" r:id="rId13"/>
-    <p:sldId id="263" r:id="rId14"/>
-    <p:sldId id="264" r:id="rId15"/>
+    <p:sldId id="272" r:id="rId23"/>
+    <p:sldId id="273" r:id="rId24"/>
+    <p:sldId id="274" r:id="rId25"/>
     <p:sldId id="265" r:id="rId16"/>
     <p:sldId id="266" r:id="rId17"/>
     <p:sldId id="267" r:id="rId18"/>
@@ -120,6 +120,1868 @@
     </a:lvl9pPr>
   </p:defaultTextStyle>
 </p:presentation>
+</file>
+
+<file path=ppt/charts/chart1.xml><?xml version="1.0" encoding="utf-8"?>
+<c:chartSpace xmlns:c="http://schemas.openxmlformats.org/drawingml/2006/chart" xmlns:a="http://schemas.openxmlformats.org/drawingml/2006/main" xmlns:r="http://schemas.openxmlformats.org/officeDocument/2006/relationships">
+  <c:chart>
+    <c:plotArea>
+      <c:scatterChart>
+        <c:scatterStyle val="lineMarker"/>
+        <c:varyColors val="0"/>
+        <c:ser>
+          <c:idx val="0"/>
+          <c:order val="0"/>
+          <c:tx>
+            <c:strRef>
+              <c:f>Sheet1!$B$1</c:f>
+              <c:strCache>
+                <c:ptCount val="1"/>
+                <c:pt idx="0">
+                  <c:v>Real (n=140)</c:v>
+                </c:pt>
+              </c:strCache>
+            </c:strRef>
+          </c:tx>
+          <c:spPr>
+            <a:ln w="47625">
+              <a:noFill/>
+            </a:ln>
+          </c:spPr>
+          <c:marker>
+            <c:symbol val="circle"/>
+            <c:size val="5"/>
+            <c:spPr>
+              <a:solidFill>
+                <a:srgbClr val="1F6FB4"/>
+              </a:solidFill>
+              <a:ln>
+                <a:noFill/>
+              </a:ln>
+            </c:spPr>
+          </c:marker>
+          <c:xVal>
+            <c:numRef>
+              <c:f>Sheet1!$A$2:$A$141</c:f>
+              <c:numCache>
+                <c:formatCode>General</c:formatCode>
+                <c:ptCount val="140"/>
+                <c:pt idx="0">
+                  <c:v>1.013770052024841</c:v>
+                </c:pt>
+                <c:pt idx="1">
+                  <c:v>0.7445567462078129</c:v>
+                </c:pt>
+                <c:pt idx="2">
+                  <c:v>0.7864596971167683</c:v>
+                </c:pt>
+                <c:pt idx="3">
+                  <c:v>0.8428932083142544</c:v>
+                </c:pt>
+                <c:pt idx="4">
+                  <c:v>0.8428932083142544</c:v>
+                </c:pt>
+                <c:pt idx="5">
+                  <c:v>0.6002600556651692</c:v>
+                </c:pt>
+                <c:pt idx="6">
+                  <c:v>0.4984738772680521</c:v>
+                </c:pt>
+                <c:pt idx="7">
+                  <c:v>0.5966502611074374</c:v>
+                </c:pt>
+                <c:pt idx="8">
+                  <c:v>0.8091474698298392</c:v>
+                </c:pt>
+                <c:pt idx="9">
+                  <c:v>1.0114979794757868</c:v>
+                </c:pt>
+                <c:pt idx="10">
+                  <c:v>1.03024271936853</c:v>
+                </c:pt>
+                <c:pt idx="11">
+                  <c:v>1.0040105358166322</c:v>
+                </c:pt>
+                <c:pt idx="12">
+                  <c:v>0.715619647364204</c:v>
+                </c:pt>
+                <c:pt idx="13">
+                  <c:v>0.6977830813142547</c:v>
+                </c:pt>
+                <c:pt idx="14">
+                  <c:v>1.271827272097161</c:v>
+                </c:pt>
+                <c:pt idx="15">
+                  <c:v>0.9759162839536746</c:v>
+                </c:pt>
+                <c:pt idx="16">
+                  <c:v>1.002573143903674</c:v>
+                </c:pt>
+                <c:pt idx="17">
+                  <c:v>1.2968573120949118</c:v>
+                </c:pt>
+                <c:pt idx="18">
+                  <c:v>1.3605659248582027</c:v>
+                </c:pt>
+                <c:pt idx="19">
+                  <c:v>1.4775279305495614</c:v>
+                </c:pt>
+                <c:pt idx="20">
+                  <c:v>1.486545886204826</c:v>
+                </c:pt>
+                <c:pt idx="21">
+                  <c:v>1.3327003057192781</c:v>
+                </c:pt>
+                <c:pt idx="22">
+                  <c:v>0.8613014862438662</c:v>
+                </c:pt>
+                <c:pt idx="23">
+                  <c:v>0.9777424152861035</c:v>
+                </c:pt>
+                <c:pt idx="24">
+                  <c:v>1.1967502385055504</c:v>
+                </c:pt>
+                <c:pt idx="25">
+                  <c:v>1.359233112781435</c:v>
+                </c:pt>
+                <c:pt idx="26">
+                  <c:v>1.3742014226290935</c:v>
+                </c:pt>
+                <c:pt idx="27">
+                  <c:v>0.9495665175019383</c:v>
+                </c:pt>
+                <c:pt idx="28">
+                  <c:v>0.9804244542984535</c:v>
+                </c:pt>
+                <c:pt idx="29">
+                  <c:v>0.975347845621572</c:v>
+                </c:pt>
+                <c:pt idx="30">
+                  <c:v>1.2485612746791372</c:v>
+                </c:pt>
+                <c:pt idx="31">
+                  <c:v>0.7928069999104748</c:v>
+                </c:pt>
+                <c:pt idx="32">
+                  <c:v>0.9636985212331874</c:v>
+                </c:pt>
+                <c:pt idx="33">
+                  <c:v>0.9066475923289018</c:v>
+                </c:pt>
+                <c:pt idx="34">
+                  <c:v>0.7584209401798072</c:v>
+                </c:pt>
+                <c:pt idx="35">
+                  <c:v>0.9706959865556095</c:v>
+                </c:pt>
+                <c:pt idx="36">
+                  <c:v>0.8585737636018822</c:v>
+                </c:pt>
+                <c:pt idx="37">
+                  <c:v>0.9365680168038556</c:v>
+                </c:pt>
+                <c:pt idx="38">
+                  <c:v>0.818265032691174</c:v>
+                </c:pt>
+                <c:pt idx="39">
+                  <c:v>0.970336599634382</c:v>
+                </c:pt>
+                <c:pt idx="40">
+                  <c:v>0.9093034616534068</c:v>
+                </c:pt>
+                <c:pt idx="41">
+                  <c:v>1.18152707406241</c:v>
+                </c:pt>
+                <c:pt idx="42">
+                  <c:v>0.8539610539216199</c:v>
+                </c:pt>
+                <c:pt idx="43">
+                  <c:v>0.8056650694683087</c:v>
+                </c:pt>
+                <c:pt idx="44">
+                  <c:v>1.230731235473954</c:v>
+                </c:pt>
+                <c:pt idx="45">
+                  <c:v>1.2825031047374962</c:v>
+                </c:pt>
+                <c:pt idx="46">
+                  <c:v>1.2791775383027029</c:v>
+                </c:pt>
+                <c:pt idx="47">
+                  <c:v>0.7560623452686052</c:v>
+                </c:pt>
+                <c:pt idx="48">
+                  <c:v>0.7408751349390107</c:v>
+                </c:pt>
+                <c:pt idx="49">
+                  <c:v>0.7182853793898156</c:v>
+                </c:pt>
+                <c:pt idx="50">
+                  <c:v>0.6882375897311864</c:v>
+                </c:pt>
+                <c:pt idx="51">
+                  <c:v>0.7102360515034162</c:v>
+                </c:pt>
+                <c:pt idx="52">
+                  <c:v>0.7525864873290359</c:v>
+                </c:pt>
+                <c:pt idx="53">
+                  <c:v>0.7493425800560659</c:v>
+                </c:pt>
+                <c:pt idx="54">
+                  <c:v>0.625917309478317</c:v>
+                </c:pt>
+                <c:pt idx="55">
+                  <c:v>0.5670140818903368</c:v>
+                </c:pt>
+                <c:pt idx="56">
+                  <c:v>0.5327880751137833</c:v>
+                </c:pt>
+                <c:pt idx="57">
+                  <c:v>0.7534227825414087</c:v>
+                </c:pt>
+                <c:pt idx="58">
+                  <c:v>0.5804111484920178</c:v>
+                </c:pt>
+                <c:pt idx="59">
+                  <c:v>0.6455669290265106</c:v>
+                </c:pt>
+                <c:pt idx="60">
+                  <c:v>0.583498262338958</c:v>
+                </c:pt>
+                <c:pt idx="61">
+                  <c:v>0.5759160423513778</c:v>
+                </c:pt>
+                <c:pt idx="62">
+                  <c:v>0.8479044796143864</c:v>
+                </c:pt>
+                <c:pt idx="63">
+                  <c:v>0.856940354496087</c:v>
+                </c:pt>
+                <c:pt idx="64">
+                  <c:v>0.7676496143952574</c:v>
+                </c:pt>
+                <c:pt idx="65">
+                  <c:v>0.8325048679981006</c:v>
+                </c:pt>
+                <c:pt idx="66">
+                  <c:v>1.496421269484828</c:v>
+                </c:pt>
+                <c:pt idx="67">
+                  <c:v>0.8751689673934662</c:v>
+                </c:pt>
+                <c:pt idx="68">
+                  <c:v>0.8995129421536995</c:v>
+                </c:pt>
+                <c:pt idx="69">
+                  <c:v>0.7504173582318223</c:v>
+                </c:pt>
+                <c:pt idx="70">
+                  <c:v>0.8130414695341467</c:v>
+                </c:pt>
+                <c:pt idx="71">
+                  <c:v>0.8662310983821749</c:v>
+                </c:pt>
+                <c:pt idx="72">
+                  <c:v>0.9193226843639555</c:v>
+                </c:pt>
+                <c:pt idx="73">
+                  <c:v>0.9200806114864094</c:v>
+                </c:pt>
+                <c:pt idx="74">
+                  <c:v>1.4134223707426778</c:v>
+                </c:pt>
+                <c:pt idx="75">
+                  <c:v>0.9240464761910921</c:v>
+                </c:pt>
+                <c:pt idx="76">
+                  <c:v>0.9264834189418594</c:v>
+                </c:pt>
+                <c:pt idx="77">
+                  <c:v>0.9228377501037067</c:v>
+                </c:pt>
+                <c:pt idx="78">
+                  <c:v>0.9269472914572469</c:v>
+                </c:pt>
+                <c:pt idx="79">
+                  <c:v>0.9629602684976326</c:v>
+                </c:pt>
+                <c:pt idx="80">
+                  <c:v>0.9076080362288672</c:v>
+                </c:pt>
+                <c:pt idx="81">
+                  <c:v>0.9372441901330257</c:v>
+                </c:pt>
+                <c:pt idx="82">
+                  <c:v>0.9549436040423046</c:v>
+                </c:pt>
+                <c:pt idx="83">
+                  <c:v>0.9485929521516419</c:v>
+                </c:pt>
+                <c:pt idx="84">
+                  <c:v>0.9271890355064343</c:v>
+                </c:pt>
+                <c:pt idx="85">
+                  <c:v>1.3178104289963282</c:v>
+                </c:pt>
+                <c:pt idx="86">
+                  <c:v>0.6673628987500261</c:v>
+                </c:pt>
+                <c:pt idx="87">
+                  <c:v>0.9125017016527978</c:v>
+                </c:pt>
+                <c:pt idx="88">
+                  <c:v>0.4072263443219105</c:v>
+                </c:pt>
+                <c:pt idx="89">
+                  <c:v>0.8832313427385198</c:v>
+                </c:pt>
+                <c:pt idx="90">
+                  <c:v>0.8889154994113565</c:v>
+                </c:pt>
+                <c:pt idx="91">
+                  <c:v>0.7001351443181022</c:v>
+                </c:pt>
+                <c:pt idx="92">
+                  <c:v>0.885988497711872</c:v>
+                </c:pt>
+                <c:pt idx="93">
+                  <c:v>0.715652308848126</c:v>
+                </c:pt>
+                <c:pt idx="94">
+                  <c:v>0.8935935491943774</c:v>
+                </c:pt>
+                <c:pt idx="95">
+                  <c:v>0.8486917132823578</c:v>
+                </c:pt>
+                <c:pt idx="96">
+                  <c:v>0.8456471185578578</c:v>
+                </c:pt>
+                <c:pt idx="97">
+                  <c:v>0.8505799645218788</c:v>
+                </c:pt>
+                <c:pt idx="98">
+                  <c:v>0.8372188438557162</c:v>
+                </c:pt>
+                <c:pt idx="99">
+                  <c:v>0.8719218239582046</c:v>
+                </c:pt>
+                <c:pt idx="100">
+                  <c:v>0.863173343264356</c:v>
+                </c:pt>
+                <c:pt idx="101">
+                  <c:v>0.8399073668755457</c:v>
+                </c:pt>
+                <c:pt idx="102">
+                  <c:v>0.701997200946266</c:v>
+                </c:pt>
+                <c:pt idx="103">
+                  <c:v>0.7007884916043654</c:v>
+                </c:pt>
+                <c:pt idx="104">
+                  <c:v>0.8364086863979384</c:v>
+                </c:pt>
+                <c:pt idx="105">
+                  <c:v>0.6949801916959543</c:v>
+                </c:pt>
+                <c:pt idx="106">
+                  <c:v>0.887889748899602</c:v>
+                </c:pt>
+                <c:pt idx="107">
+                  <c:v>0.7349981625763694</c:v>
+                </c:pt>
+                <c:pt idx="108">
+                  <c:v>0.8664140330676686</c:v>
+                </c:pt>
+                <c:pt idx="109">
+                  <c:v>0.6145064676638863</c:v>
+                </c:pt>
+                <c:pt idx="110">
+                  <c:v>0.3032987983100538</c:v>
+                </c:pt>
+                <c:pt idx="111">
+                  <c:v>0.4398777451254844</c:v>
+                </c:pt>
+                <c:pt idx="112">
+                  <c:v>0.8759366594701271</c:v>
+                </c:pt>
+                <c:pt idx="113">
+                  <c:v>0.432439312774277</c:v>
+                </c:pt>
+                <c:pt idx="114">
+                  <c:v>0.8990098653429989</c:v>
+                </c:pt>
+                <c:pt idx="115">
+                  <c:v>0.512321754517561</c:v>
+                </c:pt>
+                <c:pt idx="116">
+                  <c:v>0.5086956194821213</c:v>
+                </c:pt>
+                <c:pt idx="117">
+                  <c:v>0.8966839323051488</c:v>
+                </c:pt>
+                <c:pt idx="118">
+                  <c:v>0.8653098202239646</c:v>
+                </c:pt>
+                <c:pt idx="119">
+                  <c:v>0.5372929906036364</c:v>
+                </c:pt>
+                <c:pt idx="120">
+                  <c:v>0.49340713129227715</c:v>
+                </c:pt>
+                <c:pt idx="121">
+                  <c:v>0.8891834333987426</c:v>
+                </c:pt>
+                <c:pt idx="122">
+                  <c:v>0.4034728088593914</c:v>
+                </c:pt>
+                <c:pt idx="123">
+                  <c:v>0.518162735381388</c:v>
+                </c:pt>
+                <c:pt idx="124">
+                  <c:v>0.6513099340060289</c:v>
+                </c:pt>
+                <c:pt idx="125">
+                  <c:v>0.9799475366609911</c:v>
+                </c:pt>
+                <c:pt idx="126">
+                  <c:v>0.4599782366567117</c:v>
+                </c:pt>
+                <c:pt idx="127">
+                  <c:v>0.6547400744355647</c:v>
+                </c:pt>
+                <c:pt idx="128">
+                  <c:v>0.48143765815837775</c:v>
+                </c:pt>
+                <c:pt idx="129">
+                  <c:v>0.5140073955163997</c:v>
+                </c:pt>
+                <c:pt idx="130">
+                  <c:v>0.8835971918591534</c:v>
+                </c:pt>
+                <c:pt idx="131">
+                  <c:v>0.6768626449788245</c:v>
+                </c:pt>
+                <c:pt idx="132">
+                  <c:v>0.9669652927131925</c:v>
+                </c:pt>
+                <c:pt idx="133">
+                  <c:v>0.6340025852473843</c:v>
+                </c:pt>
+                <c:pt idx="134">
+                  <c:v>0.9843184251849499</c:v>
+                </c:pt>
+                <c:pt idx="135">
+                  <c:v>0.9894799116616018</c:v>
+                </c:pt>
+                <c:pt idx="136">
+                  <c:v>0.5644986725238914</c:v>
+                </c:pt>
+                <c:pt idx="137">
+                  <c:v>0.6391510250442417</c:v>
+                </c:pt>
+                <c:pt idx="138">
+                  <c:v>0.7060545633692262</c:v>
+                </c:pt>
+                <c:pt idx="139">
+                  <c:v>0.4860960791177954</c:v>
+                </c:pt>
+              </c:numCache>
+            </c:numRef>
+          </c:xVal>
+          <c:yVal>
+            <c:numRef>
+              <c:f>Sheet1!$B$2:$B$141</c:f>
+              <c:numCache>
+                <c:formatCode>General</c:formatCode>
+                <c:ptCount val="140"/>
+                <c:pt idx="0">
+                  <c:v>0.9116177033184224</c:v>
+                </c:pt>
+                <c:pt idx="1">
+                  <c:v>0.3871085878526865</c:v>
+                </c:pt>
+                <c:pt idx="2">
+                  <c:v>0.5049907043201708</c:v>
+                </c:pt>
+                <c:pt idx="3">
+                  <c:v>0.6018797063579511</c:v>
+                </c:pt>
+                <c:pt idx="4">
+                  <c:v>0.5278195483330463</c:v>
+                </c:pt>
+                <c:pt idx="5">
+                  <c:v>0.48141194646245217</c:v>
+                </c:pt>
+                <c:pt idx="6">
+                  <c:v>0.2846470193848462</c:v>
+                </c:pt>
+                <c:pt idx="7">
+                  <c:v>0.1412325680470309</c:v>
+                </c:pt>
+                <c:pt idx="8">
+                  <c:v>0.5829220650901665</c:v>
+                </c:pt>
+                <c:pt idx="9">
+                  <c:v>0.8220274410327449</c:v>
+                </c:pt>
+                <c:pt idx="10">
+                  <c:v>1.0158608764432855</c:v>
+                </c:pt>
+                <c:pt idx="11">
+                  <c:v>1.1760331011675023</c:v>
+                </c:pt>
+                <c:pt idx="12">
+                  <c:v>0.6750205898048534</c:v>
+                </c:pt>
+                <c:pt idx="13">
+                  <c:v>0.5300000099341071</c:v>
+                </c:pt>
+                <c:pt idx="14">
+                  <c:v>0.45294898806406175</c:v>
+                </c:pt>
+                <c:pt idx="15">
+                  <c:v>0.8389904830735785</c:v>
+                </c:pt>
+                <c:pt idx="16">
+                  <c:v>0.8356989412266939</c:v>
+                </c:pt>
+                <c:pt idx="17">
+                  <c:v>0.380267241158216</c:v>
+                </c:pt>
+                <c:pt idx="18">
+                  <c:v>0.23013984675855603</c:v>
+                </c:pt>
+                <c:pt idx="19">
+                  <c:v>-0.058474676480615224</c:v>
+                </c:pt>
+                <c:pt idx="20">
+                  <c:v>-0.07490603521299806</c:v>
+                </c:pt>
+                <c:pt idx="21">
+                  <c:v>0.27691717576850977</c:v>
+                </c:pt>
+                <c:pt idx="22">
+                  <c:v>0.43215569452928876</c:v>
+                </c:pt>
+                <c:pt idx="23">
+                  <c:v>0.7331898717894211</c:v>
+                </c:pt>
+                <c:pt idx="24">
+                  <c:v>-0.33232786631706507</c:v>
+                </c:pt>
+                <c:pt idx="25">
+                  <c:v>0.36108850180465035</c:v>
+                </c:pt>
+                <c:pt idx="26">
+                  <c:v>0.36585369163057757</c:v>
+                </c:pt>
+                <c:pt idx="27">
+                  <c:v>1.0630740459717118</c:v>
+                </c:pt>
+                <c:pt idx="28">
+                  <c:v>1.1432926097950196</c:v>
+                </c:pt>
+                <c:pt idx="29">
+                  <c:v>1.7309941357396414</c:v>
+                </c:pt>
+                <c:pt idx="30">
+                  <c:v>-0.18367348527570676</c:v>
+                </c:pt>
+                <c:pt idx="31">
+                  <c:v>1.027343785773458</c:v>
+                </c:pt>
+                <c:pt idx="32">
+                  <c:v>2.0928814921479066</c:v>
+                </c:pt>
+                <c:pt idx="33">
+                  <c:v>0.3996670943624472</c:v>
+                </c:pt>
+                <c:pt idx="34">
+                  <c:v>1.1338419375791404</c:v>
+                </c:pt>
+                <c:pt idx="35">
+                  <c:v>2.0978925403271393</c:v>
+                </c:pt>
+                <c:pt idx="36">
+                  <c:v>0.3791948245410116</c:v>
+                </c:pt>
+                <c:pt idx="37">
+                  <c:v>2.27797839652415</c:v>
+                </c:pt>
+                <c:pt idx="38">
+                  <c:v>0.33138640722505713</c:v>
+                </c:pt>
+                <c:pt idx="39">
+                  <c:v>2.3105188970770363</c:v>
+                </c:pt>
+                <c:pt idx="40">
+                  <c:v>2.621557878734986</c:v>
+                </c:pt>
+                <c:pt idx="41">
+                  <c:v>1.7305353860147494</c:v>
+                </c:pt>
+                <c:pt idx="42">
+                  <c:v>2.910025694861416</c:v>
+                </c:pt>
+                <c:pt idx="43">
+                  <c:v>3.3133512879907854</c:v>
+                </c:pt>
+                <c:pt idx="44">
+                  <c:v>1.832633452542619</c:v>
+                </c:pt>
+                <c:pt idx="45">
+                  <c:v>1.6920706804500298</c:v>
+                </c:pt>
+                <c:pt idx="46">
+                  <c:v>1.670861304400236</c:v>
+                </c:pt>
+                <c:pt idx="47">
+                  <c:v>3.673003947051134</c:v>
+                </c:pt>
+                <c:pt idx="48">
+                  <c:v>4.040314656235952</c:v>
+                </c:pt>
+                <c:pt idx="49">
+                  <c:v>4.09362547364614</c:v>
+                </c:pt>
+                <c:pt idx="50">
+                  <c:v>4.424116446401085</c:v>
+                </c:pt>
+                <c:pt idx="51">
+                  <c:v>4.4376299707993025</c:v>
+                </c:pt>
+                <c:pt idx="52">
+                  <c:v>4.602215539992855</c:v>
+                </c:pt>
+                <c:pt idx="53">
+                  <c:v>4.635448159687141</c:v>
+                </c:pt>
+                <c:pt idx="54">
+                  <c:v>2.445081125504149</c:v>
+                </c:pt>
+                <c:pt idx="55">
+                  <c:v>1.890303754835653</c:v>
+                </c:pt>
+                <c:pt idx="56">
+                  <c:v>1.557255762174528</c:v>
+                </c:pt>
+                <c:pt idx="57">
+                  <c:v>4.433071143303876</c:v>
+                </c:pt>
+                <c:pt idx="58">
+                  <c:v>1.7215188771437502</c:v>
+                </c:pt>
+                <c:pt idx="59">
+                  <c:v>1.7113595686266456</c:v>
+                </c:pt>
+                <c:pt idx="60">
+                  <c:v>1.6013009100343303</c:v>
+                </c:pt>
+                <c:pt idx="61">
+                  <c:v>1.5771689068214494</c:v>
+                </c:pt>
+                <c:pt idx="62">
+                  <c:v>4.817679394873496</c:v>
+                </c:pt>
+                <c:pt idx="63">
+                  <c:v>4.854528682157184</c:v>
+                </c:pt>
+                <c:pt idx="64">
+                  <c:v>4.3345760132483395</c:v>
+                </c:pt>
+                <c:pt idx="65">
+                  <c:v>5.063177047952043</c:v>
+                </c:pt>
+                <c:pt idx="66">
+                  <c:v>2.398386376356284</c:v>
+                </c:pt>
+                <c:pt idx="67">
+                  <c:v>5.005957217564042</c:v>
+                </c:pt>
+                <c:pt idx="68">
+                  <c:v>5.036913075528584</c:v>
+                </c:pt>
+                <c:pt idx="69">
+                  <c:v>3.7892492754628537</c:v>
+                </c:pt>
+                <c:pt idx="70">
+                  <c:v>4.477213910031538</c:v>
+                </c:pt>
+                <c:pt idx="71">
+                  <c:v>4.8581251732275845</c:v>
+                </c:pt>
+                <c:pt idx="72">
+                  <c:v>4.305028941419595</c:v>
+                </c:pt>
+                <c:pt idx="73">
+                  <c:v>4.296540151973174</c:v>
+                </c:pt>
+                <c:pt idx="74">
+                  <c:v>2.498647919153283</c:v>
+                </c:pt>
+                <c:pt idx="75">
+                  <c:v>3.934925579139594</c:v>
+                </c:pt>
+                <c:pt idx="76">
+                  <c:v>3.908416087234446</c:v>
+                </c:pt>
+                <c:pt idx="77">
+                  <c:v>3.496367821152595</c:v>
+                </c:pt>
+                <c:pt idx="78">
+                  <c:v>3.466400146484375</c:v>
+                </c:pt>
+                <c:pt idx="79">
+                  <c:v>2.9275629132304326</c:v>
+                </c:pt>
+                <c:pt idx="80">
+                  <c:v>1.6538170533069132</c:v>
+                </c:pt>
+                <c:pt idx="81">
+                  <c:v>0.7900433754943723</c:v>
+                </c:pt>
+                <c:pt idx="82">
+                  <c:v>0.7399425517449216</c:v>
+                </c:pt>
+                <c:pt idx="83">
+                  <c:v>0.5900900925089134</c:v>
+                </c:pt>
+                <c:pt idx="84">
+                  <c:v>0.8225310339676567</c:v>
+                </c:pt>
+                <c:pt idx="85">
+                  <c:v>0.43919643883952286</c:v>
+                </c:pt>
+                <c:pt idx="86">
+                  <c:v>0.024739562313901807</c:v>
+                </c:pt>
+                <c:pt idx="87">
+                  <c:v>2.9260795543711637</c:v>
+                </c:pt>
+                <c:pt idx="88">
+                  <c:v>0.6890306406098778</c:v>
+                </c:pt>
+                <c:pt idx="89">
+                  <c:v>3.0941900269469653</c:v>
+                </c:pt>
+                <c:pt idx="90">
+                  <c:v>2.9262796517599914</c:v>
+                </c:pt>
+                <c:pt idx="91">
+                  <c:v>1.5212766384671883</c:v>
+                </c:pt>
+                <c:pt idx="92">
+                  <c:v>2.761168496795482</c:v>
+                </c:pt>
+                <c:pt idx="93">
+                  <c:v>1.2853427887426314</c:v>
+                </c:pt>
+                <c:pt idx="94">
+                  <c:v>2.774914023886919</c:v>
+                </c:pt>
+                <c:pt idx="95">
+                  <c:v>2.5121077078908423</c:v>
+                </c:pt>
+                <c:pt idx="96">
+                  <c:v>2.0162015179816097</c:v>
+                </c:pt>
+                <c:pt idx="97">
+                  <c:v>1.3087071632930196</c:v>
+                </c:pt>
+                <c:pt idx="98">
+                  <c:v>1.2967227795001002</c:v>
+                </c:pt>
+                <c:pt idx="99">
+                  <c:v>1.197290244916017</c:v>
+                </c:pt>
+                <c:pt idx="100">
+                  <c:v>1.2611684967954824</c:v>
+                </c:pt>
+                <c:pt idx="101">
+                  <c:v>1.379046134806411</c:v>
+                </c:pt>
+                <c:pt idx="102">
+                  <c:v>0.7417004032169713</c:v>
+                </c:pt>
+                <c:pt idx="103">
+                  <c:v>0.6302420121605011</c:v>
+                </c:pt>
+                <c:pt idx="104">
+                  <c:v>1.228103556458669</c:v>
+                </c:pt>
+                <c:pt idx="105">
+                  <c:v>0.7167414560888414</c:v>
+                </c:pt>
+                <c:pt idx="106">
+                  <c:v>1.0670950032503888</c:v>
+                </c:pt>
+                <c:pt idx="107">
+                  <c:v>0.6850421979111921</c:v>
+                </c:pt>
+                <c:pt idx="108">
+                  <c:v>0.9583892410185209</c:v>
+                </c:pt>
+                <c:pt idx="109">
+                  <c:v>0.3889255125861664</c:v>
+                </c:pt>
+                <c:pt idx="110">
+                  <c:v>0.07387164632193183</c:v>
+                </c:pt>
+                <c:pt idx="111">
+                  <c:v>0.03930136070372595</c:v>
+                </c:pt>
+                <c:pt idx="112">
+                  <c:v>1.0200607844144698</c:v>
+                </c:pt>
+                <c:pt idx="113">
+                  <c:v>0.04192634365746506</c:v>
+                </c:pt>
+                <c:pt idx="114">
+                  <c:v>0.9557918335035196</c:v>
+                </c:pt>
+                <c:pt idx="115">
+                  <c:v>0.17246920671617566</c:v>
+                </c:pt>
+                <c:pt idx="116">
+                  <c:v>0.002632962139846241</c:v>
+                </c:pt>
+                <c:pt idx="117">
+                  <c:v>1.0532850082453602</c:v>
+                </c:pt>
+                <c:pt idx="118">
+                  <c:v>0.48961423002769877</c:v>
+                </c:pt>
+                <c:pt idx="119">
+                  <c:v>0.011235921194182319</c:v>
+                </c:pt>
+                <c:pt idx="120">
+                  <c:v>-0.2048623237209253</c:v>
+                </c:pt>
+                <c:pt idx="121">
+                  <c:v>0.8035544027095196</c:v>
+                </c:pt>
+                <c:pt idx="122">
+                  <c:v>0.08864200894699338</c:v>
+                </c:pt>
+                <c:pt idx="123">
+                  <c:v>0.08533815610561499</c:v>
+                </c:pt>
+                <c:pt idx="124">
+                  <c:v>0.5228666567971944</c:v>
+                </c:pt>
+                <c:pt idx="125">
+                  <c:v>0.9470787519101496</c:v>
+                </c:pt>
+                <c:pt idx="126">
+                  <c:v>2.361521180808714</c:v>
+                </c:pt>
+                <c:pt idx="127">
+                  <c:v>0.21374683865578295</c:v>
+                </c:pt>
+                <c:pt idx="128">
+                  <c:v>0.03575937518085759</c:v>
+                </c:pt>
+                <c:pt idx="129">
+                  <c:v>0.04404363099885481</c:v>
+                </c:pt>
+                <c:pt idx="130">
+                  <c:v>0.8299321348407092</c:v>
+                </c:pt>
+                <c:pt idx="131">
+                  <c:v>0.4100658711685062</c:v>
+                </c:pt>
+                <c:pt idx="132">
+                  <c:v>1.0118244739890165</c:v>
+                </c:pt>
+                <c:pt idx="133">
+                  <c:v>0.5346410929918972</c:v>
+                </c:pt>
+                <c:pt idx="134">
+                  <c:v>1.031011024377438</c:v>
+                </c:pt>
+                <c:pt idx="135">
+                  <c:v>1.078790433931959</c:v>
+                </c:pt>
+                <c:pt idx="136">
+                  <c:v>0.26708333623078123</c:v>
+                </c:pt>
+                <c:pt idx="137">
+                  <c:v>0.4128247403725765</c:v>
+                </c:pt>
+                <c:pt idx="138">
+                  <c:v>1.1932013160622814</c:v>
+                </c:pt>
+                <c:pt idx="139">
+                  <c:v>0.20729163458777927</c:v>
+                </c:pt>
+              </c:numCache>
+            </c:numRef>
+          </c:yVal>
+          <c:smooth val="0"/>
+        </c:ser>
+        <c:ser>
+          <c:idx val="1"/>
+          <c:order val="1"/>
+          <c:tx>
+            <c:strRef>
+              <c:f>Sheet1!$B$143</c:f>
+              <c:strCache>
+                <c:ptCount val="1"/>
+                <c:pt idx="0">
+                  <c:v>Decoy (n=106)</c:v>
+                </c:pt>
+              </c:strCache>
+            </c:strRef>
+          </c:tx>
+          <c:spPr>
+            <a:ln w="47625">
+              <a:noFill/>
+            </a:ln>
+          </c:spPr>
+          <c:marker>
+            <c:symbol val="circle"/>
+            <c:size val="5"/>
+            <c:spPr>
+              <a:solidFill>
+                <a:srgbClr val="C0392B"/>
+              </a:solidFill>
+              <a:ln>
+                <a:noFill/>
+              </a:ln>
+            </c:spPr>
+          </c:marker>
+          <c:xVal>
+            <c:numRef>
+              <c:f>Sheet1!$A$144:$A$249</c:f>
+              <c:numCache>
+                <c:formatCode>General</c:formatCode>
+                <c:ptCount val="106"/>
+                <c:pt idx="0">
+                  <c:v>0.35704542579278453</c:v>
+                </c:pt>
+                <c:pt idx="1">
+                  <c:v>0.34951223502692585</c:v>
+                </c:pt>
+                <c:pt idx="2">
+                  <c:v>0.37950775365480877</c:v>
+                </c:pt>
+                <c:pt idx="3">
+                  <c:v>0.4080169087836339</c:v>
+                </c:pt>
+                <c:pt idx="4">
+                  <c:v>0.40524341099599437</c:v>
+                </c:pt>
+                <c:pt idx="5">
+                  <c:v>0.35647697967208436</c:v>
+                </c:pt>
+                <c:pt idx="6">
+                  <c:v>0.41866984411539426</c:v>
+                </c:pt>
+                <c:pt idx="7">
+                  <c:v>0.37761957095494636</c:v>
+                </c:pt>
+                <c:pt idx="8">
+                  <c:v>0.3799879689844835</c:v>
+                </c:pt>
+                <c:pt idx="9">
+                  <c:v>0.3805465858950467</c:v>
+                </c:pt>
+                <c:pt idx="10">
+                  <c:v>0.3590038386663917</c:v>
+                </c:pt>
+                <c:pt idx="11">
+                  <c:v>0.3715302872639158</c:v>
+                </c:pt>
+                <c:pt idx="12">
+                  <c:v>0.3343772585375242</c:v>
+                </c:pt>
+                <c:pt idx="13">
+                  <c:v>0.3968216689800671</c:v>
+                </c:pt>
+                <c:pt idx="14">
+                  <c:v>0.3527986096281621</c:v>
+                </c:pt>
+                <c:pt idx="15">
+                  <c:v>0.3144336003488893</c:v>
+                </c:pt>
+                <c:pt idx="16">
+                  <c:v>0.2823277378428341</c:v>
+                </c:pt>
+                <c:pt idx="17">
+                  <c:v>0.3120619194254752</c:v>
+                </c:pt>
+                <c:pt idx="18">
+                  <c:v>0.3093505061068088</c:v>
+                </c:pt>
+                <c:pt idx="19">
+                  <c:v>0.3381111928259614</c:v>
+                </c:pt>
+                <c:pt idx="20">
+                  <c:v>0.39367902593730103</c:v>
+                </c:pt>
+                <c:pt idx="21">
+                  <c:v>0.31338822880212913</c:v>
+                </c:pt>
+                <c:pt idx="22">
+                  <c:v>0.7429625628159741</c:v>
+                </c:pt>
+                <c:pt idx="23">
+                  <c:v>0.6860226650432488</c:v>
+                </c:pt>
+                <c:pt idx="24">
+                  <c:v>0.32684082693621547</c:v>
+                </c:pt>
+                <c:pt idx="25">
+                  <c:v>0.30510370396166203</c:v>
+                </c:pt>
+                <c:pt idx="26">
+                  <c:v>0.3527985885989487</c:v>
+                </c:pt>
+                <c:pt idx="27">
+                  <c:v>0.3313783618515637</c:v>
+                </c:pt>
+                <c:pt idx="28">
+                  <c:v>0.7601327162072317</c:v>
+                </c:pt>
+                <c:pt idx="29">
+                  <c:v>0.32538055601788674</c:v>
+                </c:pt>
+                <c:pt idx="30">
+                  <c:v>0.530285735792925</c:v>
+                </c:pt>
+                <c:pt idx="31">
+                  <c:v>0.34598412728053873</c:v>
+                </c:pt>
+                <c:pt idx="32">
+                  <c:v>0.32394971509434695</c:v>
+                </c:pt>
+                <c:pt idx="33">
+                  <c:v>0.3027385506618738</c:v>
+                </c:pt>
+                <c:pt idx="34">
+                  <c:v>0.5066751521256416</c:v>
+                </c:pt>
+                <c:pt idx="35">
+                  <c:v>0.7304508319418537</c:v>
+                </c:pt>
+                <c:pt idx="36">
+                  <c:v>0.7791584718158443</c:v>
+                </c:pt>
+                <c:pt idx="37">
+                  <c:v>0.3227573477878738</c:v>
+                </c:pt>
+                <c:pt idx="38">
+                  <c:v>0.2907821569198786</c:v>
+                </c:pt>
+                <c:pt idx="39">
+                  <c:v>0.3201667792337097</c:v>
+                </c:pt>
+                <c:pt idx="40">
+                  <c:v>0.2780646049557264</c:v>
+                </c:pt>
+                <c:pt idx="41">
+                  <c:v>0.320836488805754</c:v>
+                </c:pt>
+                <c:pt idx="42">
+                  <c:v>0.31394357761715075</c:v>
+                </c:pt>
+                <c:pt idx="43">
+                  <c:v>0.6386675681002572</c:v>
+                </c:pt>
+                <c:pt idx="44">
+                  <c:v>0.6548250168806948</c:v>
+                </c:pt>
+                <c:pt idx="45">
+                  <c:v>0.3563692033954497</c:v>
+                </c:pt>
+                <c:pt idx="46">
+                  <c:v>0.3539354325510441</c:v>
+                </c:pt>
+                <c:pt idx="47">
+                  <c:v>0.945388268256049</c:v>
+                </c:pt>
+                <c:pt idx="48">
+                  <c:v>0.3482251112529508</c:v>
+                </c:pt>
+                <c:pt idx="49">
+                  <c:v>0.41458637197679044</c:v>
+                </c:pt>
+                <c:pt idx="50">
+                  <c:v>0.6353223529809368</c:v>
+                </c:pt>
+                <c:pt idx="51">
+                  <c:v>0.4046749991451235</c:v>
+                </c:pt>
+                <c:pt idx="52">
+                  <c:v>0.9004047946008494</c:v>
+                </c:pt>
+                <c:pt idx="53">
+                  <c:v>0.37107294704531263</c:v>
+                </c:pt>
+                <c:pt idx="54">
+                  <c:v>0.3639382902498024</c:v>
+                </c:pt>
+                <c:pt idx="55">
+                  <c:v>0.5206422011488941</c:v>
+                </c:pt>
+                <c:pt idx="56">
+                  <c:v>0.3726965113637757</c:v>
+                </c:pt>
+                <c:pt idx="57">
+                  <c:v>0.3371082749774218</c:v>
+                </c:pt>
+                <c:pt idx="58">
+                  <c:v>0.5462455890212278</c:v>
+                </c:pt>
+                <c:pt idx="59">
+                  <c:v>0.39233639633329276</c:v>
+                </c:pt>
+                <c:pt idx="60">
+                  <c:v>0.3683158006394177</c:v>
+                </c:pt>
+                <c:pt idx="61">
+                  <c:v>0.7065903261979312</c:v>
+                </c:pt>
+                <c:pt idx="62">
+                  <c:v>0.3188633511990054</c:v>
+                </c:pt>
+                <c:pt idx="63">
+                  <c:v>0.39867719097486726</c:v>
+                </c:pt>
+                <c:pt idx="64">
+                  <c:v>0.3034180279141343</c:v>
+                </c:pt>
+                <c:pt idx="65">
+                  <c:v>0.3069298325680818</c:v>
+                </c:pt>
+                <c:pt idx="66">
+                  <c:v>0.3715433643192407</c:v>
+                </c:pt>
+                <c:pt idx="67">
+                  <c:v>0.3103305422239689</c:v>
+                </c:pt>
+                <c:pt idx="68">
+                  <c:v>0.3077432386499073</c:v>
+                </c:pt>
+                <c:pt idx="69">
+                  <c:v>0.7179227481282692</c:v>
+                </c:pt>
+                <c:pt idx="70">
+                  <c:v>0.2982565274180069</c:v>
+                </c:pt>
+                <c:pt idx="71">
+                  <c:v>0.36186065380827775</c:v>
+                </c:pt>
+                <c:pt idx="72">
+                  <c:v>0.3255863603624337</c:v>
+                </c:pt>
+                <c:pt idx="73">
+                  <c:v>0.3074949837225788</c:v>
+                </c:pt>
+                <c:pt idx="74">
+                  <c:v>0.31706008679962067</c:v>
+                </c:pt>
+                <c:pt idx="75">
+                  <c:v>0.3209426540109807</c:v>
+                </c:pt>
+                <c:pt idx="76">
+                  <c:v>0.27754517909986043</c:v>
+                </c:pt>
+                <c:pt idx="77">
+                  <c:v>0.2972879319718217</c:v>
+                </c:pt>
+                <c:pt idx="78">
+                  <c:v>0.29358505588449607</c:v>
+                </c:pt>
+                <c:pt idx="79">
+                  <c:v>0.38304239214026076</c:v>
+                </c:pt>
+                <c:pt idx="80">
+                  <c:v>0.4834009829110443</c:v>
+                </c:pt>
+                <c:pt idx="81">
+                  <c:v>0.3893733996301251</c:v>
+                </c:pt>
+                <c:pt idx="82">
+                  <c:v>0.30788699902618855</c:v>
+                </c:pt>
+                <c:pt idx="83">
+                  <c:v>0.26923449781216424</c:v>
+                </c:pt>
+                <c:pt idx="84">
+                  <c:v>0.3580973179534327</c:v>
+                </c:pt>
+                <c:pt idx="85">
+                  <c:v>0.3052539654803374</c:v>
+                </c:pt>
+                <c:pt idx="86">
+                  <c:v>0.38212769768357885</c:v>
+                </c:pt>
+                <c:pt idx="87">
+                  <c:v>0.38467904831238414</c:v>
+                </c:pt>
+                <c:pt idx="88">
+                  <c:v>0.30345069718665385</c:v>
+                </c:pt>
+                <c:pt idx="89">
+                  <c:v>0.3179715209493585</c:v>
+                </c:pt>
+                <c:pt idx="90">
+                  <c:v>0.37662646401333943</c:v>
+                </c:pt>
+                <c:pt idx="91">
+                  <c:v>0.46528019380074487</c:v>
+                </c:pt>
+                <c:pt idx="92">
+                  <c:v>0.8128780772188231</c:v>
+                </c:pt>
+                <c:pt idx="93">
+                  <c:v>0.34230572296678724</c:v>
+                </c:pt>
+                <c:pt idx="94">
+                  <c:v>0.3573459690804889</c:v>
+                </c:pt>
+                <c:pt idx="95">
+                  <c:v>0.32345971339182183</c:v>
+                </c:pt>
+                <c:pt idx="96">
+                  <c:v>0.31977234070268007</c:v>
+                </c:pt>
+                <c:pt idx="97">
+                  <c:v>0.3151098211885046</c:v>
+                </c:pt>
+                <c:pt idx="98">
+                  <c:v>0.5166731006713497</c:v>
+                </c:pt>
+                <c:pt idx="99">
+                  <c:v>0.3145250743119441</c:v>
+                </c:pt>
+                <c:pt idx="100">
+                  <c:v>0.31197372290427905</c:v>
+                </c:pt>
+                <c:pt idx="101">
+                  <c:v>0.352318382615591</c:v>
+                </c:pt>
+                <c:pt idx="102">
+                  <c:v>0.3554577528896569</c:v>
+                </c:pt>
+                <c:pt idx="103">
+                  <c:v>0.3416197040714252</c:v>
+                </c:pt>
+                <c:pt idx="104">
+                  <c:v>0.3436091611266684</c:v>
+                </c:pt>
+                <c:pt idx="105">
+                  <c:v>0.35398771740655105</c:v>
+                </c:pt>
+              </c:numCache>
+            </c:numRef>
+          </c:xVal>
+          <c:yVal>
+            <c:numRef>
+              <c:f>Sheet1!$B$144:$B$249</c:f>
+              <c:numCache>
+                <c:formatCode>General</c:formatCode>
+                <c:ptCount val="106"/>
+                <c:pt idx="0">
+                  <c:v>0.016551360352218658</c:v>
+                </c:pt>
+                <c:pt idx="1">
+                  <c:v>0.013122696856386043</c:v>
+                </c:pt>
+                <c:pt idx="2">
+                  <c:v>0.02060743236130119</c:v>
+                </c:pt>
+                <c:pt idx="3">
+                  <c:v>0.046661631216132315</c:v>
+                </c:pt>
+                <c:pt idx="4">
+                  <c:v>0.031922602702761295</c:v>
+                </c:pt>
+                <c:pt idx="5">
+                  <c:v>0.5172743547388945</c:v>
+                </c:pt>
+                <c:pt idx="6">
+                  <c:v>0.054681612088160934</c:v>
+                </c:pt>
+                <c:pt idx="7">
+                  <c:v>0.11201706708443947</c:v>
+                </c:pt>
+                <c:pt idx="8">
+                  <c:v>0.5602094564496474</c:v>
+                </c:pt>
+                <c:pt idx="9">
+                  <c:v>0.04197793962023599</c:v>
+                </c:pt>
+                <c:pt idx="10">
+                  <c:v>0.042881651619410724</c:v>
+                </c:pt>
+                <c:pt idx="11">
+                  <c:v>0.030598831855915942</c:v>
+                </c:pt>
+                <c:pt idx="12">
+                  <c:v>0.026510182913142874</c:v>
+                </c:pt>
+                <c:pt idx="13">
+                  <c:v>0.029241320851405503</c:v>
+                </c:pt>
+                <c:pt idx="14">
+                  <c:v>0.020676664411592393</c:v>
+                </c:pt>
+                <c:pt idx="15">
+                  <c:v>0.019178848318517936</c:v>
+                </c:pt>
+                <c:pt idx="16">
+                  <c:v>0.015643815853357373</c:v>
+                </c:pt>
+                <c:pt idx="17">
+                  <c:v>0.015262899266873</c:v>
+                </c:pt>
+                <c:pt idx="18">
+                  <c:v>0.017740963657947046</c:v>
+                </c:pt>
+                <c:pt idx="19">
+                  <c:v>0.3266667586939286</c:v>
+                </c:pt>
+                <c:pt idx="20">
+                  <c:v>0.14662688473527646</c:v>
+                </c:pt>
+                <c:pt idx="21">
+                  <c:v>0.003929870344405286</c:v>
+                </c:pt>
+                <c:pt idx="22">
+                  <c:v>-0.051294849879954155</c:v>
+                </c:pt>
+                <c:pt idx="23">
+                  <c:v>-0.022999954223632813</c:v>
+                </c:pt>
+                <c:pt idx="24">
+                  <c:v>0.08137921463721136</c:v>
+                </c:pt>
+                <c:pt idx="25">
+                  <c:v>0.041436421333016615</c:v>
+                </c:pt>
+                <c:pt idx="26">
+                  <c:v>0.6460981241736752</c:v>
+                </c:pt>
+                <c:pt idx="27">
+                  <c:v>0.6892910985246458</c:v>
+                </c:pt>
+                <c:pt idx="28">
+                  <c:v>-0.19447663442602706</c:v>
+                </c:pt>
+                <c:pt idx="29">
+                  <c:v>0.1216931295454338</c:v>
+                </c:pt>
+                <c:pt idx="30">
+                  <c:v>-0.0056921888763656</c:v>
+                </c:pt>
+                <c:pt idx="31">
+                  <c:v>0.024454684518906252</c:v>
+                </c:pt>
+                <c:pt idx="32">
+                  <c:v>0.5970050184530419</c:v>
+                </c:pt>
+                <c:pt idx="33">
+                  <c:v>0.5887431200477825</c:v>
+                </c:pt>
+                <c:pt idx="34">
+                  <c:v>-0.0031238619358599073</c:v>
+                </c:pt>
+                <c:pt idx="35">
+                  <c:v>0.1295349152349909</c:v>
+                </c:pt>
+                <c:pt idx="36">
+                  <c:v>-0.1105111638743416</c:v>
+                </c:pt>
+                <c:pt idx="37">
+                  <c:v>0.6453846613048777</c:v>
+                </c:pt>
+                <c:pt idx="38">
+                  <c:v>0.6394194225617091</c:v>
+                </c:pt>
+                <c:pt idx="39">
+                  <c:v>0.0477517403227958</c:v>
+                </c:pt>
+                <c:pt idx="40">
+                  <c:v>0.03475132698596485</c:v>
+                </c:pt>
+                <c:pt idx="41">
+                  <c:v>0.028458867213282626</c:v>
+                </c:pt>
+                <c:pt idx="42">
+                  <c:v>0.04626338511953217</c:v>
+                </c:pt>
+                <c:pt idx="43">
+                  <c:v>-0.13773638295229487</c:v>
+                </c:pt>
+                <c:pt idx="44">
+                  <c:v>-0.12808684834688336</c:v>
+                </c:pt>
+                <c:pt idx="45">
+                  <c:v>0.07854135993544976</c:v>
+                </c:pt>
+                <c:pt idx="46">
+                  <c:v>0.11777303266385533</c:v>
+                </c:pt>
+                <c:pt idx="47">
+                  <c:v>-0.18690718358748953</c:v>
+                </c:pt>
+                <c:pt idx="48">
+                  <c:v>0.07328609348276767</c:v>
+                </c:pt>
+                <c:pt idx="49">
+                  <c:v>0.03790090726261208</c:v>
+                </c:pt>
+                <c:pt idx="50">
+                  <c:v>-0.12272729167343992</c:v>
+                </c:pt>
+                <c:pt idx="51">
+                  <c:v>0.6401401156532883</c:v>
+                </c:pt>
+                <c:pt idx="52">
+                  <c:v>-0.05986395025635024</c:v>
+                </c:pt>
+                <c:pt idx="53">
+                  <c:v>0.6511400523464658</c:v>
+                </c:pt>
+                <c:pt idx="54">
+                  <c:v>0.041389215835394545</c:v>
+                </c:pt>
+                <c:pt idx="55">
+                  <c:v>0.09788243910845588</c:v>
+                </c:pt>
+                <c:pt idx="56">
+                  <c:v>0.7527940376810068</c:v>
+                </c:pt>
+                <c:pt idx="57">
+                  <c:v>0.02940122486795509</c:v>
+                </c:pt>
+                <c:pt idx="58">
+                  <c:v>0.3107691445650332</c:v>
+                </c:pt>
+                <c:pt idx="59">
+                  <c:v>0.04936752449359159</c:v>
+                </c:pt>
+                <c:pt idx="60">
+                  <c:v>0.04732759157373758</c:v>
+                </c:pt>
+                <c:pt idx="61">
+                  <c:v>0.044272634893721116</c:v>
+                </c:pt>
+                <c:pt idx="62">
+                  <c:v>0.043889842004611816</c:v>
+                </c:pt>
+                <c:pt idx="63">
+                  <c:v>0.04351033362511476</c:v>
+                </c:pt>
+                <c:pt idx="64">
+                  <c:v>0.04478901393485731</c:v>
+                </c:pt>
+                <c:pt idx="65">
+                  <c:v>0.050343197241982836</c:v>
+                </c:pt>
+                <c:pt idx="66">
+                  <c:v>0.8547224752900731</c:v>
+                </c:pt>
+                <c:pt idx="67">
+                  <c:v>0.08337195625687496</c:v>
+                </c:pt>
+                <c:pt idx="68">
+                  <c:v>1.1938346359495347</c:v>
+                </c:pt>
+                <c:pt idx="69">
+                  <c:v>-0.03229816376660553</c:v>
+                </c:pt>
+                <c:pt idx="70">
+                  <c:v>0.06506023487274365</c:v>
+                </c:pt>
+                <c:pt idx="71">
+                  <c:v>0.07646476181997884</c:v>
+                </c:pt>
+                <c:pt idx="72">
+                  <c:v>0.07079652752837852</c:v>
+                </c:pt>
+                <c:pt idx="73">
+                  <c:v>0.017736474864797142</c:v>
+                </c:pt>
+                <c:pt idx="74">
+                  <c:v>0.03709201034845074</c:v>
+                </c:pt>
+                <c:pt idx="75">
+                  <c:v>0.022591547580411566</c:v>
+                </c:pt>
+                <c:pt idx="76">
+                  <c:v>0.008474635249893867</c:v>
+                </c:pt>
+                <c:pt idx="77">
+                  <c:v>0.00703823065306332</c:v>
+                </c:pt>
+                <c:pt idx="78">
+                  <c:v>0.023255744853991248</c:v>
+                </c:pt>
+                <c:pt idx="79">
+                  <c:v>0.029815697482836714</c:v>
+                </c:pt>
+                <c:pt idx="80">
+                  <c:v>0.8424734047888177</c:v>
+                </c:pt>
+                <c:pt idx="81">
+                  <c:v>0.038643552474415366</c:v>
+                </c:pt>
+                <c:pt idx="82">
+                  <c:v>0.03431367913728181</c:v>
+                </c:pt>
+                <c:pt idx="83">
+                  <c:v>0.023927428690075817</c:v>
+                </c:pt>
+                <c:pt idx="84">
+                  <c:v>0.06462443773288457</c:v>
+                </c:pt>
+                <c:pt idx="85">
+                  <c:v>1.1984546133071885</c:v>
+                </c:pt>
+                <c:pt idx="86">
+                  <c:v>0.5559012863368403</c:v>
+                </c:pt>
+                <c:pt idx="87">
+                  <c:v>0.08267166889105296</c:v>
+                </c:pt>
+                <c:pt idx="88">
+                  <c:v>0.030143240694151998</c:v>
+                </c:pt>
+                <c:pt idx="89">
+                  <c:v>0.02219144470849665</c:v>
+                </c:pt>
+                <c:pt idx="90">
+                  <c:v>0.13068781233305182</c:v>
+                </c:pt>
+                <c:pt idx="91">
+                  <c:v>0.1742424305578133</c:v>
+                </c:pt>
+                <c:pt idx="92">
+                  <c:v>0.17708339441544504</c:v>
+                </c:pt>
+                <c:pt idx="93">
+                  <c:v>0.012826438489647304</c:v>
+                </c:pt>
+                <c:pt idx="94">
+                  <c:v>0.2944152865258484</c:v>
+                </c:pt>
+                <c:pt idx="95">
+                  <c:v>0.018027527609652944</c:v>
+                </c:pt>
+                <c:pt idx="96">
+                  <c:v>0.03396541144502726</c:v>
+                </c:pt>
+                <c:pt idx="97">
+                  <c:v>0.012658207198381136</c:v>
+                </c:pt>
+                <c:pt idx="98">
+                  <c:v>-0.014415821152068173</c:v>
+                </c:pt>
+                <c:pt idx="99">
+                  <c:v>0.005873427029915067</c:v>
+                </c:pt>
+                <c:pt idx="100">
+                  <c:v>0.01328807717077173</c:v>
+                </c:pt>
+                <c:pt idx="101">
+                  <c:v>0.03420528695755149</c:v>
+                </c:pt>
+                <c:pt idx="102">
+                  <c:v>0.007168464907145925</c:v>
+                </c:pt>
+                <c:pt idx="103">
+                  <c:v>0.005962249335704119</c:v>
+                </c:pt>
+                <c:pt idx="104">
+                  <c:v>0.000275755697148857</c:v>
+                </c:pt>
+                <c:pt idx="105">
+                  <c:v>0.002768546465910139</c:v>
+                </c:pt>
+              </c:numCache>
+            </c:numRef>
+          </c:yVal>
+          <c:smooth val="0"/>
+        </c:ser>
+        <c:ser>
+          <c:idx val="2"/>
+          <c:order val="2"/>
+          <c:tx>
+            <c:strRef>
+              <c:f>Sheet1!$B$251</c:f>
+              <c:strCache>
+                <c:ptCount val="1"/>
+                <c:pt idx="0">
+                  <c:v>height ≥ 0.5554 m</c:v>
+                </c:pt>
+              </c:strCache>
+            </c:strRef>
+          </c:tx>
+          <c:spPr>
+            <a:ln w="15875">
+              <a:solidFill>
+                <a:srgbClr val="5B6475"/>
+              </a:solidFill>
+              <a:prstDash val="dash"/>
+            </a:ln>
+          </c:spPr>
+          <c:marker>
+            <c:symbol val="none"/>
+          </c:marker>
+          <c:xVal>
+            <c:numRef>
+              <c:f>Sheet1!$A$252:$A$253</c:f>
+              <c:numCache>
+                <c:formatCode>General</c:formatCode>
+                <c:ptCount val="2"/>
+                <c:pt idx="0">
+                  <c:v>0.5554</c:v>
+                </c:pt>
+                <c:pt idx="1">
+                  <c:v>0.5554</c:v>
+                </c:pt>
+              </c:numCache>
+            </c:numRef>
+          </c:xVal>
+          <c:yVal>
+            <c:numRef>
+              <c:f>Sheet1!$B$252:$B$253</c:f>
+              <c:numCache>
+                <c:formatCode>General</c:formatCode>
+                <c:ptCount val="2"/>
+                <c:pt idx="0">
+                  <c:v>-0.5</c:v>
+                </c:pt>
+                <c:pt idx="1">
+                  <c:v>5.5</c:v>
+                </c:pt>
+              </c:numCache>
+            </c:numRef>
+          </c:yVal>
+          <c:smooth val="0"/>
+        </c:ser>
+        <c:ser>
+          <c:idx val="3"/>
+          <c:order val="3"/>
+          <c:tx>
+            <c:strRef>
+              <c:f>Sheet1!$B$255</c:f>
+              <c:strCache>
+                <c:ptCount val="1"/>
+                <c:pt idx="0">
+                  <c:v>contrast ≥ 0.1922</c:v>
+                </c:pt>
+              </c:strCache>
+            </c:strRef>
+          </c:tx>
+          <c:spPr>
+            <a:ln w="15875">
+              <a:solidFill>
+                <a:srgbClr val="5B6475"/>
+              </a:solidFill>
+              <a:prstDash val="dash"/>
+            </a:ln>
+          </c:spPr>
+          <c:marker>
+            <c:symbol val="none"/>
+          </c:marker>
+          <c:xVal>
+            <c:numRef>
+              <c:f>Sheet1!$A$256:$A$257</c:f>
+              <c:numCache>
+                <c:formatCode>General</c:formatCode>
+                <c:ptCount val="2"/>
+                <c:pt idx="0">
+                  <c:v>0.0</c:v>
+                </c:pt>
+                <c:pt idx="1">
+                  <c:v>1.6</c:v>
+                </c:pt>
+              </c:numCache>
+            </c:numRef>
+          </c:xVal>
+          <c:yVal>
+            <c:numRef>
+              <c:f>Sheet1!$B$256:$B$257</c:f>
+              <c:numCache>
+                <c:formatCode>General</c:formatCode>
+                <c:ptCount val="2"/>
+                <c:pt idx="0">
+                  <c:v>0.1922</c:v>
+                </c:pt>
+                <c:pt idx="1">
+                  <c:v>0.1922</c:v>
+                </c:pt>
+              </c:numCache>
+            </c:numRef>
+          </c:yVal>
+          <c:smooth val="0"/>
+        </c:ser>
+        <c:axId val="-2128940872"/>
+        <c:axId val="-2129643912"/>
+      </c:scatterChart>
+      <c:valAx>
+        <c:axId val="-2128940872"/>
+        <c:scaling>
+          <c:orientation val="minMax"/>
+          <c:max val="1.6"/>
+          <c:min val="0.0"/>
+        </c:scaling>
+        <c:delete val="0"/>
+        <c:axPos val="b"/>
+        <c:title>
+          <c:tx>
+            <c:rich>
+              <a:bodyPr/>
+              <a:lstStyle/>
+              <a:p>
+                <a:r>
+                  <a:rPr sz="1100" b="0">
+                    <a:solidFill>
+                      <a:srgbClr val="5B6475"/>
+                    </a:solidFill>
+                    <a:latin typeface="Arial"/>
+                  </a:rPr>
+                  <a:t>Projected box height (m)</a:t>
+                </a:r>
+              </a:p>
+            </c:rich>
+          </c:tx>
+          <c:layout/>
+          <c:overlay val="0"/>
+        </c:title>
+        <c:numFmt formatCode="General" sourceLinked="1"/>
+        <c:majorTickMark val="out"/>
+        <c:minorTickMark val="none"/>
+        <c:tickLblPos val="nextTo"/>
+        <c:spPr>
+          <a:ln>
+            <a:solidFill>
+              <a:srgbClr val="E3E6EB"/>
+            </a:solidFill>
+          </a:ln>
+        </c:spPr>
+        <c:txPr>
+          <a:bodyPr/>
+          <a:lstStyle/>
+          <a:p>
+            <a:pPr>
+              <a:defRPr sz="1050">
+                <a:solidFill>
+                  <a:srgbClr val="5B6475"/>
+                </a:solidFill>
+                <a:latin typeface="Arial"/>
+              </a:defRPr>
+            </a:pPr>
+          </a:p>
+        </c:txPr>
+        <c:crossAx val="-2129643912"/>
+        <c:crosses val="min"/>
+        <c:crossBetween val="midCat"/>
+        <c:majorUnit val="0.4"/>
+      </c:valAx>
+      <c:valAx>
+        <c:axId val="-2129643912"/>
+        <c:scaling>
+          <c:orientation val="minMax"/>
+          <c:max val="5.5"/>
+          <c:min val="-0.5"/>
+        </c:scaling>
+        <c:delete val="0"/>
+        <c:axPos val="l"/>
+        <c:title>
+          <c:tx>
+            <c:rich>
+              <a:bodyPr/>
+              <a:lstStyle/>
+              <a:p>
+                <a:r>
+                  <a:rPr sz="1100" b="0">
+                    <a:solidFill>
+                      <a:srgbClr val="5B6475"/>
+                    </a:solidFill>
+                    <a:latin typeface="Arial"/>
+                  </a:rPr>
+                  <a:t>Relative contrast</a:t>
+                </a:r>
+              </a:p>
+            </c:rich>
+          </c:tx>
+          <c:layout/>
+          <c:overlay val="0"/>
+        </c:title>
+        <c:numFmt formatCode="General" sourceLinked="1"/>
+        <c:majorTickMark val="out"/>
+        <c:minorTickMark val="none"/>
+        <c:tickLblPos val="nextTo"/>
+        <c:spPr>
+          <a:ln>
+            <a:solidFill>
+              <a:srgbClr val="E3E6EB"/>
+            </a:solidFill>
+          </a:ln>
+        </c:spPr>
+        <c:txPr>
+          <a:bodyPr/>
+          <a:lstStyle/>
+          <a:p>
+            <a:pPr>
+              <a:defRPr sz="1050">
+                <a:solidFill>
+                  <a:srgbClr val="5B6475"/>
+                </a:solidFill>
+                <a:latin typeface="Arial"/>
+              </a:defRPr>
+            </a:pPr>
+          </a:p>
+        </c:txPr>
+        <c:crossAx val="-2128940872"/>
+        <c:crosses val="autoZero"/>
+        <c:crossBetween val="midCat"/>
+        <c:majorUnit val="1.0"/>
+      </c:valAx>
+    </c:plotArea>
+    <c:legend>
+      <c:legendPos val="b"/>
+      <c:layout/>
+      <c:overlay val="0"/>
+      <c:txPr>
+        <a:bodyPr/>
+        <a:lstStyle/>
+        <a:p>
+          <a:pPr>
+            <a:defRPr sz="1050">
+              <a:solidFill>
+                <a:srgbClr val="5B6475"/>
+              </a:solidFill>
+              <a:latin typeface="Arial"/>
+            </a:defRPr>
+          </a:pPr>
+        </a:p>
+      </c:txPr>
+    </c:legend>
+    <c:plotVisOnly val="1"/>
+    <c:dispBlanksAs val="gap"/>
+    <c:showDLblsOverMax val="0"/>
+  </c:chart>
+  <c:txPr>
+    <a:bodyPr/>
+    <a:lstStyle/>
+    <a:p>
+      <a:pPr>
+        <a:defRPr sz="1800"/>
+      </a:pPr>
+      <a:endParaRPr lang="en-US"/>
+    </a:p>
+  </c:txPr>
+  <c:externalData r:id="rId1">
+    <c:autoUpdate val="0"/>
+  </c:externalData>
+</c:chartSpace>
 </file>
 
 <file path=ppt/slideLayouts/slideLayout1.xml><?xml version="1.0" encoding="utf-8"?>
@@ -12582,6 +14444,3863 @@
 </p:sld>
 </file>
 
+<file path=ppt/slides/slide17.xml><?xml version="1.0" encoding="utf-8"?>
+<p:sld xmlns:a="http://schemas.openxmlformats.org/drawingml/2006/main" xmlns:p="http://schemas.openxmlformats.org/presentationml/2006/main" xmlns:r="http://schemas.openxmlformats.org/officeDocument/2006/relationships">
+  <p:cSld>
+    <p:bg>
+      <p:bgPr>
+        <a:solidFill>
+          <a:srgbClr val="FFFFFF"/>
+        </a:solidFill>
+        <a:effectLst/>
+      </p:bgPr>
+    </p:bg>
+    <p:spTree>
+      <p:nvGrpSpPr>
+        <p:cNvPr id="1" name=""/>
+        <p:cNvGrpSpPr/>
+        <p:nvPr/>
+      </p:nvGrpSpPr>
+      <p:grpSpPr/>
+      <p:sp>
+        <p:nvSpPr>
+          <p:cNvPr id="2" name="TextBox 1"/>
+          <p:cNvSpPr txBox="1"/>
+          <p:nvPr/>
+        </p:nvSpPr>
+        <p:spPr>
+          <a:xfrm>
+            <a:off x="533400" y="381000"/>
+            <a:ext cx="7620000" cy="190500"/>
+          </a:xfrm>
+          <a:prstGeom prst="rect">
+            <a:avLst/>
+          </a:prstGeom>
+          <a:noFill/>
+        </p:spPr>
+        <p:txBody>
+          <a:bodyPr wrap="square" anchor="t" lIns="0" rIns="0" tIns="0" bIns="0">
+            <a:spAutoFit/>
+          </a:bodyPr>
+          <a:lstStyle/>
+          <a:p>
+            <a:pPr algn="l">
+              <a:spcAft>
+                <a:spcPts val="400"/>
+              </a:spcAft>
+            </a:pPr>
+            <a:r>
+              <a:rPr sz="1125" b="1" i="0">
+                <a:solidFill>
+                  <a:srgbClr val="C0392B"/>
+                </a:solidFill>
+                <a:latin typeface="Arial"/>
+              </a:rPr>
+              <a:t>TASK 2 · REAL VS DECOY · 1 / 3</a:t>
+            </a:r>
+          </a:p>
+        </p:txBody>
+      </p:sp>
+      <p:sp>
+        <p:nvSpPr>
+          <p:cNvPr id="3" name="TextBox 2"/>
+          <p:cNvSpPr txBox="1"/>
+          <p:nvPr/>
+        </p:nvSpPr>
+        <p:spPr>
+          <a:xfrm>
+            <a:off x="6896100" y="381000"/>
+            <a:ext cx="4762500" cy="190500"/>
+          </a:xfrm>
+          <a:prstGeom prst="rect">
+            <a:avLst/>
+          </a:prstGeom>
+          <a:noFill/>
+        </p:spPr>
+        <p:txBody>
+          <a:bodyPr wrap="square" anchor="t" lIns="0" rIns="0" tIns="0" bIns="0">
+            <a:spAutoFit/>
+          </a:bodyPr>
+          <a:lstStyle/>
+          <a:p>
+            <a:pPr algn="r">
+              <a:spcAft>
+                <a:spcPts val="400"/>
+              </a:spcAft>
+            </a:pPr>
+            <a:r>
+              <a:rPr sz="1125" b="0" i="0">
+                <a:solidFill>
+                  <a:srgbClr val="5B6475"/>
+                </a:solidFill>
+                <a:latin typeface="Arial"/>
+              </a:rPr>
+              <a:t>Shravani Kuchi</a:t>
+            </a:r>
+          </a:p>
+        </p:txBody>
+      </p:sp>
+      <p:sp>
+        <p:nvSpPr>
+          <p:cNvPr id="4" name="TextBox 3"/>
+          <p:cNvSpPr txBox="1"/>
+          <p:nvPr/>
+        </p:nvSpPr>
+        <p:spPr>
+          <a:xfrm>
+            <a:off x="533400" y="590550"/>
+            <a:ext cx="11125200" cy="419100"/>
+          </a:xfrm>
+          <a:prstGeom prst="rect">
+            <a:avLst/>
+          </a:prstGeom>
+          <a:noFill/>
+        </p:spPr>
+        <p:txBody>
+          <a:bodyPr wrap="square" anchor="t" lIns="0" rIns="0" tIns="0" bIns="0">
+            <a:spAutoFit/>
+          </a:bodyPr>
+          <a:lstStyle/>
+          <a:p>
+            <a:pPr algn="l">
+              <a:spcAft>
+                <a:spcPts val="400"/>
+              </a:spcAft>
+            </a:pPr>
+            <a:r>
+              <a:rPr sz="2550" b="1" i="0">
+                <a:solidFill>
+                  <a:srgbClr val="1D2433"/>
+                </a:solidFill>
+                <a:latin typeface="Arial"/>
+              </a:rPr>
+              <a:t>Two depth cues from the detector box</a:t>
+            </a:r>
+          </a:p>
+        </p:txBody>
+      </p:sp>
+      <p:sp>
+        <p:nvSpPr>
+          <p:cNvPr id="5" name="Rounded Rectangle 4"/>
+          <p:cNvSpPr/>
+          <p:nvPr/>
+        </p:nvSpPr>
+        <p:spPr>
+          <a:xfrm>
+            <a:off x="533400" y="1143000"/>
+            <a:ext cx="3810000" cy="3143250"/>
+          </a:xfrm>
+          <a:prstGeom prst="roundRect">
+            <a:avLst>
+              <a:gd name="adj" fmla="val 3030"/>
+            </a:avLst>
+          </a:prstGeom>
+          <a:solidFill>
+            <a:srgbClr val="F5F7FA"/>
+          </a:solidFill>
+          <a:ln w="9525">
+            <a:solidFill>
+              <a:srgbClr val="E3E6EB"/>
+            </a:solidFill>
+          </a:ln>
+          <a:effectLst/>
+        </p:spPr>
+        <p:style>
+          <a:lnRef idx="1">
+            <a:schemeClr val="accent1"/>
+          </a:lnRef>
+          <a:fillRef idx="3">
+            <a:schemeClr val="accent1"/>
+          </a:fillRef>
+          <a:effectRef idx="2">
+            <a:schemeClr val="accent1"/>
+          </a:effectRef>
+          <a:fontRef idx="minor">
+            <a:schemeClr val="lt1"/>
+          </a:fontRef>
+        </p:style>
+        <p:txBody>
+          <a:bodyPr rtlCol="0" anchor="ctr"/>
+          <a:lstStyle/>
+          <a:p>
+            <a:pPr algn="ctr"/>
+          </a:p>
+        </p:txBody>
+      </p:sp>
+      <p:pic>
+        <p:nvPicPr>
+          <p:cNvPr id="6" name="Picture 5" descr="image1.png"/>
+          <p:cNvPicPr>
+            <a:picLocks noChangeAspect="1"/>
+          </p:cNvPicPr>
+          <p:nvPr/>
+        </p:nvPicPr>
+        <p:blipFill>
+          <a:blip r:embed="rId2"/>
+          <a:stretch>
+            <a:fillRect/>
+          </a:stretch>
+        </p:blipFill>
+        <p:spPr>
+          <a:xfrm>
+            <a:off x="1124607" y="1257300"/>
+            <a:ext cx="2627586" cy="1905000"/>
+          </a:xfrm>
+          <a:prstGeom prst="rect">
+            <a:avLst/>
+          </a:prstGeom>
+        </p:spPr>
+      </p:pic>
+      <p:sp>
+        <p:nvSpPr>
+          <p:cNvPr id="7" name="TextBox 6"/>
+          <p:cNvSpPr txBox="1"/>
+          <p:nvPr/>
+        </p:nvSpPr>
+        <p:spPr>
+          <a:xfrm>
+            <a:off x="723900" y="3295650"/>
+            <a:ext cx="3429000" cy="914400"/>
+          </a:xfrm>
+          <a:prstGeom prst="rect">
+            <a:avLst/>
+          </a:prstGeom>
+          <a:noFill/>
+        </p:spPr>
+        <p:txBody>
+          <a:bodyPr wrap="square" anchor="t" lIns="0" rIns="0" tIns="0" bIns="0">
+            <a:spAutoFit/>
+          </a:bodyPr>
+          <a:lstStyle/>
+          <a:p>
+            <a:pPr algn="l">
+              <a:spcAft>
+                <a:spcPts val="600"/>
+              </a:spcAft>
+            </a:pPr>
+            <a:r>
+              <a:rPr sz="1050" b="1" i="0">
+                <a:solidFill>
+                  <a:srgbClr val="1F6FB4"/>
+                </a:solidFill>
+                <a:latin typeface="Arial"/>
+              </a:rPr>
+              <a:t>▢ Outer ring (+50 % box pad): </a:t>
+            </a:r>
+            <a:r>
+              <a:rPr sz="1050" b="0" i="0">
+                <a:solidFill>
+                  <a:srgbClr val="1D2433"/>
+                </a:solidFill>
+                <a:latin typeface="Arial"/>
+              </a:rPr>
+              <a:t>median valid depth</a:t>
+            </a:r>
+          </a:p>
+          <a:p>
+            <a:pPr algn="l">
+              <a:spcAft>
+                <a:spcPts val="600"/>
+              </a:spcAft>
+            </a:pPr>
+            <a:r>
+              <a:rPr sz="1050" b="1" i="0">
+                <a:solidFill>
+                  <a:srgbClr val="1D2433"/>
+                </a:solidFill>
+                <a:latin typeface="Arial"/>
+              </a:rPr>
+              <a:t>▢ Detector box: </a:t>
+            </a:r>
+            <a:r>
+              <a:rPr sz="1050" b="0" i="0">
+                <a:solidFill>
+                  <a:srgbClr val="1D2433"/>
+                </a:solidFill>
+                <a:latin typeface="Arial"/>
+              </a:rPr>
+              <a:t>depth frame within 50 ms</a:t>
+            </a:r>
+          </a:p>
+          <a:p>
+            <a:pPr algn="l">
+              <a:spcAft>
+                <a:spcPts val="600"/>
+              </a:spcAft>
+            </a:pPr>
+            <a:r>
+              <a:rPr sz="1050" b="1" i="0">
+                <a:solidFill>
+                  <a:srgbClr val="2E9E4F"/>
+                </a:solidFill>
+                <a:latin typeface="Arial"/>
+              </a:rPr>
+              <a:t>◎ Central half: </a:t>
+            </a:r>
+            <a:r>
+              <a:rPr sz="1050" b="0" i="0">
+                <a:solidFill>
+                  <a:srgbClr val="1D2433"/>
+                </a:solidFill>
+                <a:latin typeface="Arial"/>
+              </a:rPr>
+              <a:t>25th percentile of valid depth</a:t>
+            </a:r>
+          </a:p>
+        </p:txBody>
+      </p:sp>
+      <p:sp>
+        <p:nvSpPr>
+          <p:cNvPr id="8" name="Rounded Rectangle 7"/>
+          <p:cNvSpPr/>
+          <p:nvPr/>
+        </p:nvSpPr>
+        <p:spPr>
+          <a:xfrm>
+            <a:off x="4572000" y="1143000"/>
+            <a:ext cx="7086600" cy="1476375"/>
+          </a:xfrm>
+          <a:prstGeom prst="roundRect">
+            <a:avLst>
+              <a:gd name="adj" fmla="val 6451"/>
+            </a:avLst>
+          </a:prstGeom>
+          <a:solidFill>
+            <a:srgbClr val="F5F7FA"/>
+          </a:solidFill>
+          <a:ln w="9525">
+            <a:solidFill>
+              <a:srgbClr val="E3E6EB"/>
+            </a:solidFill>
+          </a:ln>
+          <a:effectLst/>
+        </p:spPr>
+        <p:style>
+          <a:lnRef idx="1">
+            <a:schemeClr val="accent1"/>
+          </a:lnRef>
+          <a:fillRef idx="3">
+            <a:schemeClr val="accent1"/>
+          </a:fillRef>
+          <a:effectRef idx="2">
+            <a:schemeClr val="accent1"/>
+          </a:effectRef>
+          <a:fontRef idx="minor">
+            <a:schemeClr val="lt1"/>
+          </a:fontRef>
+        </p:style>
+        <p:txBody>
+          <a:bodyPr rtlCol="0" anchor="ctr"/>
+          <a:lstStyle/>
+          <a:p>
+            <a:pPr algn="ctr"/>
+          </a:p>
+        </p:txBody>
+      </p:sp>
+      <p:sp>
+        <p:nvSpPr>
+          <p:cNvPr id="9" name="TextBox 8"/>
+          <p:cNvSpPr txBox="1"/>
+          <p:nvPr/>
+        </p:nvSpPr>
+        <p:spPr>
+          <a:xfrm>
+            <a:off x="4762500" y="1276350"/>
+            <a:ext cx="6705600" cy="228600"/>
+          </a:xfrm>
+          <a:prstGeom prst="rect">
+            <a:avLst/>
+          </a:prstGeom>
+          <a:noFill/>
+        </p:spPr>
+        <p:txBody>
+          <a:bodyPr wrap="square" anchor="t" lIns="0" rIns="0" tIns="0" bIns="0">
+            <a:spAutoFit/>
+          </a:bodyPr>
+          <a:lstStyle/>
+          <a:p>
+            <a:pPr algn="l">
+              <a:spcAft>
+                <a:spcPts val="400"/>
+              </a:spcAft>
+            </a:pPr>
+            <a:r>
+              <a:rPr sz="1350" b="1" i="0">
+                <a:solidFill>
+                  <a:srgbClr val="1F6FB4"/>
+                </a:solidFill>
+                <a:latin typeface="Arial"/>
+              </a:rPr>
+              <a:t>1  </a:t>
+            </a:r>
+            <a:r>
+              <a:rPr sz="1350" b="1" i="0">
+                <a:solidFill>
+                  <a:srgbClr val="1D2433"/>
+                </a:solidFill>
+                <a:latin typeface="Arial"/>
+              </a:rPr>
+              <a:t>Projected box height (m)</a:t>
+            </a:r>
+          </a:p>
+        </p:txBody>
+      </p:sp>
+      <p:pic>
+        <p:nvPicPr>
+          <p:cNvPr id="10" name="Picture 9" descr="image5.png"/>
+          <p:cNvPicPr>
+            <a:picLocks noChangeAspect="1"/>
+          </p:cNvPicPr>
+          <p:nvPr/>
+        </p:nvPicPr>
+        <p:blipFill>
+          <a:blip r:embed="rId3"/>
+          <a:stretch>
+            <a:fillRect/>
+          </a:stretch>
+        </p:blipFill>
+        <p:spPr>
+          <a:xfrm>
+            <a:off x="4762500" y="1562100"/>
+            <a:ext cx="2141510" cy="590550"/>
+          </a:xfrm>
+          <a:prstGeom prst="rect">
+            <a:avLst/>
+          </a:prstGeom>
+        </p:spPr>
+      </p:pic>
+      <p:sp>
+        <p:nvSpPr>
+          <p:cNvPr id="11" name="TextBox 10"/>
+          <p:cNvSpPr txBox="1"/>
+          <p:nvPr/>
+        </p:nvSpPr>
+        <p:spPr>
+          <a:xfrm>
+            <a:off x="4762500" y="2247900"/>
+            <a:ext cx="6705600" cy="228600"/>
+          </a:xfrm>
+          <a:prstGeom prst="rect">
+            <a:avLst/>
+          </a:prstGeom>
+          <a:noFill/>
+        </p:spPr>
+        <p:txBody>
+          <a:bodyPr wrap="square" anchor="t" lIns="0" rIns="0" tIns="0" bIns="0">
+            <a:spAutoFit/>
+          </a:bodyPr>
+          <a:lstStyle/>
+          <a:p>
+            <a:pPr algn="l">
+              <a:spcAft>
+                <a:spcPts val="400"/>
+              </a:spcAft>
+            </a:pPr>
+            <a:r>
+              <a:rPr sz="1125" b="0" i="0">
+                <a:solidFill>
+                  <a:srgbClr val="5B6475"/>
+                </a:solidFill>
+                <a:latin typeface="Arial"/>
+              </a:rPr>
+              <a:t>Metric height represented by the detection box</a:t>
+            </a:r>
+          </a:p>
+        </p:txBody>
+      </p:sp>
+      <p:sp>
+        <p:nvSpPr>
+          <p:cNvPr id="12" name="Rounded Rectangle 11"/>
+          <p:cNvSpPr/>
+          <p:nvPr/>
+        </p:nvSpPr>
+        <p:spPr>
+          <a:xfrm>
+            <a:off x="4572000" y="2809875"/>
+            <a:ext cx="7086600" cy="1476375"/>
+          </a:xfrm>
+          <a:prstGeom prst="roundRect">
+            <a:avLst>
+              <a:gd name="adj" fmla="val 6451"/>
+            </a:avLst>
+          </a:prstGeom>
+          <a:solidFill>
+            <a:srgbClr val="F5F7FA"/>
+          </a:solidFill>
+          <a:ln w="9525">
+            <a:solidFill>
+              <a:srgbClr val="E3E6EB"/>
+            </a:solidFill>
+          </a:ln>
+          <a:effectLst/>
+        </p:spPr>
+        <p:style>
+          <a:lnRef idx="1">
+            <a:schemeClr val="accent1"/>
+          </a:lnRef>
+          <a:fillRef idx="3">
+            <a:schemeClr val="accent1"/>
+          </a:fillRef>
+          <a:effectRef idx="2">
+            <a:schemeClr val="accent1"/>
+          </a:effectRef>
+          <a:fontRef idx="minor">
+            <a:schemeClr val="lt1"/>
+          </a:fontRef>
+        </p:style>
+        <p:txBody>
+          <a:bodyPr rtlCol="0" anchor="ctr"/>
+          <a:lstStyle/>
+          <a:p>
+            <a:pPr algn="ctr"/>
+          </a:p>
+        </p:txBody>
+      </p:sp>
+      <p:sp>
+        <p:nvSpPr>
+          <p:cNvPr id="13" name="TextBox 12"/>
+          <p:cNvSpPr txBox="1"/>
+          <p:nvPr/>
+        </p:nvSpPr>
+        <p:spPr>
+          <a:xfrm>
+            <a:off x="4762500" y="2943225"/>
+            <a:ext cx="6705600" cy="228600"/>
+          </a:xfrm>
+          <a:prstGeom prst="rect">
+            <a:avLst/>
+          </a:prstGeom>
+          <a:noFill/>
+        </p:spPr>
+        <p:txBody>
+          <a:bodyPr wrap="square" anchor="t" lIns="0" rIns="0" tIns="0" bIns="0">
+            <a:spAutoFit/>
+          </a:bodyPr>
+          <a:lstStyle/>
+          <a:p>
+            <a:pPr algn="l">
+              <a:spcAft>
+                <a:spcPts val="400"/>
+              </a:spcAft>
+            </a:pPr>
+            <a:r>
+              <a:rPr sz="1350" b="1" i="0">
+                <a:solidFill>
+                  <a:srgbClr val="1F6FB4"/>
+                </a:solidFill>
+                <a:latin typeface="Arial"/>
+              </a:rPr>
+              <a:t>2  </a:t>
+            </a:r>
+            <a:r>
+              <a:rPr sz="1350" b="1" i="0">
+                <a:solidFill>
+                  <a:srgbClr val="1D2433"/>
+                </a:solidFill>
+                <a:latin typeface="Arial"/>
+              </a:rPr>
+              <a:t>Relative depth contrast</a:t>
+            </a:r>
+          </a:p>
+        </p:txBody>
+      </p:sp>
+      <p:pic>
+        <p:nvPicPr>
+          <p:cNvPr id="14" name="Picture 13" descr="image6.png"/>
+          <p:cNvPicPr>
+            <a:picLocks noChangeAspect="1"/>
+          </p:cNvPicPr>
+          <p:nvPr/>
+        </p:nvPicPr>
+        <p:blipFill>
+          <a:blip r:embed="rId4"/>
+          <a:stretch>
+            <a:fillRect/>
+          </a:stretch>
+        </p:blipFill>
+        <p:spPr>
+          <a:xfrm>
+            <a:off x="4762500" y="3228975"/>
+            <a:ext cx="2651408" cy="590550"/>
+          </a:xfrm>
+          <a:prstGeom prst="rect">
+            <a:avLst/>
+          </a:prstGeom>
+        </p:spPr>
+      </p:pic>
+      <p:sp>
+        <p:nvSpPr>
+          <p:cNvPr id="15" name="TextBox 14"/>
+          <p:cNvSpPr txBox="1"/>
+          <p:nvPr/>
+        </p:nvSpPr>
+        <p:spPr>
+          <a:xfrm>
+            <a:off x="4762500" y="3914775"/>
+            <a:ext cx="6705600" cy="228600"/>
+          </a:xfrm>
+          <a:prstGeom prst="rect">
+            <a:avLst/>
+          </a:prstGeom>
+          <a:noFill/>
+        </p:spPr>
+        <p:txBody>
+          <a:bodyPr wrap="square" anchor="t" lIns="0" rIns="0" tIns="0" bIns="0">
+            <a:spAutoFit/>
+          </a:bodyPr>
+          <a:lstStyle/>
+          <a:p>
+            <a:pPr algn="l">
+              <a:spcAft>
+                <a:spcPts val="400"/>
+              </a:spcAft>
+            </a:pPr>
+            <a:r>
+              <a:rPr sz="1125" b="0" i="0">
+                <a:solidFill>
+                  <a:srgbClr val="5B6475"/>
+                </a:solidFill>
+                <a:latin typeface="Arial"/>
+              </a:rPr>
+              <a:t>Compares the ring depth with the central estimate</a:t>
+            </a:r>
+          </a:p>
+        </p:txBody>
+      </p:sp>
+      <p:sp>
+        <p:nvSpPr>
+          <p:cNvPr id="16" name="Rounded Rectangle 15"/>
+          <p:cNvSpPr/>
+          <p:nvPr/>
+        </p:nvSpPr>
+        <p:spPr>
+          <a:xfrm>
+            <a:off x="533400" y="4514850"/>
+            <a:ext cx="11125200" cy="990600"/>
+          </a:xfrm>
+          <a:prstGeom prst="roundRect">
+            <a:avLst>
+              <a:gd name="adj" fmla="val 9615"/>
+            </a:avLst>
+          </a:prstGeom>
+          <a:solidFill>
+            <a:srgbClr val="1D2433"/>
+          </a:solidFill>
+          <a:ln>
+            <a:noFill/>
+          </a:ln>
+          <a:effectLst/>
+        </p:spPr>
+        <p:style>
+          <a:lnRef idx="1">
+            <a:schemeClr val="accent1"/>
+          </a:lnRef>
+          <a:fillRef idx="3">
+            <a:schemeClr val="accent1"/>
+          </a:fillRef>
+          <a:effectRef idx="2">
+            <a:schemeClr val="accent1"/>
+          </a:effectRef>
+          <a:fontRef idx="minor">
+            <a:schemeClr val="lt1"/>
+          </a:fontRef>
+        </p:style>
+        <p:txBody>
+          <a:bodyPr rtlCol="0" anchor="ctr"/>
+          <a:lstStyle/>
+          <a:p>
+            <a:pPr algn="ctr"/>
+          </a:p>
+        </p:txBody>
+      </p:sp>
+      <p:sp>
+        <p:nvSpPr>
+          <p:cNvPr id="17" name="TextBox 16"/>
+          <p:cNvSpPr txBox="1"/>
+          <p:nvPr/>
+        </p:nvSpPr>
+        <p:spPr>
+          <a:xfrm>
+            <a:off x="800100" y="4686300"/>
+            <a:ext cx="7239000" cy="190500"/>
+          </a:xfrm>
+          <a:prstGeom prst="rect">
+            <a:avLst/>
+          </a:prstGeom>
+          <a:noFill/>
+        </p:spPr>
+        <p:txBody>
+          <a:bodyPr wrap="square" anchor="t" lIns="0" rIns="0" tIns="0" bIns="0">
+            <a:spAutoFit/>
+          </a:bodyPr>
+          <a:lstStyle/>
+          <a:p>
+            <a:pPr algn="l">
+              <a:spcAft>
+                <a:spcPts val="400"/>
+              </a:spcAft>
+            </a:pPr>
+            <a:r>
+              <a:rPr sz="975" b="1" i="0">
+                <a:solidFill>
+                  <a:srgbClr val="8FB8E8"/>
+                </a:solidFill>
+                <a:latin typeface="Arial"/>
+              </a:rPr>
+              <a:t>SAVED RULE (FINAL FIT ON EVAL DATA)</a:t>
+            </a:r>
+          </a:p>
+        </p:txBody>
+      </p:sp>
+      <p:sp>
+        <p:nvSpPr>
+          <p:cNvPr id="18" name="TextBox 17"/>
+          <p:cNvSpPr txBox="1"/>
+          <p:nvPr/>
+        </p:nvSpPr>
+        <p:spPr>
+          <a:xfrm>
+            <a:off x="800100" y="4933950"/>
+            <a:ext cx="7239000" cy="381000"/>
+          </a:xfrm>
+          <a:prstGeom prst="rect">
+            <a:avLst/>
+          </a:prstGeom>
+          <a:noFill/>
+        </p:spPr>
+        <p:txBody>
+          <a:bodyPr wrap="square" anchor="t" lIns="0" rIns="0" tIns="0" bIns="0">
+            <a:spAutoFit/>
+          </a:bodyPr>
+          <a:lstStyle/>
+          <a:p>
+            <a:pPr algn="l">
+              <a:spcAft>
+                <a:spcPts val="400"/>
+              </a:spcAft>
+            </a:pPr>
+            <a:r>
+              <a:rPr sz="2100" b="1" i="0">
+                <a:solidFill>
+                  <a:srgbClr val="FFFFFF"/>
+                </a:solidFill>
+                <a:latin typeface="Arial"/>
+              </a:rPr>
+              <a:t>height ≥ 0.5554 m   AND   contrast ≥ 0.1922</a:t>
+            </a:r>
+          </a:p>
+        </p:txBody>
+      </p:sp>
+      <p:sp>
+        <p:nvSpPr>
+          <p:cNvPr id="19" name="TextBox 18"/>
+          <p:cNvSpPr txBox="1"/>
+          <p:nvPr/>
+        </p:nvSpPr>
+        <p:spPr>
+          <a:xfrm>
+            <a:off x="8572500" y="4705350"/>
+            <a:ext cx="2857500" cy="285750"/>
+          </a:xfrm>
+          <a:prstGeom prst="rect">
+            <a:avLst/>
+          </a:prstGeom>
+          <a:noFill/>
+        </p:spPr>
+        <p:txBody>
+          <a:bodyPr wrap="square" anchor="t" lIns="0" rIns="0" tIns="0" bIns="0">
+            <a:spAutoFit/>
+          </a:bodyPr>
+          <a:lstStyle/>
+          <a:p>
+            <a:pPr algn="r">
+              <a:spcAft>
+                <a:spcPts val="400"/>
+              </a:spcAft>
+            </a:pPr>
+            <a:r>
+              <a:rPr sz="1650" b="1" i="0">
+                <a:solidFill>
+                  <a:srgbClr val="5BD37E"/>
+                </a:solidFill>
+                <a:latin typeface="Arial"/>
+              </a:rPr>
+              <a:t>REAL if both pass</a:t>
+            </a:r>
+          </a:p>
+        </p:txBody>
+      </p:sp>
+      <p:sp>
+        <p:nvSpPr>
+          <p:cNvPr id="20" name="TextBox 19"/>
+          <p:cNvSpPr txBox="1"/>
+          <p:nvPr/>
+        </p:nvSpPr>
+        <p:spPr>
+          <a:xfrm>
+            <a:off x="8572500" y="5048250"/>
+            <a:ext cx="2857500" cy="228600"/>
+          </a:xfrm>
+          <a:prstGeom prst="rect">
+            <a:avLst/>
+          </a:prstGeom>
+          <a:noFill/>
+        </p:spPr>
+        <p:txBody>
+          <a:bodyPr wrap="square" anchor="t" lIns="0" rIns="0" tIns="0" bIns="0">
+            <a:spAutoFit/>
+          </a:bodyPr>
+          <a:lstStyle/>
+          <a:p>
+            <a:pPr algn="r">
+              <a:spcAft>
+                <a:spcPts val="400"/>
+              </a:spcAft>
+            </a:pPr>
+            <a:r>
+              <a:rPr sz="1125" b="0" i="0">
+                <a:solidFill>
+                  <a:srgbClr val="C9D1DE"/>
+                </a:solidFill>
+                <a:latin typeface="Arial"/>
+              </a:rPr>
+              <a:t>Both cues must be valid</a:t>
+            </a:r>
+          </a:p>
+        </p:txBody>
+      </p:sp>
+      <p:sp>
+        <p:nvSpPr>
+          <p:cNvPr id="21" name="Rounded Rectangle 20"/>
+          <p:cNvSpPr/>
+          <p:nvPr/>
+        </p:nvSpPr>
+        <p:spPr>
+          <a:xfrm>
+            <a:off x="533400" y="5715000"/>
+            <a:ext cx="5397246" cy="304800"/>
+          </a:xfrm>
+          <a:prstGeom prst="roundRect">
+            <a:avLst>
+              <a:gd name="adj" fmla="val 50000"/>
+            </a:avLst>
+          </a:prstGeom>
+          <a:solidFill>
+            <a:srgbClr val="F5F7FA"/>
+          </a:solidFill>
+          <a:ln w="9525">
+            <a:solidFill>
+              <a:srgbClr val="E3E6EB"/>
+            </a:solidFill>
+          </a:ln>
+          <a:effectLst/>
+        </p:spPr>
+        <p:style>
+          <a:lnRef idx="1">
+            <a:schemeClr val="accent1"/>
+          </a:lnRef>
+          <a:fillRef idx="3">
+            <a:schemeClr val="accent1"/>
+          </a:fillRef>
+          <a:effectRef idx="2">
+            <a:schemeClr val="accent1"/>
+          </a:effectRef>
+          <a:fontRef idx="minor">
+            <a:schemeClr val="lt1"/>
+          </a:fontRef>
+        </p:style>
+        <p:txBody>
+          <a:bodyPr rtlCol="0" anchor="ctr"/>
+          <a:lstStyle/>
+          <a:p>
+            <a:pPr algn="ctr"/>
+          </a:p>
+        </p:txBody>
+      </p:sp>
+      <p:sp>
+        <p:nvSpPr>
+          <p:cNvPr id="22" name="TextBox 21"/>
+          <p:cNvSpPr txBox="1"/>
+          <p:nvPr/>
+        </p:nvSpPr>
+        <p:spPr>
+          <a:xfrm>
+            <a:off x="533400" y="5715000"/>
+            <a:ext cx="5397246" cy="304800"/>
+          </a:xfrm>
+          <a:prstGeom prst="rect">
+            <a:avLst/>
+          </a:prstGeom>
+          <a:noFill/>
+        </p:spPr>
+        <p:txBody>
+          <a:bodyPr wrap="square" anchor="ctr" lIns="0" rIns="0" tIns="0" bIns="0">
+            <a:spAutoFit/>
+          </a:bodyPr>
+          <a:lstStyle/>
+          <a:p>
+            <a:pPr algn="ctr">
+              <a:spcAft>
+                <a:spcPts val="0"/>
+              </a:spcAft>
+            </a:pPr>
+            <a:r>
+              <a:rPr sz="1200" b="0" i="0">
+                <a:solidFill>
+                  <a:srgbClr val="1D2433"/>
+                </a:solidFill>
+                <a:latin typeface="Arial"/>
+              </a:rPr>
+              <a:t>A printed decoy is </a:t>
+            </a:r>
+            <a:r>
+              <a:rPr sz="1200" b="1" i="0">
+                <a:solidFill>
+                  <a:srgbClr val="1F6FB4"/>
+                </a:solidFill>
+                <a:latin typeface="Arial"/>
+              </a:rPr>
+              <a:t>small</a:t>
+            </a:r>
+            <a:r>
+              <a:rPr sz="1200" b="0" i="0">
+                <a:solidFill>
+                  <a:srgbClr val="1D2433"/>
+                </a:solidFill>
+                <a:latin typeface="Arial"/>
+              </a:rPr>
+              <a:t> in metres and sits </a:t>
+            </a:r>
+            <a:r>
+              <a:rPr sz="1200" b="1" i="0">
+                <a:solidFill>
+                  <a:srgbClr val="1F6FB4"/>
+                </a:solidFill>
+                <a:latin typeface="Arial"/>
+              </a:rPr>
+              <a:t>flat</a:t>
+            </a:r>
+            <a:r>
+              <a:rPr sz="1200" b="0" i="0">
+                <a:solidFill>
+                  <a:srgbClr val="1D2433"/>
+                </a:solidFill>
+                <a:latin typeface="Arial"/>
+              </a:rPr>
+              <a:t> on its background</a:t>
+            </a:r>
+          </a:p>
+        </p:txBody>
+      </p:sp>
+    </p:spTree>
+  </p:cSld>
+  <p:clrMapOvr>
+    <a:masterClrMapping/>
+  </p:clrMapOvr>
+</p:sld>
+</file>
+
+<file path=ppt/slides/slide18.xml><?xml version="1.0" encoding="utf-8"?>
+<p:sld xmlns:a="http://schemas.openxmlformats.org/drawingml/2006/main" xmlns:p="http://schemas.openxmlformats.org/presentationml/2006/main" xmlns:r="http://schemas.openxmlformats.org/officeDocument/2006/relationships">
+  <p:cSld>
+    <p:bg>
+      <p:bgPr>
+        <a:solidFill>
+          <a:srgbClr val="FFFFFF"/>
+        </a:solidFill>
+        <a:effectLst/>
+      </p:bgPr>
+    </p:bg>
+    <p:spTree>
+      <p:nvGrpSpPr>
+        <p:cNvPr id="1" name=""/>
+        <p:cNvGrpSpPr/>
+        <p:nvPr/>
+      </p:nvGrpSpPr>
+      <p:grpSpPr/>
+      <p:sp>
+        <p:nvSpPr>
+          <p:cNvPr id="2" name="TextBox 1"/>
+          <p:cNvSpPr txBox="1"/>
+          <p:nvPr/>
+        </p:nvSpPr>
+        <p:spPr>
+          <a:xfrm>
+            <a:off x="533400" y="381000"/>
+            <a:ext cx="7620000" cy="190500"/>
+          </a:xfrm>
+          <a:prstGeom prst="rect">
+            <a:avLst/>
+          </a:prstGeom>
+          <a:noFill/>
+        </p:spPr>
+        <p:txBody>
+          <a:bodyPr wrap="square" anchor="t" lIns="0" rIns="0" tIns="0" bIns="0">
+            <a:spAutoFit/>
+          </a:bodyPr>
+          <a:lstStyle/>
+          <a:p>
+            <a:pPr algn="l">
+              <a:spcAft>
+                <a:spcPts val="400"/>
+              </a:spcAft>
+            </a:pPr>
+            <a:r>
+              <a:rPr sz="1125" b="1" i="0">
+                <a:solidFill>
+                  <a:srgbClr val="C0392B"/>
+                </a:solidFill>
+                <a:latin typeface="Arial"/>
+              </a:rPr>
+              <a:t>TASK 2 · REAL VS DECOY · 2 / 3</a:t>
+            </a:r>
+          </a:p>
+        </p:txBody>
+      </p:sp>
+      <p:sp>
+        <p:nvSpPr>
+          <p:cNvPr id="3" name="TextBox 2"/>
+          <p:cNvSpPr txBox="1"/>
+          <p:nvPr/>
+        </p:nvSpPr>
+        <p:spPr>
+          <a:xfrm>
+            <a:off x="6896100" y="381000"/>
+            <a:ext cx="4762500" cy="190500"/>
+          </a:xfrm>
+          <a:prstGeom prst="rect">
+            <a:avLst/>
+          </a:prstGeom>
+          <a:noFill/>
+        </p:spPr>
+        <p:txBody>
+          <a:bodyPr wrap="square" anchor="t" lIns="0" rIns="0" tIns="0" bIns="0">
+            <a:spAutoFit/>
+          </a:bodyPr>
+          <a:lstStyle/>
+          <a:p>
+            <a:pPr algn="r">
+              <a:spcAft>
+                <a:spcPts val="400"/>
+              </a:spcAft>
+            </a:pPr>
+            <a:r>
+              <a:rPr sz="1125" b="0" i="0">
+                <a:solidFill>
+                  <a:srgbClr val="5B6475"/>
+                </a:solidFill>
+                <a:latin typeface="Arial"/>
+              </a:rPr>
+              <a:t>Shravani Kuchi</a:t>
+            </a:r>
+          </a:p>
+        </p:txBody>
+      </p:sp>
+      <p:sp>
+        <p:nvSpPr>
+          <p:cNvPr id="4" name="TextBox 3"/>
+          <p:cNvSpPr txBox="1"/>
+          <p:nvPr/>
+        </p:nvSpPr>
+        <p:spPr>
+          <a:xfrm>
+            <a:off x="533400" y="590550"/>
+            <a:ext cx="11125200" cy="419100"/>
+          </a:xfrm>
+          <a:prstGeom prst="rect">
+            <a:avLst/>
+          </a:prstGeom>
+          <a:noFill/>
+        </p:spPr>
+        <p:txBody>
+          <a:bodyPr wrap="square" anchor="t" lIns="0" rIns="0" tIns="0" bIns="0">
+            <a:spAutoFit/>
+          </a:bodyPr>
+          <a:lstStyle/>
+          <a:p>
+            <a:pPr algn="l">
+              <a:spcAft>
+                <a:spcPts val="400"/>
+              </a:spcAft>
+            </a:pPr>
+            <a:r>
+              <a:rPr sz="2550" b="1" i="0">
+                <a:solidFill>
+                  <a:srgbClr val="1D2433"/>
+                </a:solidFill>
+                <a:latin typeface="Arial"/>
+              </a:rPr>
+              <a:t>Threshold selection on eval, checked on held-out blocks</a:t>
+            </a:r>
+          </a:p>
+        </p:txBody>
+      </p:sp>
+      <p:sp>
+        <p:nvSpPr>
+          <p:cNvPr id="5" name="Rounded Rectangle 4"/>
+          <p:cNvSpPr/>
+          <p:nvPr/>
+        </p:nvSpPr>
+        <p:spPr>
+          <a:xfrm>
+            <a:off x="533400" y="1104900"/>
+            <a:ext cx="2571750" cy="762000"/>
+          </a:xfrm>
+          <a:prstGeom prst="roundRect">
+            <a:avLst>
+              <a:gd name="adj" fmla="val 10000"/>
+            </a:avLst>
+          </a:prstGeom>
+          <a:solidFill>
+            <a:srgbClr val="F5F7FA"/>
+          </a:solidFill>
+          <a:ln w="9525">
+            <a:solidFill>
+              <a:srgbClr val="E3E6EB"/>
+            </a:solidFill>
+          </a:ln>
+          <a:effectLst/>
+        </p:spPr>
+        <p:style>
+          <a:lnRef idx="1">
+            <a:schemeClr val="accent1"/>
+          </a:lnRef>
+          <a:fillRef idx="3">
+            <a:schemeClr val="accent1"/>
+          </a:fillRef>
+          <a:effectRef idx="2">
+            <a:schemeClr val="accent1"/>
+          </a:effectRef>
+          <a:fontRef idx="minor">
+            <a:schemeClr val="lt1"/>
+          </a:fontRef>
+        </p:style>
+        <p:txBody>
+          <a:bodyPr rtlCol="0" anchor="ctr"/>
+          <a:lstStyle/>
+          <a:p>
+            <a:pPr algn="ctr"/>
+          </a:p>
+        </p:txBody>
+      </p:sp>
+      <p:sp>
+        <p:nvSpPr>
+          <p:cNvPr id="6" name="Rectangle 5"/>
+          <p:cNvSpPr/>
+          <p:nvPr/>
+        </p:nvSpPr>
+        <p:spPr>
+          <a:xfrm>
+            <a:off x="542925" y="1104900"/>
+            <a:ext cx="2552700" cy="38100"/>
+          </a:xfrm>
+          <a:prstGeom prst="rect">
+            <a:avLst/>
+          </a:prstGeom>
+          <a:solidFill>
+            <a:srgbClr val="E8871E"/>
+          </a:solidFill>
+          <a:ln>
+            <a:noFill/>
+          </a:ln>
+          <a:effectLst/>
+        </p:spPr>
+        <p:style>
+          <a:lnRef idx="1">
+            <a:schemeClr val="accent1"/>
+          </a:lnRef>
+          <a:fillRef idx="3">
+            <a:schemeClr val="accent1"/>
+          </a:fillRef>
+          <a:effectRef idx="2">
+            <a:schemeClr val="accent1"/>
+          </a:effectRef>
+          <a:fontRef idx="minor">
+            <a:schemeClr val="lt1"/>
+          </a:fontRef>
+        </p:style>
+        <p:txBody>
+          <a:bodyPr rtlCol="0" anchor="ctr"/>
+          <a:lstStyle/>
+          <a:p>
+            <a:pPr algn="ctr"/>
+          </a:p>
+        </p:txBody>
+      </p:sp>
+      <p:sp>
+        <p:nvSpPr>
+          <p:cNvPr id="7" name="TextBox 6"/>
+          <p:cNvSpPr txBox="1"/>
+          <p:nvPr/>
+        </p:nvSpPr>
+        <p:spPr>
+          <a:xfrm>
+            <a:off x="647700" y="1200150"/>
+            <a:ext cx="2343150" cy="209550"/>
+          </a:xfrm>
+          <a:prstGeom prst="rect">
+            <a:avLst/>
+          </a:prstGeom>
+          <a:noFill/>
+        </p:spPr>
+        <p:txBody>
+          <a:bodyPr wrap="square" anchor="t" lIns="0" rIns="0" tIns="0" bIns="0">
+            <a:spAutoFit/>
+          </a:bodyPr>
+          <a:lstStyle/>
+          <a:p>
+            <a:pPr algn="l">
+              <a:spcAft>
+                <a:spcPts val="400"/>
+              </a:spcAft>
+            </a:pPr>
+            <a:r>
+              <a:rPr sz="1200" b="1" i="0">
+                <a:solidFill>
+                  <a:srgbClr val="E8871E"/>
+                </a:solidFill>
+                <a:latin typeface="Arial"/>
+              </a:rPr>
+              <a:t>01 </a:t>
+            </a:r>
+            <a:r>
+              <a:rPr sz="1200" b="1" i="0">
+                <a:solidFill>
+                  <a:srgbClr val="1D2433"/>
+                </a:solidFill>
+                <a:latin typeface="Arial"/>
+              </a:rPr>
+              <a:t>Reference match</a:t>
+            </a:r>
+          </a:p>
+        </p:txBody>
+      </p:sp>
+      <p:sp>
+        <p:nvSpPr>
+          <p:cNvPr id="8" name="TextBox 7"/>
+          <p:cNvSpPr txBox="1"/>
+          <p:nvPr/>
+        </p:nvSpPr>
+        <p:spPr>
+          <a:xfrm>
+            <a:off x="647700" y="1447800"/>
+            <a:ext cx="2343150" cy="381000"/>
+          </a:xfrm>
+          <a:prstGeom prst="rect">
+            <a:avLst/>
+          </a:prstGeom>
+          <a:noFill/>
+        </p:spPr>
+        <p:txBody>
+          <a:bodyPr wrap="square" anchor="t" lIns="0" rIns="0" tIns="0" bIns="0">
+            <a:spAutoFit/>
+          </a:bodyPr>
+          <a:lstStyle/>
+          <a:p>
+            <a:pPr algn="l">
+              <a:spcAft>
+                <a:spcPts val="0"/>
+              </a:spcAft>
+            </a:pPr>
+            <a:r>
+              <a:rPr sz="1050" b="0" i="0">
+                <a:solidFill>
+                  <a:srgbClr val="5B6475"/>
+                </a:solidFill>
+                <a:latin typeface="Arial"/>
+              </a:rPr>
+              <a:t>box centre inside a reference box</a:t>
+            </a:r>
+          </a:p>
+        </p:txBody>
+      </p:sp>
+      <p:cxnSp>
+        <p:nvCxnSpPr>
+          <p:cNvPr id="9" name="Connector 8"/>
+          <p:cNvCxnSpPr/>
+          <p:nvPr/>
+        </p:nvCxnSpPr>
+        <p:spPr>
+          <a:xfrm>
+            <a:off x="3143250" y="1485900"/>
+            <a:ext cx="180975" cy="0"/>
+          </a:xfrm>
+          <a:prstGeom prst="line">
+            <a:avLst/>
+          </a:prstGeom>
+          <a:ln w="14287">
+            <a:solidFill>
+              <a:srgbClr val="5B6475"/>
+            </a:solidFill>
+            <a:tailEnd type="triangle" w="med" len="med"/>
+          </a:ln>
+        </p:spPr>
+      </p:cxnSp>
+      <p:sp>
+        <p:nvSpPr>
+          <p:cNvPr id="10" name="Rounded Rectangle 9"/>
+          <p:cNvSpPr/>
+          <p:nvPr/>
+        </p:nvSpPr>
+        <p:spPr>
+          <a:xfrm>
+            <a:off x="3362325" y="1104900"/>
+            <a:ext cx="2571750" cy="762000"/>
+          </a:xfrm>
+          <a:prstGeom prst="roundRect">
+            <a:avLst>
+              <a:gd name="adj" fmla="val 10000"/>
+            </a:avLst>
+          </a:prstGeom>
+          <a:solidFill>
+            <a:srgbClr val="F5F7FA"/>
+          </a:solidFill>
+          <a:ln w="9525">
+            <a:solidFill>
+              <a:srgbClr val="E3E6EB"/>
+            </a:solidFill>
+          </a:ln>
+          <a:effectLst/>
+        </p:spPr>
+        <p:style>
+          <a:lnRef idx="1">
+            <a:schemeClr val="accent1"/>
+          </a:lnRef>
+          <a:fillRef idx="3">
+            <a:schemeClr val="accent1"/>
+          </a:fillRef>
+          <a:effectRef idx="2">
+            <a:schemeClr val="accent1"/>
+          </a:effectRef>
+          <a:fontRef idx="minor">
+            <a:schemeClr val="lt1"/>
+          </a:fontRef>
+        </p:style>
+        <p:txBody>
+          <a:bodyPr rtlCol="0" anchor="ctr"/>
+          <a:lstStyle/>
+          <a:p>
+            <a:pPr algn="ctr"/>
+          </a:p>
+        </p:txBody>
+      </p:sp>
+      <p:sp>
+        <p:nvSpPr>
+          <p:cNvPr id="11" name="Rectangle 10"/>
+          <p:cNvSpPr/>
+          <p:nvPr/>
+        </p:nvSpPr>
+        <p:spPr>
+          <a:xfrm>
+            <a:off x="3371850" y="1104900"/>
+            <a:ext cx="2552700" cy="38100"/>
+          </a:xfrm>
+          <a:prstGeom prst="rect">
+            <a:avLst/>
+          </a:prstGeom>
+          <a:solidFill>
+            <a:srgbClr val="E8871E"/>
+          </a:solidFill>
+          <a:ln>
+            <a:noFill/>
+          </a:ln>
+          <a:effectLst/>
+        </p:spPr>
+        <p:style>
+          <a:lnRef idx="1">
+            <a:schemeClr val="accent1"/>
+          </a:lnRef>
+          <a:fillRef idx="3">
+            <a:schemeClr val="accent1"/>
+          </a:fillRef>
+          <a:effectRef idx="2">
+            <a:schemeClr val="accent1"/>
+          </a:effectRef>
+          <a:fontRef idx="minor">
+            <a:schemeClr val="lt1"/>
+          </a:fontRef>
+        </p:style>
+        <p:txBody>
+          <a:bodyPr rtlCol="0" anchor="ctr"/>
+          <a:lstStyle/>
+          <a:p>
+            <a:pPr algn="ctr"/>
+          </a:p>
+        </p:txBody>
+      </p:sp>
+      <p:sp>
+        <p:nvSpPr>
+          <p:cNvPr id="12" name="TextBox 11"/>
+          <p:cNvSpPr txBox="1"/>
+          <p:nvPr/>
+        </p:nvSpPr>
+        <p:spPr>
+          <a:xfrm>
+            <a:off x="3476625" y="1200150"/>
+            <a:ext cx="2343150" cy="209550"/>
+          </a:xfrm>
+          <a:prstGeom prst="rect">
+            <a:avLst/>
+          </a:prstGeom>
+          <a:noFill/>
+        </p:spPr>
+        <p:txBody>
+          <a:bodyPr wrap="square" anchor="t" lIns="0" rIns="0" tIns="0" bIns="0">
+            <a:spAutoFit/>
+          </a:bodyPr>
+          <a:lstStyle/>
+          <a:p>
+            <a:pPr algn="l">
+              <a:spcAft>
+                <a:spcPts val="400"/>
+              </a:spcAft>
+            </a:pPr>
+            <a:r>
+              <a:rPr sz="1200" b="1" i="0">
+                <a:solidFill>
+                  <a:srgbClr val="E8871E"/>
+                </a:solidFill>
+                <a:latin typeface="Arial"/>
+              </a:rPr>
+              <a:t>02 </a:t>
+            </a:r>
+            <a:r>
+              <a:rPr sz="1200" b="1" i="0">
+                <a:solidFill>
+                  <a:srgbClr val="1D2433"/>
+                </a:solidFill>
+                <a:latin typeface="Arial"/>
+              </a:rPr>
+              <a:t>Three time blocks</a:t>
+            </a:r>
+          </a:p>
+        </p:txBody>
+      </p:sp>
+      <p:sp>
+        <p:nvSpPr>
+          <p:cNvPr id="13" name="TextBox 12"/>
+          <p:cNvSpPr txBox="1"/>
+          <p:nvPr/>
+        </p:nvSpPr>
+        <p:spPr>
+          <a:xfrm>
+            <a:off x="3476625" y="1447800"/>
+            <a:ext cx="2343150" cy="381000"/>
+          </a:xfrm>
+          <a:prstGeom prst="rect">
+            <a:avLst/>
+          </a:prstGeom>
+          <a:noFill/>
+        </p:spPr>
+        <p:txBody>
+          <a:bodyPr wrap="square" anchor="t" lIns="0" rIns="0" tIns="0" bIns="0">
+            <a:spAutoFit/>
+          </a:bodyPr>
+          <a:lstStyle/>
+          <a:p>
+            <a:pPr algn="l">
+              <a:spcAft>
+                <a:spcPts val="0"/>
+              </a:spcAft>
+            </a:pPr>
+            <a:r>
+              <a:rPr sz="1050" b="0" i="0">
+                <a:solidFill>
+                  <a:srgbClr val="5B6475"/>
+                </a:solidFill>
+                <a:latin typeface="Arial"/>
+              </a:rPr>
+              <a:t>fit on two, check the held-out one</a:t>
+            </a:r>
+          </a:p>
+        </p:txBody>
+      </p:sp>
+      <p:cxnSp>
+        <p:nvCxnSpPr>
+          <p:cNvPr id="14" name="Connector 13"/>
+          <p:cNvCxnSpPr/>
+          <p:nvPr/>
+        </p:nvCxnSpPr>
+        <p:spPr>
+          <a:xfrm>
+            <a:off x="5972175" y="1485900"/>
+            <a:ext cx="180975" cy="0"/>
+          </a:xfrm>
+          <a:prstGeom prst="line">
+            <a:avLst/>
+          </a:prstGeom>
+          <a:ln w="14287">
+            <a:solidFill>
+              <a:srgbClr val="5B6475"/>
+            </a:solidFill>
+            <a:tailEnd type="triangle" w="med" len="med"/>
+          </a:ln>
+        </p:spPr>
+      </p:cxnSp>
+      <p:sp>
+        <p:nvSpPr>
+          <p:cNvPr id="15" name="Rounded Rectangle 14"/>
+          <p:cNvSpPr/>
+          <p:nvPr/>
+        </p:nvSpPr>
+        <p:spPr>
+          <a:xfrm>
+            <a:off x="6191250" y="1104900"/>
+            <a:ext cx="2571750" cy="762000"/>
+          </a:xfrm>
+          <a:prstGeom prst="roundRect">
+            <a:avLst>
+              <a:gd name="adj" fmla="val 10000"/>
+            </a:avLst>
+          </a:prstGeom>
+          <a:solidFill>
+            <a:srgbClr val="F5F7FA"/>
+          </a:solidFill>
+          <a:ln w="9525">
+            <a:solidFill>
+              <a:srgbClr val="E3E6EB"/>
+            </a:solidFill>
+          </a:ln>
+          <a:effectLst/>
+        </p:spPr>
+        <p:style>
+          <a:lnRef idx="1">
+            <a:schemeClr val="accent1"/>
+          </a:lnRef>
+          <a:fillRef idx="3">
+            <a:schemeClr val="accent1"/>
+          </a:fillRef>
+          <a:effectRef idx="2">
+            <a:schemeClr val="accent1"/>
+          </a:effectRef>
+          <a:fontRef idx="minor">
+            <a:schemeClr val="lt1"/>
+          </a:fontRef>
+        </p:style>
+        <p:txBody>
+          <a:bodyPr rtlCol="0" anchor="ctr"/>
+          <a:lstStyle/>
+          <a:p>
+            <a:pPr algn="ctr"/>
+          </a:p>
+        </p:txBody>
+      </p:sp>
+      <p:sp>
+        <p:nvSpPr>
+          <p:cNvPr id="16" name="Rectangle 15"/>
+          <p:cNvSpPr/>
+          <p:nvPr/>
+        </p:nvSpPr>
+        <p:spPr>
+          <a:xfrm>
+            <a:off x="6200775" y="1104900"/>
+            <a:ext cx="2552700" cy="38100"/>
+          </a:xfrm>
+          <a:prstGeom prst="rect">
+            <a:avLst/>
+          </a:prstGeom>
+          <a:solidFill>
+            <a:srgbClr val="E8871E"/>
+          </a:solidFill>
+          <a:ln>
+            <a:noFill/>
+          </a:ln>
+          <a:effectLst/>
+        </p:spPr>
+        <p:style>
+          <a:lnRef idx="1">
+            <a:schemeClr val="accent1"/>
+          </a:lnRef>
+          <a:fillRef idx="3">
+            <a:schemeClr val="accent1"/>
+          </a:fillRef>
+          <a:effectRef idx="2">
+            <a:schemeClr val="accent1"/>
+          </a:effectRef>
+          <a:fontRef idx="minor">
+            <a:schemeClr val="lt1"/>
+          </a:fontRef>
+        </p:style>
+        <p:txBody>
+          <a:bodyPr rtlCol="0" anchor="ctr"/>
+          <a:lstStyle/>
+          <a:p>
+            <a:pPr algn="ctr"/>
+          </a:p>
+        </p:txBody>
+      </p:sp>
+      <p:sp>
+        <p:nvSpPr>
+          <p:cNvPr id="17" name="TextBox 16"/>
+          <p:cNvSpPr txBox="1"/>
+          <p:nvPr/>
+        </p:nvSpPr>
+        <p:spPr>
+          <a:xfrm>
+            <a:off x="6305550" y="1200150"/>
+            <a:ext cx="2343150" cy="209550"/>
+          </a:xfrm>
+          <a:prstGeom prst="rect">
+            <a:avLst/>
+          </a:prstGeom>
+          <a:noFill/>
+        </p:spPr>
+        <p:txBody>
+          <a:bodyPr wrap="square" anchor="t" lIns="0" rIns="0" tIns="0" bIns="0">
+            <a:spAutoFit/>
+          </a:bodyPr>
+          <a:lstStyle/>
+          <a:p>
+            <a:pPr algn="l">
+              <a:spcAft>
+                <a:spcPts val="400"/>
+              </a:spcAft>
+            </a:pPr>
+            <a:r>
+              <a:rPr sz="1200" b="1" i="0">
+                <a:solidFill>
+                  <a:srgbClr val="E8871E"/>
+                </a:solidFill>
+                <a:latin typeface="Arial"/>
+              </a:rPr>
+              <a:t>03 </a:t>
+            </a:r>
+            <a:r>
+              <a:rPr sz="1200" b="1" i="0">
+                <a:solidFill>
+                  <a:srgbClr val="1D2433"/>
+                </a:solidFill>
+                <a:latin typeface="Arial"/>
+              </a:rPr>
+              <a:t>Threshold search</a:t>
+            </a:r>
+          </a:p>
+        </p:txBody>
+      </p:sp>
+      <p:sp>
+        <p:nvSpPr>
+          <p:cNvPr id="18" name="TextBox 17"/>
+          <p:cNvSpPr txBox="1"/>
+          <p:nvPr/>
+        </p:nvSpPr>
+        <p:spPr>
+          <a:xfrm>
+            <a:off x="6305550" y="1447800"/>
+            <a:ext cx="2343150" cy="381000"/>
+          </a:xfrm>
+          <a:prstGeom prst="rect">
+            <a:avLst/>
+          </a:prstGeom>
+          <a:noFill/>
+        </p:spPr>
+        <p:txBody>
+          <a:bodyPr wrap="square" anchor="t" lIns="0" rIns="0" tIns="0" bIns="0">
+            <a:spAutoFit/>
+          </a:bodyPr>
+          <a:lstStyle/>
+          <a:p>
+            <a:pPr algn="l">
+              <a:spcAft>
+                <a:spcPts val="0"/>
+              </a:spcAft>
+            </a:pPr>
+            <a:r>
+              <a:rPr sz="1050" b="0" i="0">
+                <a:solidFill>
+                  <a:srgbClr val="5B6475"/>
+                </a:solidFill>
+                <a:latin typeface="Arial"/>
+              </a:rPr>
+              <a:t>real TPR ≥ 0.75, then fewest decoys</a:t>
+            </a:r>
+          </a:p>
+        </p:txBody>
+      </p:sp>
+      <p:cxnSp>
+        <p:nvCxnSpPr>
+          <p:cNvPr id="19" name="Connector 18"/>
+          <p:cNvCxnSpPr/>
+          <p:nvPr/>
+        </p:nvCxnSpPr>
+        <p:spPr>
+          <a:xfrm>
+            <a:off x="8801100" y="1485900"/>
+            <a:ext cx="180975" cy="0"/>
+          </a:xfrm>
+          <a:prstGeom prst="line">
+            <a:avLst/>
+          </a:prstGeom>
+          <a:ln w="14287">
+            <a:solidFill>
+              <a:srgbClr val="5B6475"/>
+            </a:solidFill>
+            <a:tailEnd type="triangle" w="med" len="med"/>
+          </a:ln>
+        </p:spPr>
+      </p:cxnSp>
+      <p:sp>
+        <p:nvSpPr>
+          <p:cNvPr id="20" name="Rounded Rectangle 19"/>
+          <p:cNvSpPr/>
+          <p:nvPr/>
+        </p:nvSpPr>
+        <p:spPr>
+          <a:xfrm>
+            <a:off x="9020175" y="1104900"/>
+            <a:ext cx="2571750" cy="762000"/>
+          </a:xfrm>
+          <a:prstGeom prst="roundRect">
+            <a:avLst>
+              <a:gd name="adj" fmla="val 10000"/>
+            </a:avLst>
+          </a:prstGeom>
+          <a:solidFill>
+            <a:srgbClr val="F5F7FA"/>
+          </a:solidFill>
+          <a:ln w="9525">
+            <a:solidFill>
+              <a:srgbClr val="E3E6EB"/>
+            </a:solidFill>
+          </a:ln>
+          <a:effectLst/>
+        </p:spPr>
+        <p:style>
+          <a:lnRef idx="1">
+            <a:schemeClr val="accent1"/>
+          </a:lnRef>
+          <a:fillRef idx="3">
+            <a:schemeClr val="accent1"/>
+          </a:fillRef>
+          <a:effectRef idx="2">
+            <a:schemeClr val="accent1"/>
+          </a:effectRef>
+          <a:fontRef idx="minor">
+            <a:schemeClr val="lt1"/>
+          </a:fontRef>
+        </p:style>
+        <p:txBody>
+          <a:bodyPr rtlCol="0" anchor="ctr"/>
+          <a:lstStyle/>
+          <a:p>
+            <a:pPr algn="ctr"/>
+          </a:p>
+        </p:txBody>
+      </p:sp>
+      <p:sp>
+        <p:nvSpPr>
+          <p:cNvPr id="21" name="Rectangle 20"/>
+          <p:cNvSpPr/>
+          <p:nvPr/>
+        </p:nvSpPr>
+        <p:spPr>
+          <a:xfrm>
+            <a:off x="9029700" y="1104900"/>
+            <a:ext cx="2552700" cy="38100"/>
+          </a:xfrm>
+          <a:prstGeom prst="rect">
+            <a:avLst/>
+          </a:prstGeom>
+          <a:solidFill>
+            <a:srgbClr val="E8871E"/>
+          </a:solidFill>
+          <a:ln>
+            <a:noFill/>
+          </a:ln>
+          <a:effectLst/>
+        </p:spPr>
+        <p:style>
+          <a:lnRef idx="1">
+            <a:schemeClr val="accent1"/>
+          </a:lnRef>
+          <a:fillRef idx="3">
+            <a:schemeClr val="accent1"/>
+          </a:fillRef>
+          <a:effectRef idx="2">
+            <a:schemeClr val="accent1"/>
+          </a:effectRef>
+          <a:fontRef idx="minor">
+            <a:schemeClr val="lt1"/>
+          </a:fontRef>
+        </p:style>
+        <p:txBody>
+          <a:bodyPr rtlCol="0" anchor="ctr"/>
+          <a:lstStyle/>
+          <a:p>
+            <a:pPr algn="ctr"/>
+          </a:p>
+        </p:txBody>
+      </p:sp>
+      <p:sp>
+        <p:nvSpPr>
+          <p:cNvPr id="22" name="TextBox 21"/>
+          <p:cNvSpPr txBox="1"/>
+          <p:nvPr/>
+        </p:nvSpPr>
+        <p:spPr>
+          <a:xfrm>
+            <a:off x="9134475" y="1200150"/>
+            <a:ext cx="2343150" cy="209550"/>
+          </a:xfrm>
+          <a:prstGeom prst="rect">
+            <a:avLst/>
+          </a:prstGeom>
+          <a:noFill/>
+        </p:spPr>
+        <p:txBody>
+          <a:bodyPr wrap="square" anchor="t" lIns="0" rIns="0" tIns="0" bIns="0">
+            <a:spAutoFit/>
+          </a:bodyPr>
+          <a:lstStyle/>
+          <a:p>
+            <a:pPr algn="l">
+              <a:spcAft>
+                <a:spcPts val="400"/>
+              </a:spcAft>
+            </a:pPr>
+            <a:r>
+              <a:rPr sz="1200" b="1" i="0">
+                <a:solidFill>
+                  <a:srgbClr val="E8871E"/>
+                </a:solidFill>
+                <a:latin typeface="Arial"/>
+              </a:rPr>
+              <a:t>04 </a:t>
+            </a:r>
+            <a:r>
+              <a:rPr sz="1200" b="1" i="0">
+                <a:solidFill>
+                  <a:srgbClr val="1D2433"/>
+                </a:solidFill>
+                <a:latin typeface="Arial"/>
+              </a:rPr>
+              <a:t>Final eval fit</a:t>
+            </a:r>
+          </a:p>
+        </p:txBody>
+      </p:sp>
+      <p:sp>
+        <p:nvSpPr>
+          <p:cNvPr id="23" name="TextBox 22"/>
+          <p:cNvSpPr txBox="1"/>
+          <p:nvPr/>
+        </p:nvSpPr>
+        <p:spPr>
+          <a:xfrm>
+            <a:off x="9134475" y="1447800"/>
+            <a:ext cx="2343150" cy="381000"/>
+          </a:xfrm>
+          <a:prstGeom prst="rect">
+            <a:avLst/>
+          </a:prstGeom>
+          <a:noFill/>
+        </p:spPr>
+        <p:txBody>
+          <a:bodyPr wrap="square" anchor="t" lIns="0" rIns="0" tIns="0" bIns="0">
+            <a:spAutoFit/>
+          </a:bodyPr>
+          <a:lstStyle/>
+          <a:p>
+            <a:pPr algn="l">
+              <a:spcAft>
+                <a:spcPts val="0"/>
+              </a:spcAft>
+            </a:pPr>
+            <a:r>
+              <a:rPr sz="1050" b="0" i="0">
+                <a:solidFill>
+                  <a:srgbClr val="5B6475"/>
+                </a:solidFill>
+                <a:latin typeface="Arial"/>
+              </a:rPr>
+              <a:t>fit on all eval, save for test</a:t>
+            </a:r>
+          </a:p>
+        </p:txBody>
+      </p:sp>
+      <p:graphicFrame>
+        <p:nvGraphicFramePr>
+          <p:cNvPr id="24" name="Chart 23"/>
+          <p:cNvGraphicFramePr>
+            <a:graphicFrameLocks noGrp="1"/>
+          </p:cNvGraphicFramePr>
+          <p:nvPr/>
+        </p:nvGraphicFramePr>
+        <p:xfrm>
+          <a:off x="533400" y="2038350"/>
+          <a:ext cx="6096000" cy="4000500"/>
+        </p:xfrm>
+        <a:graphic>
+          <a:graphicData uri="http://schemas.openxmlformats.org/drawingml/2006/chart">
+            <c:chart xmlns:c="http://schemas.openxmlformats.org/drawingml/2006/chart" r:id="rId2"/>
+          </a:graphicData>
+        </a:graphic>
+      </p:graphicFrame>
+      <p:sp>
+        <p:nvSpPr>
+          <p:cNvPr id="25" name="TextBox 24"/>
+          <p:cNvSpPr txBox="1"/>
+          <p:nvPr/>
+        </p:nvSpPr>
+        <p:spPr>
+          <a:xfrm>
+            <a:off x="6896100" y="2038350"/>
+            <a:ext cx="4762500" cy="228600"/>
+          </a:xfrm>
+          <a:prstGeom prst="rect">
+            <a:avLst/>
+          </a:prstGeom>
+          <a:noFill/>
+        </p:spPr>
+        <p:txBody>
+          <a:bodyPr wrap="square" anchor="t" lIns="0" rIns="0" tIns="0" bIns="0">
+            <a:spAutoFit/>
+          </a:bodyPr>
+          <a:lstStyle/>
+          <a:p>
+            <a:pPr algn="l">
+              <a:spcAft>
+                <a:spcPts val="400"/>
+              </a:spcAft>
+            </a:pPr>
+            <a:r>
+              <a:rPr sz="1350" b="1" i="0">
+                <a:solidFill>
+                  <a:srgbClr val="1D2433"/>
+                </a:solidFill>
+                <a:latin typeface="Arial"/>
+              </a:rPr>
+              <a:t>Held-out check (eval)</a:t>
+            </a:r>
+          </a:p>
+        </p:txBody>
+      </p:sp>
+      <p:sp>
+        <p:nvSpPr>
+          <p:cNvPr id="26" name="TextBox 25"/>
+          <p:cNvSpPr txBox="1"/>
+          <p:nvPr/>
+        </p:nvSpPr>
+        <p:spPr>
+          <a:xfrm>
+            <a:off x="6896100" y="2286000"/>
+            <a:ext cx="4762500" cy="190500"/>
+          </a:xfrm>
+          <a:prstGeom prst="rect">
+            <a:avLst/>
+          </a:prstGeom>
+          <a:noFill/>
+        </p:spPr>
+        <p:txBody>
+          <a:bodyPr wrap="square" anchor="t" lIns="0" rIns="0" tIns="0" bIns="0">
+            <a:spAutoFit/>
+          </a:bodyPr>
+          <a:lstStyle/>
+          <a:p>
+            <a:pPr algn="l">
+              <a:spcAft>
+                <a:spcPts val="400"/>
+              </a:spcAft>
+            </a:pPr>
+            <a:r>
+              <a:rPr sz="1050" b="0" i="0">
+                <a:solidFill>
+                  <a:srgbClr val="5B6475"/>
+                </a:solidFill>
+                <a:latin typeface="Arial"/>
+              </a:rPr>
+              <a:t>Cutoffs fitted on two blocks, applied to the third</a:t>
+            </a:r>
+          </a:p>
+        </p:txBody>
+      </p:sp>
+      <p:sp>
+        <p:nvSpPr>
+          <p:cNvPr id="27" name="TextBox 26"/>
+          <p:cNvSpPr txBox="1"/>
+          <p:nvPr/>
+        </p:nvSpPr>
+        <p:spPr>
+          <a:xfrm>
+            <a:off x="6991350" y="2533650"/>
+            <a:ext cx="857250" cy="285750"/>
+          </a:xfrm>
+          <a:prstGeom prst="rect">
+            <a:avLst/>
+          </a:prstGeom>
+          <a:noFill/>
+        </p:spPr>
+        <p:txBody>
+          <a:bodyPr wrap="square" anchor="ctr" lIns="0" rIns="0" tIns="0" bIns="0">
+            <a:spAutoFit/>
+          </a:bodyPr>
+          <a:lstStyle/>
+          <a:p>
+            <a:pPr algn="l">
+              <a:spcAft>
+                <a:spcPts val="0"/>
+              </a:spcAft>
+            </a:pPr>
+            <a:r>
+              <a:rPr sz="1050" b="0" i="0">
+                <a:solidFill>
+                  <a:srgbClr val="5B6475"/>
+                </a:solidFill>
+                <a:latin typeface="Arial"/>
+              </a:rPr>
+              <a:t>Block</a:t>
+            </a:r>
+          </a:p>
+        </p:txBody>
+      </p:sp>
+      <p:sp>
+        <p:nvSpPr>
+          <p:cNvPr id="28" name="TextBox 27"/>
+          <p:cNvSpPr txBox="1"/>
+          <p:nvPr/>
+        </p:nvSpPr>
+        <p:spPr>
+          <a:xfrm>
+            <a:off x="8039100" y="2533650"/>
+            <a:ext cx="1666875" cy="285750"/>
+          </a:xfrm>
+          <a:prstGeom prst="rect">
+            <a:avLst/>
+          </a:prstGeom>
+          <a:noFill/>
+        </p:spPr>
+        <p:txBody>
+          <a:bodyPr wrap="square" anchor="ctr" lIns="0" rIns="0" tIns="0" bIns="0">
+            <a:spAutoFit/>
+          </a:bodyPr>
+          <a:lstStyle/>
+          <a:p>
+            <a:pPr algn="r">
+              <a:spcAft>
+                <a:spcPts val="0"/>
+              </a:spcAft>
+            </a:pPr>
+            <a:r>
+              <a:rPr sz="1050" b="0" i="0">
+                <a:solidFill>
+                  <a:srgbClr val="5B6475"/>
+                </a:solidFill>
+                <a:latin typeface="Arial"/>
+              </a:rPr>
+              <a:t>Real accepted</a:t>
+            </a:r>
+          </a:p>
+        </p:txBody>
+      </p:sp>
+      <p:sp>
+        <p:nvSpPr>
+          <p:cNvPr id="29" name="TextBox 28"/>
+          <p:cNvSpPr txBox="1"/>
+          <p:nvPr/>
+        </p:nvSpPr>
+        <p:spPr>
+          <a:xfrm>
+            <a:off x="9896475" y="2533650"/>
+            <a:ext cx="1666875" cy="285750"/>
+          </a:xfrm>
+          <a:prstGeom prst="rect">
+            <a:avLst/>
+          </a:prstGeom>
+          <a:noFill/>
+        </p:spPr>
+        <p:txBody>
+          <a:bodyPr wrap="square" anchor="ctr" lIns="0" rIns="0" tIns="0" bIns="0">
+            <a:spAutoFit/>
+          </a:bodyPr>
+          <a:lstStyle/>
+          <a:p>
+            <a:pPr algn="r">
+              <a:spcAft>
+                <a:spcPts val="0"/>
+              </a:spcAft>
+            </a:pPr>
+            <a:r>
+              <a:rPr sz="1050" b="0" i="0">
+                <a:solidFill>
+                  <a:srgbClr val="5B6475"/>
+                </a:solidFill>
+                <a:latin typeface="Arial"/>
+              </a:rPr>
+              <a:t>Decoys accepted</a:t>
+            </a:r>
+          </a:p>
+        </p:txBody>
+      </p:sp>
+      <p:cxnSp>
+        <p:nvCxnSpPr>
+          <p:cNvPr id="30" name="Connector 29"/>
+          <p:cNvCxnSpPr/>
+          <p:nvPr/>
+        </p:nvCxnSpPr>
+        <p:spPr>
+          <a:xfrm>
+            <a:off x="6896100" y="2819400"/>
+            <a:ext cx="4762500" cy="0"/>
+          </a:xfrm>
+          <a:prstGeom prst="line">
+            <a:avLst/>
+          </a:prstGeom>
+          <a:ln w="9525">
+            <a:solidFill>
+              <a:srgbClr val="E3E6EB"/>
+            </a:solidFill>
+          </a:ln>
+        </p:spPr>
+      </p:cxnSp>
+      <p:sp>
+        <p:nvSpPr>
+          <p:cNvPr id="31" name="TextBox 30"/>
+          <p:cNvSpPr txBox="1"/>
+          <p:nvPr/>
+        </p:nvSpPr>
+        <p:spPr>
+          <a:xfrm>
+            <a:off x="6991350" y="2819400"/>
+            <a:ext cx="857250" cy="285750"/>
+          </a:xfrm>
+          <a:prstGeom prst="rect">
+            <a:avLst/>
+          </a:prstGeom>
+          <a:noFill/>
+        </p:spPr>
+        <p:txBody>
+          <a:bodyPr wrap="square" anchor="ctr" lIns="0" rIns="0" tIns="0" bIns="0">
+            <a:spAutoFit/>
+          </a:bodyPr>
+          <a:lstStyle/>
+          <a:p>
+            <a:pPr algn="l">
+              <a:spcAft>
+                <a:spcPts val="0"/>
+              </a:spcAft>
+            </a:pPr>
+            <a:r>
+              <a:rPr sz="1200" b="0" i="0">
+                <a:solidFill>
+                  <a:srgbClr val="1D2433"/>
+                </a:solidFill>
+                <a:latin typeface="Arial"/>
+              </a:rPr>
+              <a:t>1</a:t>
+            </a:r>
+          </a:p>
+        </p:txBody>
+      </p:sp>
+      <p:sp>
+        <p:nvSpPr>
+          <p:cNvPr id="32" name="TextBox 31"/>
+          <p:cNvSpPr txBox="1"/>
+          <p:nvPr/>
+        </p:nvSpPr>
+        <p:spPr>
+          <a:xfrm>
+            <a:off x="8039100" y="2819400"/>
+            <a:ext cx="1666875" cy="285750"/>
+          </a:xfrm>
+          <a:prstGeom prst="rect">
+            <a:avLst/>
+          </a:prstGeom>
+          <a:noFill/>
+        </p:spPr>
+        <p:txBody>
+          <a:bodyPr wrap="square" anchor="ctr" lIns="0" rIns="0" tIns="0" bIns="0">
+            <a:spAutoFit/>
+          </a:bodyPr>
+          <a:lstStyle/>
+          <a:p>
+            <a:pPr algn="r">
+              <a:spcAft>
+                <a:spcPts val="0"/>
+              </a:spcAft>
+            </a:pPr>
+            <a:r>
+              <a:rPr sz="1200" b="0" i="0">
+                <a:solidFill>
+                  <a:srgbClr val="1D2433"/>
+                </a:solidFill>
+                <a:latin typeface="Arial"/>
+              </a:rPr>
+              <a:t>31 / 33</a:t>
+            </a:r>
+          </a:p>
+        </p:txBody>
+      </p:sp>
+      <p:sp>
+        <p:nvSpPr>
+          <p:cNvPr id="33" name="TextBox 32"/>
+          <p:cNvSpPr txBox="1"/>
+          <p:nvPr/>
+        </p:nvSpPr>
+        <p:spPr>
+          <a:xfrm>
+            <a:off x="9896475" y="2819400"/>
+            <a:ext cx="1666875" cy="285750"/>
+          </a:xfrm>
+          <a:prstGeom prst="rect">
+            <a:avLst/>
+          </a:prstGeom>
+          <a:noFill/>
+        </p:spPr>
+        <p:txBody>
+          <a:bodyPr wrap="square" anchor="ctr" lIns="0" rIns="0" tIns="0" bIns="0">
+            <a:spAutoFit/>
+          </a:bodyPr>
+          <a:lstStyle/>
+          <a:p>
+            <a:pPr algn="r">
+              <a:spcAft>
+                <a:spcPts val="0"/>
+              </a:spcAft>
+            </a:pPr>
+            <a:r>
+              <a:rPr sz="1200" b="0" i="0">
+                <a:solidFill>
+                  <a:srgbClr val="1D2433"/>
+                </a:solidFill>
+                <a:latin typeface="Arial"/>
+              </a:rPr>
+              <a:t>0 / 53</a:t>
+            </a:r>
+          </a:p>
+        </p:txBody>
+      </p:sp>
+      <p:cxnSp>
+        <p:nvCxnSpPr>
+          <p:cNvPr id="34" name="Connector 33"/>
+          <p:cNvCxnSpPr/>
+          <p:nvPr/>
+        </p:nvCxnSpPr>
+        <p:spPr>
+          <a:xfrm>
+            <a:off x="6896100" y="3105150"/>
+            <a:ext cx="4762500" cy="0"/>
+          </a:xfrm>
+          <a:prstGeom prst="line">
+            <a:avLst/>
+          </a:prstGeom>
+          <a:ln w="9525">
+            <a:solidFill>
+              <a:srgbClr val="E3E6EB"/>
+            </a:solidFill>
+          </a:ln>
+        </p:spPr>
+      </p:cxnSp>
+      <p:sp>
+        <p:nvSpPr>
+          <p:cNvPr id="35" name="TextBox 34"/>
+          <p:cNvSpPr txBox="1"/>
+          <p:nvPr/>
+        </p:nvSpPr>
+        <p:spPr>
+          <a:xfrm>
+            <a:off x="6991350" y="3105150"/>
+            <a:ext cx="857250" cy="285750"/>
+          </a:xfrm>
+          <a:prstGeom prst="rect">
+            <a:avLst/>
+          </a:prstGeom>
+          <a:noFill/>
+        </p:spPr>
+        <p:txBody>
+          <a:bodyPr wrap="square" anchor="ctr" lIns="0" rIns="0" tIns="0" bIns="0">
+            <a:spAutoFit/>
+          </a:bodyPr>
+          <a:lstStyle/>
+          <a:p>
+            <a:pPr algn="l">
+              <a:spcAft>
+                <a:spcPts val="0"/>
+              </a:spcAft>
+            </a:pPr>
+            <a:r>
+              <a:rPr sz="1200" b="0" i="0">
+                <a:solidFill>
+                  <a:srgbClr val="1D2433"/>
+                </a:solidFill>
+                <a:latin typeface="Arial"/>
+              </a:rPr>
+              <a:t>2</a:t>
+            </a:r>
+          </a:p>
+        </p:txBody>
+      </p:sp>
+      <p:sp>
+        <p:nvSpPr>
+          <p:cNvPr id="36" name="TextBox 35"/>
+          <p:cNvSpPr txBox="1"/>
+          <p:nvPr/>
+        </p:nvSpPr>
+        <p:spPr>
+          <a:xfrm>
+            <a:off x="8039100" y="3105150"/>
+            <a:ext cx="1666875" cy="285750"/>
+          </a:xfrm>
+          <a:prstGeom prst="rect">
+            <a:avLst/>
+          </a:prstGeom>
+          <a:noFill/>
+        </p:spPr>
+        <p:txBody>
+          <a:bodyPr wrap="square" anchor="ctr" lIns="0" rIns="0" tIns="0" bIns="0">
+            <a:spAutoFit/>
+          </a:bodyPr>
+          <a:lstStyle/>
+          <a:p>
+            <a:pPr algn="r">
+              <a:spcAft>
+                <a:spcPts val="0"/>
+              </a:spcAft>
+            </a:pPr>
+            <a:r>
+              <a:rPr sz="1200" b="0" i="0">
+                <a:solidFill>
+                  <a:srgbClr val="1D2433"/>
+                </a:solidFill>
+                <a:latin typeface="Arial"/>
+              </a:rPr>
+              <a:t>33 / 33</a:t>
+            </a:r>
+          </a:p>
+        </p:txBody>
+      </p:sp>
+      <p:sp>
+        <p:nvSpPr>
+          <p:cNvPr id="37" name="TextBox 36"/>
+          <p:cNvSpPr txBox="1"/>
+          <p:nvPr/>
+        </p:nvSpPr>
+        <p:spPr>
+          <a:xfrm>
+            <a:off x="9896475" y="3105150"/>
+            <a:ext cx="1666875" cy="285750"/>
+          </a:xfrm>
+          <a:prstGeom prst="rect">
+            <a:avLst/>
+          </a:prstGeom>
+          <a:noFill/>
+        </p:spPr>
+        <p:txBody>
+          <a:bodyPr wrap="square" anchor="ctr" lIns="0" rIns="0" tIns="0" bIns="0">
+            <a:spAutoFit/>
+          </a:bodyPr>
+          <a:lstStyle/>
+          <a:p>
+            <a:pPr algn="r">
+              <a:spcAft>
+                <a:spcPts val="0"/>
+              </a:spcAft>
+            </a:pPr>
+            <a:r>
+              <a:rPr sz="1200" b="0" i="0">
+                <a:solidFill>
+                  <a:srgbClr val="1D2433"/>
+                </a:solidFill>
+                <a:latin typeface="Arial"/>
+              </a:rPr>
+              <a:t>1 / 55</a:t>
+            </a:r>
+          </a:p>
+        </p:txBody>
+      </p:sp>
+      <p:cxnSp>
+        <p:nvCxnSpPr>
+          <p:cNvPr id="38" name="Connector 37"/>
+          <p:cNvCxnSpPr/>
+          <p:nvPr/>
+        </p:nvCxnSpPr>
+        <p:spPr>
+          <a:xfrm>
+            <a:off x="6896100" y="3390900"/>
+            <a:ext cx="4762500" cy="0"/>
+          </a:xfrm>
+          <a:prstGeom prst="line">
+            <a:avLst/>
+          </a:prstGeom>
+          <a:ln w="9525">
+            <a:solidFill>
+              <a:srgbClr val="E3E6EB"/>
+            </a:solidFill>
+          </a:ln>
+        </p:spPr>
+      </p:cxnSp>
+      <p:sp>
+        <p:nvSpPr>
+          <p:cNvPr id="39" name="TextBox 38"/>
+          <p:cNvSpPr txBox="1"/>
+          <p:nvPr/>
+        </p:nvSpPr>
+        <p:spPr>
+          <a:xfrm>
+            <a:off x="6991350" y="3390900"/>
+            <a:ext cx="857250" cy="285750"/>
+          </a:xfrm>
+          <a:prstGeom prst="rect">
+            <a:avLst/>
+          </a:prstGeom>
+          <a:noFill/>
+        </p:spPr>
+        <p:txBody>
+          <a:bodyPr wrap="square" anchor="ctr" lIns="0" rIns="0" tIns="0" bIns="0">
+            <a:spAutoFit/>
+          </a:bodyPr>
+          <a:lstStyle/>
+          <a:p>
+            <a:pPr algn="l">
+              <a:spcAft>
+                <a:spcPts val="0"/>
+              </a:spcAft>
+            </a:pPr>
+            <a:r>
+              <a:rPr sz="1200" b="0" i="0">
+                <a:solidFill>
+                  <a:srgbClr val="1D2433"/>
+                </a:solidFill>
+                <a:latin typeface="Arial"/>
+              </a:rPr>
+              <a:t>3</a:t>
+            </a:r>
+          </a:p>
+        </p:txBody>
+      </p:sp>
+      <p:sp>
+        <p:nvSpPr>
+          <p:cNvPr id="40" name="TextBox 39"/>
+          <p:cNvSpPr txBox="1"/>
+          <p:nvPr/>
+        </p:nvSpPr>
+        <p:spPr>
+          <a:xfrm>
+            <a:off x="8039100" y="3390900"/>
+            <a:ext cx="1666875" cy="285750"/>
+          </a:xfrm>
+          <a:prstGeom prst="rect">
+            <a:avLst/>
+          </a:prstGeom>
+          <a:noFill/>
+        </p:spPr>
+        <p:txBody>
+          <a:bodyPr wrap="square" anchor="ctr" lIns="0" rIns="0" tIns="0" bIns="0">
+            <a:spAutoFit/>
+          </a:bodyPr>
+          <a:lstStyle/>
+          <a:p>
+            <a:pPr algn="r">
+              <a:spcAft>
+                <a:spcPts val="0"/>
+              </a:spcAft>
+            </a:pPr>
+            <a:r>
+              <a:rPr sz="1200" b="0" i="0">
+                <a:solidFill>
+                  <a:srgbClr val="1D2433"/>
+                </a:solidFill>
+                <a:latin typeface="Arial"/>
+              </a:rPr>
+              <a:t>33 / 33</a:t>
+            </a:r>
+          </a:p>
+        </p:txBody>
+      </p:sp>
+      <p:sp>
+        <p:nvSpPr>
+          <p:cNvPr id="41" name="TextBox 40"/>
+          <p:cNvSpPr txBox="1"/>
+          <p:nvPr/>
+        </p:nvSpPr>
+        <p:spPr>
+          <a:xfrm>
+            <a:off x="9896475" y="3390900"/>
+            <a:ext cx="1666875" cy="285750"/>
+          </a:xfrm>
+          <a:prstGeom prst="rect">
+            <a:avLst/>
+          </a:prstGeom>
+          <a:noFill/>
+        </p:spPr>
+        <p:txBody>
+          <a:bodyPr wrap="square" anchor="ctr" lIns="0" rIns="0" tIns="0" bIns="0">
+            <a:spAutoFit/>
+          </a:bodyPr>
+          <a:lstStyle/>
+          <a:p>
+            <a:pPr algn="r">
+              <a:spcAft>
+                <a:spcPts val="0"/>
+              </a:spcAft>
+            </a:pPr>
+            <a:r>
+              <a:rPr sz="1200" b="0" i="0">
+                <a:solidFill>
+                  <a:srgbClr val="1D2433"/>
+                </a:solidFill>
+                <a:latin typeface="Arial"/>
+              </a:rPr>
+              <a:t>1 / 52</a:t>
+            </a:r>
+          </a:p>
+        </p:txBody>
+      </p:sp>
+      <p:cxnSp>
+        <p:nvCxnSpPr>
+          <p:cNvPr id="42" name="Connector 41"/>
+          <p:cNvCxnSpPr/>
+          <p:nvPr/>
+        </p:nvCxnSpPr>
+        <p:spPr>
+          <a:xfrm>
+            <a:off x="6896100" y="3676650"/>
+            <a:ext cx="4762500" cy="0"/>
+          </a:xfrm>
+          <a:prstGeom prst="line">
+            <a:avLst/>
+          </a:prstGeom>
+          <a:ln w="9525">
+            <a:solidFill>
+              <a:srgbClr val="E3E6EB"/>
+            </a:solidFill>
+          </a:ln>
+        </p:spPr>
+      </p:cxnSp>
+      <p:sp>
+        <p:nvSpPr>
+          <p:cNvPr id="43" name="TextBox 42"/>
+          <p:cNvSpPr txBox="1"/>
+          <p:nvPr/>
+        </p:nvSpPr>
+        <p:spPr>
+          <a:xfrm>
+            <a:off x="6991350" y="3676650"/>
+            <a:ext cx="857250" cy="285750"/>
+          </a:xfrm>
+          <a:prstGeom prst="rect">
+            <a:avLst/>
+          </a:prstGeom>
+          <a:noFill/>
+        </p:spPr>
+        <p:txBody>
+          <a:bodyPr wrap="square" anchor="ctr" lIns="0" rIns="0" tIns="0" bIns="0">
+            <a:spAutoFit/>
+          </a:bodyPr>
+          <a:lstStyle/>
+          <a:p>
+            <a:pPr algn="l">
+              <a:spcAft>
+                <a:spcPts val="0"/>
+              </a:spcAft>
+            </a:pPr>
+            <a:r>
+              <a:rPr sz="1200" b="1" i="0">
+                <a:solidFill>
+                  <a:srgbClr val="1F6FB4"/>
+                </a:solidFill>
+                <a:latin typeface="Arial"/>
+              </a:rPr>
+              <a:t>Total</a:t>
+            </a:r>
+          </a:p>
+        </p:txBody>
+      </p:sp>
+      <p:sp>
+        <p:nvSpPr>
+          <p:cNvPr id="44" name="TextBox 43"/>
+          <p:cNvSpPr txBox="1"/>
+          <p:nvPr/>
+        </p:nvSpPr>
+        <p:spPr>
+          <a:xfrm>
+            <a:off x="8039100" y="3676650"/>
+            <a:ext cx="1666875" cy="285750"/>
+          </a:xfrm>
+          <a:prstGeom prst="rect">
+            <a:avLst/>
+          </a:prstGeom>
+          <a:noFill/>
+        </p:spPr>
+        <p:txBody>
+          <a:bodyPr wrap="square" anchor="ctr" lIns="0" rIns="0" tIns="0" bIns="0">
+            <a:spAutoFit/>
+          </a:bodyPr>
+          <a:lstStyle/>
+          <a:p>
+            <a:pPr algn="r">
+              <a:spcAft>
+                <a:spcPts val="0"/>
+              </a:spcAft>
+            </a:pPr>
+            <a:r>
+              <a:rPr sz="1200" b="1" i="0">
+                <a:solidFill>
+                  <a:srgbClr val="1F6FB4"/>
+                </a:solidFill>
+                <a:latin typeface="Arial"/>
+              </a:rPr>
+              <a:t>97 / 99</a:t>
+            </a:r>
+          </a:p>
+        </p:txBody>
+      </p:sp>
+      <p:sp>
+        <p:nvSpPr>
+          <p:cNvPr id="45" name="TextBox 44"/>
+          <p:cNvSpPr txBox="1"/>
+          <p:nvPr/>
+        </p:nvSpPr>
+        <p:spPr>
+          <a:xfrm>
+            <a:off x="9896475" y="3676650"/>
+            <a:ext cx="1666875" cy="285750"/>
+          </a:xfrm>
+          <a:prstGeom prst="rect">
+            <a:avLst/>
+          </a:prstGeom>
+          <a:noFill/>
+        </p:spPr>
+        <p:txBody>
+          <a:bodyPr wrap="square" anchor="ctr" lIns="0" rIns="0" tIns="0" bIns="0">
+            <a:spAutoFit/>
+          </a:bodyPr>
+          <a:lstStyle/>
+          <a:p>
+            <a:pPr algn="r">
+              <a:spcAft>
+                <a:spcPts val="0"/>
+              </a:spcAft>
+            </a:pPr>
+            <a:r>
+              <a:rPr sz="1200" b="1" i="0">
+                <a:solidFill>
+                  <a:srgbClr val="1F6FB4"/>
+                </a:solidFill>
+                <a:latin typeface="Arial"/>
+              </a:rPr>
+              <a:t>2 / 160</a:t>
+            </a:r>
+          </a:p>
+        </p:txBody>
+      </p:sp>
+      <p:cxnSp>
+        <p:nvCxnSpPr>
+          <p:cNvPr id="46" name="Connector 45"/>
+          <p:cNvCxnSpPr/>
+          <p:nvPr/>
+        </p:nvCxnSpPr>
+        <p:spPr>
+          <a:xfrm>
+            <a:off x="6896100" y="3962400"/>
+            <a:ext cx="4762500" cy="0"/>
+          </a:xfrm>
+          <a:prstGeom prst="line">
+            <a:avLst/>
+          </a:prstGeom>
+          <a:ln w="9525">
+            <a:solidFill>
+              <a:srgbClr val="E3E6EB"/>
+            </a:solidFill>
+          </a:ln>
+        </p:spPr>
+      </p:cxnSp>
+      <p:sp>
+        <p:nvSpPr>
+          <p:cNvPr id="47" name="Rounded Rectangle 46"/>
+          <p:cNvSpPr/>
+          <p:nvPr/>
+        </p:nvSpPr>
+        <p:spPr>
+          <a:xfrm>
+            <a:off x="6896100" y="4114800"/>
+            <a:ext cx="2343150" cy="1066800"/>
+          </a:xfrm>
+          <a:prstGeom prst="roundRect">
+            <a:avLst>
+              <a:gd name="adj" fmla="val 8928"/>
+            </a:avLst>
+          </a:prstGeom>
+          <a:solidFill>
+            <a:srgbClr val="F5F7FA"/>
+          </a:solidFill>
+          <a:ln w="9525">
+            <a:solidFill>
+              <a:srgbClr val="E3E6EB"/>
+            </a:solidFill>
+          </a:ln>
+          <a:effectLst/>
+        </p:spPr>
+        <p:style>
+          <a:lnRef idx="1">
+            <a:schemeClr val="accent1"/>
+          </a:lnRef>
+          <a:fillRef idx="3">
+            <a:schemeClr val="accent1"/>
+          </a:fillRef>
+          <a:effectRef idx="2">
+            <a:schemeClr val="accent1"/>
+          </a:effectRef>
+          <a:fontRef idx="minor">
+            <a:schemeClr val="lt1"/>
+          </a:fontRef>
+        </p:style>
+        <p:txBody>
+          <a:bodyPr rtlCol="0" anchor="ctr"/>
+          <a:lstStyle/>
+          <a:p>
+            <a:pPr algn="ctr"/>
+          </a:p>
+        </p:txBody>
+      </p:sp>
+      <p:sp>
+        <p:nvSpPr>
+          <p:cNvPr id="48" name="TextBox 47"/>
+          <p:cNvSpPr txBox="1"/>
+          <p:nvPr/>
+        </p:nvSpPr>
+        <p:spPr>
+          <a:xfrm>
+            <a:off x="7029450" y="4210050"/>
+            <a:ext cx="2095500" cy="190500"/>
+          </a:xfrm>
+          <a:prstGeom prst="rect">
+            <a:avLst/>
+          </a:prstGeom>
+          <a:noFill/>
+        </p:spPr>
+        <p:txBody>
+          <a:bodyPr wrap="square" anchor="t" lIns="0" rIns="0" tIns="0" bIns="0">
+            <a:spAutoFit/>
+          </a:bodyPr>
+          <a:lstStyle/>
+          <a:p>
+            <a:pPr algn="l">
+              <a:spcAft>
+                <a:spcPts val="400"/>
+              </a:spcAft>
+            </a:pPr>
+            <a:r>
+              <a:rPr sz="1050" b="1" i="0">
+                <a:solidFill>
+                  <a:srgbClr val="5B6475"/>
+                </a:solidFill>
+                <a:latin typeface="Arial"/>
+              </a:rPr>
+              <a:t>Accept-all baseline</a:t>
+            </a:r>
+          </a:p>
+        </p:txBody>
+      </p:sp>
+      <p:sp>
+        <p:nvSpPr>
+          <p:cNvPr id="49" name="TextBox 48"/>
+          <p:cNvSpPr txBox="1"/>
+          <p:nvPr/>
+        </p:nvSpPr>
+        <p:spPr>
+          <a:xfrm>
+            <a:off x="7029450" y="4419600"/>
+            <a:ext cx="2095500" cy="381000"/>
+          </a:xfrm>
+          <a:prstGeom prst="rect">
+            <a:avLst/>
+          </a:prstGeom>
+          <a:noFill/>
+        </p:spPr>
+        <p:txBody>
+          <a:bodyPr wrap="square" anchor="t" lIns="0" rIns="0" tIns="0" bIns="0">
+            <a:spAutoFit/>
+          </a:bodyPr>
+          <a:lstStyle/>
+          <a:p>
+            <a:pPr algn="l">
+              <a:spcAft>
+                <a:spcPts val="400"/>
+              </a:spcAft>
+            </a:pPr>
+            <a:r>
+              <a:rPr sz="2250" b="1" i="0">
+                <a:solidFill>
+                  <a:srgbClr val="C0392B"/>
+                </a:solidFill>
+                <a:latin typeface="Arial"/>
+              </a:rPr>
+              <a:t>93 / 160</a:t>
+            </a:r>
+          </a:p>
+        </p:txBody>
+      </p:sp>
+      <p:sp>
+        <p:nvSpPr>
+          <p:cNvPr id="50" name="TextBox 49"/>
+          <p:cNvSpPr txBox="1"/>
+          <p:nvPr/>
+        </p:nvSpPr>
+        <p:spPr>
+          <a:xfrm>
+            <a:off x="7029450" y="4819650"/>
+            <a:ext cx="2095500" cy="323850"/>
+          </a:xfrm>
+          <a:prstGeom prst="rect">
+            <a:avLst/>
+          </a:prstGeom>
+          <a:noFill/>
+        </p:spPr>
+        <p:txBody>
+          <a:bodyPr wrap="square" anchor="t" lIns="0" rIns="0" tIns="0" bIns="0">
+            <a:spAutoFit/>
+          </a:bodyPr>
+          <a:lstStyle/>
+          <a:p>
+            <a:pPr algn="l">
+              <a:spcAft>
+                <a:spcPts val="0"/>
+              </a:spcAft>
+            </a:pPr>
+            <a:r>
+              <a:rPr sz="975" b="0" i="0">
+                <a:solidFill>
+                  <a:srgbClr val="5B6475"/>
+                </a:solidFill>
+                <a:latin typeface="Arial"/>
+              </a:rPr>
+              <a:t>decoys · TPR 1.00 · FPR 0.58</a:t>
+            </a:r>
+          </a:p>
+        </p:txBody>
+      </p:sp>
+      <p:sp>
+        <p:nvSpPr>
+          <p:cNvPr id="51" name="Rounded Rectangle 50"/>
+          <p:cNvSpPr/>
+          <p:nvPr/>
+        </p:nvSpPr>
+        <p:spPr>
+          <a:xfrm>
+            <a:off x="9315450" y="4114800"/>
+            <a:ext cx="2343150" cy="1066800"/>
+          </a:xfrm>
+          <a:prstGeom prst="roundRect">
+            <a:avLst>
+              <a:gd name="adj" fmla="val 8928"/>
+            </a:avLst>
+          </a:prstGeom>
+          <a:solidFill>
+            <a:srgbClr val="F5F7FA"/>
+          </a:solidFill>
+          <a:ln w="9525">
+            <a:solidFill>
+              <a:srgbClr val="E3E6EB"/>
+            </a:solidFill>
+          </a:ln>
+          <a:effectLst/>
+        </p:spPr>
+        <p:style>
+          <a:lnRef idx="1">
+            <a:schemeClr val="accent1"/>
+          </a:lnRef>
+          <a:fillRef idx="3">
+            <a:schemeClr val="accent1"/>
+          </a:fillRef>
+          <a:effectRef idx="2">
+            <a:schemeClr val="accent1"/>
+          </a:effectRef>
+          <a:fontRef idx="minor">
+            <a:schemeClr val="lt1"/>
+          </a:fontRef>
+        </p:style>
+        <p:txBody>
+          <a:bodyPr rtlCol="0" anchor="ctr"/>
+          <a:lstStyle/>
+          <a:p>
+            <a:pPr algn="ctr"/>
+          </a:p>
+        </p:txBody>
+      </p:sp>
+      <p:sp>
+        <p:nvSpPr>
+          <p:cNvPr id="52" name="TextBox 51"/>
+          <p:cNvSpPr txBox="1"/>
+          <p:nvPr/>
+        </p:nvSpPr>
+        <p:spPr>
+          <a:xfrm>
+            <a:off x="9448800" y="4210050"/>
+            <a:ext cx="2095500" cy="190500"/>
+          </a:xfrm>
+          <a:prstGeom prst="rect">
+            <a:avLst/>
+          </a:prstGeom>
+          <a:noFill/>
+        </p:spPr>
+        <p:txBody>
+          <a:bodyPr wrap="square" anchor="t" lIns="0" rIns="0" tIns="0" bIns="0">
+            <a:spAutoFit/>
+          </a:bodyPr>
+          <a:lstStyle/>
+          <a:p>
+            <a:pPr algn="l">
+              <a:spcAft>
+                <a:spcPts val="400"/>
+              </a:spcAft>
+            </a:pPr>
+            <a:r>
+              <a:rPr sz="1050" b="1" i="0">
+                <a:solidFill>
+                  <a:srgbClr val="5B6475"/>
+                </a:solidFill>
+                <a:latin typeface="Arial"/>
+              </a:rPr>
+              <a:t>Held-out filter</a:t>
+            </a:r>
+          </a:p>
+        </p:txBody>
+      </p:sp>
+      <p:sp>
+        <p:nvSpPr>
+          <p:cNvPr id="53" name="TextBox 52"/>
+          <p:cNvSpPr txBox="1"/>
+          <p:nvPr/>
+        </p:nvSpPr>
+        <p:spPr>
+          <a:xfrm>
+            <a:off x="9448800" y="4419600"/>
+            <a:ext cx="2095500" cy="381000"/>
+          </a:xfrm>
+          <a:prstGeom prst="rect">
+            <a:avLst/>
+          </a:prstGeom>
+          <a:noFill/>
+        </p:spPr>
+        <p:txBody>
+          <a:bodyPr wrap="square" anchor="t" lIns="0" rIns="0" tIns="0" bIns="0">
+            <a:spAutoFit/>
+          </a:bodyPr>
+          <a:lstStyle/>
+          <a:p>
+            <a:pPr algn="l">
+              <a:spcAft>
+                <a:spcPts val="400"/>
+              </a:spcAft>
+            </a:pPr>
+            <a:r>
+              <a:rPr sz="2250" b="1" i="0">
+                <a:solidFill>
+                  <a:srgbClr val="1F6FB4"/>
+                </a:solidFill>
+                <a:latin typeface="Arial"/>
+              </a:rPr>
+              <a:t>2 / 160</a:t>
+            </a:r>
+          </a:p>
+        </p:txBody>
+      </p:sp>
+      <p:sp>
+        <p:nvSpPr>
+          <p:cNvPr id="54" name="TextBox 53"/>
+          <p:cNvSpPr txBox="1"/>
+          <p:nvPr/>
+        </p:nvSpPr>
+        <p:spPr>
+          <a:xfrm>
+            <a:off x="9448800" y="4819650"/>
+            <a:ext cx="2095500" cy="323850"/>
+          </a:xfrm>
+          <a:prstGeom prst="rect">
+            <a:avLst/>
+          </a:prstGeom>
+          <a:noFill/>
+        </p:spPr>
+        <p:txBody>
+          <a:bodyPr wrap="square" anchor="t" lIns="0" rIns="0" tIns="0" bIns="0">
+            <a:spAutoFit/>
+          </a:bodyPr>
+          <a:lstStyle/>
+          <a:p>
+            <a:pPr algn="l">
+              <a:spcAft>
+                <a:spcPts val="0"/>
+              </a:spcAft>
+            </a:pPr>
+            <a:r>
+              <a:rPr sz="975" b="0" i="0">
+                <a:solidFill>
+                  <a:srgbClr val="5B6475"/>
+                </a:solidFill>
+                <a:latin typeface="Arial"/>
+              </a:rPr>
+              <a:t>decoys · TPR 0.98 · FPR 0.013</a:t>
+            </a:r>
+          </a:p>
+        </p:txBody>
+      </p:sp>
+      <p:sp>
+        <p:nvSpPr>
+          <p:cNvPr id="55" name="TextBox 54"/>
+          <p:cNvSpPr txBox="1"/>
+          <p:nvPr/>
+        </p:nvSpPr>
+        <p:spPr>
+          <a:xfrm>
+            <a:off x="6896100" y="5334000"/>
+            <a:ext cx="4762500" cy="666750"/>
+          </a:xfrm>
+          <a:prstGeom prst="rect">
+            <a:avLst/>
+          </a:prstGeom>
+          <a:noFill/>
+        </p:spPr>
+        <p:txBody>
+          <a:bodyPr wrap="square" anchor="t" lIns="0" rIns="0" tIns="0" bIns="0">
+            <a:spAutoFit/>
+          </a:bodyPr>
+          <a:lstStyle/>
+          <a:p>
+            <a:pPr algn="l">
+              <a:spcAft>
+                <a:spcPts val="400"/>
+              </a:spcAft>
+            </a:pPr>
+            <a:r>
+              <a:rPr sz="1050" b="1" i="0">
+                <a:solidFill>
+                  <a:srgbClr val="1D2433"/>
+                </a:solidFill>
+                <a:latin typeface="Arial"/>
+              </a:rPr>
+              <a:t>Why did two decoys pass? </a:t>
+            </a:r>
+            <a:r>
+              <a:rPr sz="1050" b="0" i="0">
+                <a:solidFill>
+                  <a:srgbClr val="5B6475"/>
+                </a:solidFill>
+                <a:latin typeface="Arial"/>
+              </a:rPr>
+              <a:t>Each held-out block uses cutoffs fitted on the other two. The final fit on all eval data rejects both.</a:t>
+            </a:r>
+          </a:p>
+        </p:txBody>
+      </p:sp>
+    </p:spTree>
+  </p:cSld>
+  <p:clrMapOvr>
+    <a:masterClrMapping/>
+  </p:clrMapOvr>
+</p:sld>
+</file>
+
+<file path=ppt/slides/slide19.xml><?xml version="1.0" encoding="utf-8"?>
+<p:sld xmlns:a="http://schemas.openxmlformats.org/drawingml/2006/main" xmlns:p="http://schemas.openxmlformats.org/presentationml/2006/main" xmlns:r="http://schemas.openxmlformats.org/officeDocument/2006/relationships">
+  <p:cSld>
+    <p:bg>
+      <p:bgPr>
+        <a:solidFill>
+          <a:srgbClr val="FFFFFF"/>
+        </a:solidFill>
+        <a:effectLst/>
+      </p:bgPr>
+    </p:bg>
+    <p:spTree>
+      <p:nvGrpSpPr>
+        <p:cNvPr id="1" name=""/>
+        <p:cNvGrpSpPr/>
+        <p:nvPr/>
+      </p:nvGrpSpPr>
+      <p:grpSpPr/>
+      <p:sp>
+        <p:nvSpPr>
+          <p:cNvPr id="2" name="TextBox 1"/>
+          <p:cNvSpPr txBox="1"/>
+          <p:nvPr/>
+        </p:nvSpPr>
+        <p:spPr>
+          <a:xfrm>
+            <a:off x="533400" y="381000"/>
+            <a:ext cx="7620000" cy="190500"/>
+          </a:xfrm>
+          <a:prstGeom prst="rect">
+            <a:avLst/>
+          </a:prstGeom>
+          <a:noFill/>
+        </p:spPr>
+        <p:txBody>
+          <a:bodyPr wrap="square" anchor="t" lIns="0" rIns="0" tIns="0" bIns="0">
+            <a:spAutoFit/>
+          </a:bodyPr>
+          <a:lstStyle/>
+          <a:p>
+            <a:pPr algn="l">
+              <a:spcAft>
+                <a:spcPts val="400"/>
+              </a:spcAft>
+            </a:pPr>
+            <a:r>
+              <a:rPr sz="1125" b="1" i="0">
+                <a:solidFill>
+                  <a:srgbClr val="C0392B"/>
+                </a:solidFill>
+                <a:latin typeface="Arial"/>
+              </a:rPr>
+              <a:t>TASK 2 · REAL VS DECOY · 3 / 3</a:t>
+            </a:r>
+          </a:p>
+        </p:txBody>
+      </p:sp>
+      <p:sp>
+        <p:nvSpPr>
+          <p:cNvPr id="3" name="TextBox 2"/>
+          <p:cNvSpPr txBox="1"/>
+          <p:nvPr/>
+        </p:nvSpPr>
+        <p:spPr>
+          <a:xfrm>
+            <a:off x="6896100" y="381000"/>
+            <a:ext cx="4762500" cy="190500"/>
+          </a:xfrm>
+          <a:prstGeom prst="rect">
+            <a:avLst/>
+          </a:prstGeom>
+          <a:noFill/>
+        </p:spPr>
+        <p:txBody>
+          <a:bodyPr wrap="square" anchor="t" lIns="0" rIns="0" tIns="0" bIns="0">
+            <a:spAutoFit/>
+          </a:bodyPr>
+          <a:lstStyle/>
+          <a:p>
+            <a:pPr algn="r">
+              <a:spcAft>
+                <a:spcPts val="400"/>
+              </a:spcAft>
+            </a:pPr>
+            <a:r>
+              <a:rPr sz="1125" b="0" i="0">
+                <a:solidFill>
+                  <a:srgbClr val="5B6475"/>
+                </a:solidFill>
+                <a:latin typeface="Arial"/>
+              </a:rPr>
+              <a:t>Shravani Kuchi</a:t>
+            </a:r>
+          </a:p>
+        </p:txBody>
+      </p:sp>
+      <p:sp>
+        <p:nvSpPr>
+          <p:cNvPr id="4" name="TextBox 3"/>
+          <p:cNvSpPr txBox="1"/>
+          <p:nvPr/>
+        </p:nvSpPr>
+        <p:spPr>
+          <a:xfrm>
+            <a:off x="533400" y="590550"/>
+            <a:ext cx="11125200" cy="419100"/>
+          </a:xfrm>
+          <a:prstGeom prst="rect">
+            <a:avLst/>
+          </a:prstGeom>
+          <a:noFill/>
+        </p:spPr>
+        <p:txBody>
+          <a:bodyPr wrap="square" anchor="t" lIns="0" rIns="0" tIns="0" bIns="0">
+            <a:spAutoFit/>
+          </a:bodyPr>
+          <a:lstStyle/>
+          <a:p>
+            <a:pPr algn="l">
+              <a:spcAft>
+                <a:spcPts val="400"/>
+              </a:spcAft>
+            </a:pPr>
+            <a:r>
+              <a:rPr sz="2550" b="1" i="0">
+                <a:solidFill>
+                  <a:srgbClr val="1D2433"/>
+                </a:solidFill>
+                <a:latin typeface="Arial"/>
+              </a:rPr>
+              <a:t>Test examples and boundary cases</a:t>
+            </a:r>
+          </a:p>
+        </p:txBody>
+      </p:sp>
+      <p:sp>
+        <p:nvSpPr>
+          <p:cNvPr id="5" name="Rounded Rectangle 4"/>
+          <p:cNvSpPr/>
+          <p:nvPr/>
+        </p:nvSpPr>
+        <p:spPr>
+          <a:xfrm>
+            <a:off x="533400" y="1143000"/>
+            <a:ext cx="3562350" cy="3714750"/>
+          </a:xfrm>
+          <a:prstGeom prst="roundRect">
+            <a:avLst>
+              <a:gd name="adj" fmla="val 2139"/>
+            </a:avLst>
+          </a:prstGeom>
+          <a:solidFill>
+            <a:srgbClr val="1D2433"/>
+          </a:solidFill>
+          <a:ln w="9525">
+            <a:solidFill>
+              <a:srgbClr val="E3E6EB"/>
+            </a:solidFill>
+          </a:ln>
+          <a:effectLst/>
+        </p:spPr>
+        <p:style>
+          <a:lnRef idx="1">
+            <a:schemeClr val="accent1"/>
+          </a:lnRef>
+          <a:fillRef idx="3">
+            <a:schemeClr val="accent1"/>
+          </a:fillRef>
+          <a:effectRef idx="2">
+            <a:schemeClr val="accent1"/>
+          </a:effectRef>
+          <a:fontRef idx="minor">
+            <a:schemeClr val="lt1"/>
+          </a:fontRef>
+        </p:style>
+        <p:txBody>
+          <a:bodyPr rtlCol="0" anchor="ctr"/>
+          <a:lstStyle/>
+          <a:p>
+            <a:pPr algn="ctr"/>
+          </a:p>
+        </p:txBody>
+      </p:sp>
+      <p:pic>
+        <p:nvPicPr>
+          <p:cNvPr id="6" name="Picture 5" descr="image.png"/>
+          <p:cNvPicPr>
+            <a:picLocks noChangeAspect="1"/>
+          </p:cNvPicPr>
+          <p:nvPr/>
+        </p:nvPicPr>
+        <p:blipFill>
+          <a:blip r:embed="rId2"/>
+          <a:stretch>
+            <a:fillRect/>
+          </a:stretch>
+        </p:blipFill>
+        <p:spPr>
+          <a:xfrm>
+            <a:off x="769233" y="1181100"/>
+            <a:ext cx="3090683" cy="3638550"/>
+          </a:xfrm>
+          <a:prstGeom prst="rect">
+            <a:avLst/>
+          </a:prstGeom>
+        </p:spPr>
+      </p:pic>
+      <p:sp>
+        <p:nvSpPr>
+          <p:cNvPr id="7" name="TextBox 6"/>
+          <p:cNvSpPr txBox="1"/>
+          <p:nvPr/>
+        </p:nvSpPr>
+        <p:spPr>
+          <a:xfrm>
+            <a:off x="533400" y="4953000"/>
+            <a:ext cx="3562350" cy="228600"/>
+          </a:xfrm>
+          <a:prstGeom prst="rect">
+            <a:avLst/>
+          </a:prstGeom>
+          <a:noFill/>
+        </p:spPr>
+        <p:txBody>
+          <a:bodyPr wrap="square" anchor="t" lIns="0" rIns="0" tIns="0" bIns="0">
+            <a:spAutoFit/>
+          </a:bodyPr>
+          <a:lstStyle/>
+          <a:p>
+            <a:pPr algn="l">
+              <a:spcAft>
+                <a:spcPts val="400"/>
+              </a:spcAft>
+            </a:pPr>
+            <a:r>
+              <a:rPr sz="1350" b="1" i="0">
+                <a:solidFill>
+                  <a:srgbClr val="2E9E4F"/>
+                </a:solidFill>
+                <a:latin typeface="Arial"/>
+              </a:rPr>
+              <a:t>✔ Accepted real object</a:t>
+            </a:r>
+          </a:p>
+        </p:txBody>
+      </p:sp>
+      <p:sp>
+        <p:nvSpPr>
+          <p:cNvPr id="8" name="TextBox 7"/>
+          <p:cNvSpPr txBox="1"/>
+          <p:nvPr/>
+        </p:nvSpPr>
+        <p:spPr>
+          <a:xfrm>
+            <a:off x="533400" y="5200650"/>
+            <a:ext cx="3562350" cy="209550"/>
+          </a:xfrm>
+          <a:prstGeom prst="rect">
+            <a:avLst/>
+          </a:prstGeom>
+          <a:noFill/>
+        </p:spPr>
+        <p:txBody>
+          <a:bodyPr wrap="square" anchor="t" lIns="0" rIns="0" tIns="0" bIns="0">
+            <a:spAutoFit/>
+          </a:bodyPr>
+          <a:lstStyle/>
+          <a:p>
+            <a:pPr algn="l">
+              <a:spcAft>
+                <a:spcPts val="0"/>
+              </a:spcAft>
+            </a:pPr>
+            <a:r>
+              <a:rPr sz="1125" b="0" i="0">
+                <a:solidFill>
+                  <a:srgbClr val="5B6475"/>
+                </a:solidFill>
+                <a:latin typeface="Arial"/>
+              </a:rPr>
+              <a:t>both cues pass</a:t>
+            </a:r>
+          </a:p>
+        </p:txBody>
+      </p:sp>
+      <p:sp>
+        <p:nvSpPr>
+          <p:cNvPr id="9" name="Rounded Rectangle 8"/>
+          <p:cNvSpPr/>
+          <p:nvPr/>
+        </p:nvSpPr>
+        <p:spPr>
+          <a:xfrm>
+            <a:off x="4314825" y="1143000"/>
+            <a:ext cx="3562350" cy="3714750"/>
+          </a:xfrm>
+          <a:prstGeom prst="roundRect">
+            <a:avLst>
+              <a:gd name="adj" fmla="val 2139"/>
+            </a:avLst>
+          </a:prstGeom>
+          <a:solidFill>
+            <a:srgbClr val="1D2433"/>
+          </a:solidFill>
+          <a:ln w="9525">
+            <a:solidFill>
+              <a:srgbClr val="E3E6EB"/>
+            </a:solidFill>
+          </a:ln>
+          <a:effectLst/>
+        </p:spPr>
+        <p:style>
+          <a:lnRef idx="1">
+            <a:schemeClr val="accent1"/>
+          </a:lnRef>
+          <a:fillRef idx="3">
+            <a:schemeClr val="accent1"/>
+          </a:fillRef>
+          <a:effectRef idx="2">
+            <a:schemeClr val="accent1"/>
+          </a:effectRef>
+          <a:fontRef idx="minor">
+            <a:schemeClr val="lt1"/>
+          </a:fontRef>
+        </p:style>
+        <p:txBody>
+          <a:bodyPr rtlCol="0" anchor="ctr"/>
+          <a:lstStyle/>
+          <a:p>
+            <a:pPr algn="ctr"/>
+          </a:p>
+        </p:txBody>
+      </p:sp>
+      <p:pic>
+        <p:nvPicPr>
+          <p:cNvPr id="10" name="Picture 9" descr="image.png"/>
+          <p:cNvPicPr>
+            <a:picLocks noChangeAspect="1"/>
+          </p:cNvPicPr>
+          <p:nvPr/>
+        </p:nvPicPr>
+        <p:blipFill>
+          <a:blip r:embed="rId3"/>
+          <a:stretch>
+            <a:fillRect/>
+          </a:stretch>
+        </p:blipFill>
+        <p:spPr>
+          <a:xfrm>
+            <a:off x="4352925" y="1367518"/>
+            <a:ext cx="3486150" cy="3265714"/>
+          </a:xfrm>
+          <a:prstGeom prst="rect">
+            <a:avLst/>
+          </a:prstGeom>
+        </p:spPr>
+      </p:pic>
+      <p:sp>
+        <p:nvSpPr>
+          <p:cNvPr id="11" name="TextBox 10"/>
+          <p:cNvSpPr txBox="1"/>
+          <p:nvPr/>
+        </p:nvSpPr>
+        <p:spPr>
+          <a:xfrm>
+            <a:off x="4314825" y="4953000"/>
+            <a:ext cx="3562350" cy="228600"/>
+          </a:xfrm>
+          <a:prstGeom prst="rect">
+            <a:avLst/>
+          </a:prstGeom>
+          <a:noFill/>
+        </p:spPr>
+        <p:txBody>
+          <a:bodyPr wrap="square" anchor="t" lIns="0" rIns="0" tIns="0" bIns="0">
+            <a:spAutoFit/>
+          </a:bodyPr>
+          <a:lstStyle/>
+          <a:p>
+            <a:pPr algn="l">
+              <a:spcAft>
+                <a:spcPts val="400"/>
+              </a:spcAft>
+            </a:pPr>
+            <a:r>
+              <a:rPr sz="1350" b="1" i="0">
+                <a:solidFill>
+                  <a:srgbClr val="2E9E4F"/>
+                </a:solidFill>
+                <a:latin typeface="Arial"/>
+              </a:rPr>
+              <a:t>✔ Rejected printed decoys</a:t>
+            </a:r>
+          </a:p>
+        </p:txBody>
+      </p:sp>
+      <p:sp>
+        <p:nvSpPr>
+          <p:cNvPr id="12" name="TextBox 11"/>
+          <p:cNvSpPr txBox="1"/>
+          <p:nvPr/>
+        </p:nvSpPr>
+        <p:spPr>
+          <a:xfrm>
+            <a:off x="4314825" y="5200650"/>
+            <a:ext cx="3562350" cy="209550"/>
+          </a:xfrm>
+          <a:prstGeom prst="rect">
+            <a:avLst/>
+          </a:prstGeom>
+          <a:noFill/>
+        </p:spPr>
+        <p:txBody>
+          <a:bodyPr wrap="square" anchor="t" lIns="0" rIns="0" tIns="0" bIns="0">
+            <a:spAutoFit/>
+          </a:bodyPr>
+          <a:lstStyle/>
+          <a:p>
+            <a:pPr algn="l">
+              <a:spcAft>
+                <a:spcPts val="0"/>
+              </a:spcAft>
+            </a:pPr>
+            <a:r>
+              <a:rPr sz="1125" b="0" i="0">
+                <a:solidFill>
+                  <a:srgbClr val="5B6475"/>
+                </a:solidFill>
+                <a:latin typeface="Arial"/>
+              </a:rPr>
+              <a:t>small and flat against the blocks</a:t>
+            </a:r>
+          </a:p>
+        </p:txBody>
+      </p:sp>
+      <p:sp>
+        <p:nvSpPr>
+          <p:cNvPr id="13" name="Rounded Rectangle 12"/>
+          <p:cNvSpPr/>
+          <p:nvPr/>
+        </p:nvSpPr>
+        <p:spPr>
+          <a:xfrm>
+            <a:off x="8096250" y="1143000"/>
+            <a:ext cx="3562350" cy="3714750"/>
+          </a:xfrm>
+          <a:prstGeom prst="roundRect">
+            <a:avLst>
+              <a:gd name="adj" fmla="val 2139"/>
+            </a:avLst>
+          </a:prstGeom>
+          <a:solidFill>
+            <a:srgbClr val="1D2433"/>
+          </a:solidFill>
+          <a:ln w="9525">
+            <a:solidFill>
+              <a:srgbClr val="E3E6EB"/>
+            </a:solidFill>
+          </a:ln>
+          <a:effectLst/>
+        </p:spPr>
+        <p:style>
+          <a:lnRef idx="1">
+            <a:schemeClr val="accent1"/>
+          </a:lnRef>
+          <a:fillRef idx="3">
+            <a:schemeClr val="accent1"/>
+          </a:fillRef>
+          <a:effectRef idx="2">
+            <a:schemeClr val="accent1"/>
+          </a:effectRef>
+          <a:fontRef idx="minor">
+            <a:schemeClr val="lt1"/>
+          </a:fontRef>
+        </p:style>
+        <p:txBody>
+          <a:bodyPr rtlCol="0" anchor="ctr"/>
+          <a:lstStyle/>
+          <a:p>
+            <a:pPr algn="ctr"/>
+          </a:p>
+        </p:txBody>
+      </p:sp>
+      <p:pic>
+        <p:nvPicPr>
+          <p:cNvPr id="14" name="Picture 13" descr="image.png"/>
+          <p:cNvPicPr>
+            <a:picLocks noChangeAspect="1"/>
+          </p:cNvPicPr>
+          <p:nvPr/>
+        </p:nvPicPr>
+        <p:blipFill>
+          <a:blip r:embed="rId4"/>
+          <a:stretch>
+            <a:fillRect/>
+          </a:stretch>
+        </p:blipFill>
+        <p:spPr>
+          <a:xfrm>
+            <a:off x="8332430" y="1181100"/>
+            <a:ext cx="3089990" cy="3638550"/>
+          </a:xfrm>
+          <a:prstGeom prst="rect">
+            <a:avLst/>
+          </a:prstGeom>
+        </p:spPr>
+      </p:pic>
+      <p:sp>
+        <p:nvSpPr>
+          <p:cNvPr id="15" name="TextBox 14"/>
+          <p:cNvSpPr txBox="1"/>
+          <p:nvPr/>
+        </p:nvSpPr>
+        <p:spPr>
+          <a:xfrm>
+            <a:off x="8096250" y="4953000"/>
+            <a:ext cx="3562350" cy="228600"/>
+          </a:xfrm>
+          <a:prstGeom prst="rect">
+            <a:avLst/>
+          </a:prstGeom>
+          <a:noFill/>
+        </p:spPr>
+        <p:txBody>
+          <a:bodyPr wrap="square" anchor="t" lIns="0" rIns="0" tIns="0" bIns="0">
+            <a:spAutoFit/>
+          </a:bodyPr>
+          <a:lstStyle/>
+          <a:p>
+            <a:pPr algn="l">
+              <a:spcAft>
+                <a:spcPts val="400"/>
+              </a:spcAft>
+            </a:pPr>
+            <a:r>
+              <a:rPr sz="1350" b="1" i="0">
+                <a:solidFill>
+                  <a:srgbClr val="C0392B"/>
+                </a:solidFill>
+                <a:latin typeface="Arial"/>
+              </a:rPr>
+              <a:t>✘ Real object rejected</a:t>
+            </a:r>
+          </a:p>
+        </p:txBody>
+      </p:sp>
+      <p:sp>
+        <p:nvSpPr>
+          <p:cNvPr id="16" name="TextBox 15"/>
+          <p:cNvSpPr txBox="1"/>
+          <p:nvPr/>
+        </p:nvSpPr>
+        <p:spPr>
+          <a:xfrm>
+            <a:off x="8096250" y="5200650"/>
+            <a:ext cx="3562350" cy="209550"/>
+          </a:xfrm>
+          <a:prstGeom prst="rect">
+            <a:avLst/>
+          </a:prstGeom>
+          <a:noFill/>
+        </p:spPr>
+        <p:txBody>
+          <a:bodyPr wrap="square" anchor="t" lIns="0" rIns="0" tIns="0" bIns="0">
+            <a:spAutoFit/>
+          </a:bodyPr>
+          <a:lstStyle/>
+          <a:p>
+            <a:pPr algn="l">
+              <a:spcAft>
+                <a:spcPts val="0"/>
+              </a:spcAft>
+            </a:pPr>
+            <a:r>
+              <a:rPr sz="1125" b="0" i="0">
+                <a:solidFill>
+                  <a:srgbClr val="5B6475"/>
+                </a:solidFill>
+                <a:latin typeface="Arial"/>
+              </a:rPr>
+              <a:t>height 0.955 m, contrast 0.098 &lt; 0.192</a:t>
+            </a:r>
+          </a:p>
+        </p:txBody>
+      </p:sp>
+      <p:sp>
+        <p:nvSpPr>
+          <p:cNvPr id="17" name="Rounded Rectangle 16"/>
+          <p:cNvSpPr/>
+          <p:nvPr/>
+        </p:nvSpPr>
+        <p:spPr>
+          <a:xfrm>
+            <a:off x="533400" y="5695950"/>
+            <a:ext cx="3885438" cy="304800"/>
+          </a:xfrm>
+          <a:prstGeom prst="roundRect">
+            <a:avLst>
+              <a:gd name="adj" fmla="val 50000"/>
+            </a:avLst>
+          </a:prstGeom>
+          <a:solidFill>
+            <a:srgbClr val="F5F7FA"/>
+          </a:solidFill>
+          <a:ln w="9525">
+            <a:solidFill>
+              <a:srgbClr val="E3E6EB"/>
+            </a:solidFill>
+          </a:ln>
+          <a:effectLst/>
+        </p:spPr>
+        <p:style>
+          <a:lnRef idx="1">
+            <a:schemeClr val="accent1"/>
+          </a:lnRef>
+          <a:fillRef idx="3">
+            <a:schemeClr val="accent1"/>
+          </a:fillRef>
+          <a:effectRef idx="2">
+            <a:schemeClr val="accent1"/>
+          </a:effectRef>
+          <a:fontRef idx="minor">
+            <a:schemeClr val="lt1"/>
+          </a:fontRef>
+        </p:style>
+        <p:txBody>
+          <a:bodyPr rtlCol="0" anchor="ctr"/>
+          <a:lstStyle/>
+          <a:p>
+            <a:pPr algn="ctr"/>
+          </a:p>
+        </p:txBody>
+      </p:sp>
+      <p:sp>
+        <p:nvSpPr>
+          <p:cNvPr id="18" name="TextBox 17"/>
+          <p:cNvSpPr txBox="1"/>
+          <p:nvPr/>
+        </p:nvSpPr>
+        <p:spPr>
+          <a:xfrm>
+            <a:off x="533400" y="5695950"/>
+            <a:ext cx="3885438" cy="304800"/>
+          </a:xfrm>
+          <a:prstGeom prst="rect">
+            <a:avLst/>
+          </a:prstGeom>
+          <a:noFill/>
+        </p:spPr>
+        <p:txBody>
+          <a:bodyPr wrap="square" anchor="ctr" lIns="0" rIns="0" tIns="0" bIns="0">
+            <a:spAutoFit/>
+          </a:bodyPr>
+          <a:lstStyle/>
+          <a:p>
+            <a:pPr algn="ctr">
+              <a:spcAft>
+                <a:spcPts val="0"/>
+              </a:spcAft>
+            </a:pPr>
+            <a:r>
+              <a:rPr sz="1200" b="0" i="0">
+                <a:solidFill>
+                  <a:srgbClr val="1D2433"/>
+                </a:solidFill>
+                <a:latin typeface="Arial"/>
+              </a:rPr>
+              <a:t>Test: </a:t>
+            </a:r>
+            <a:r>
+              <a:rPr sz="1200" b="1" i="0">
+                <a:solidFill>
+                  <a:srgbClr val="1F6FB4"/>
+                </a:solidFill>
+                <a:latin typeface="Arial"/>
+              </a:rPr>
+              <a:t>2 real missed</a:t>
+            </a:r>
+            <a:r>
+              <a:rPr sz="1200" b="0" i="0">
+                <a:solidFill>
+                  <a:srgbClr val="1D2433"/>
+                </a:solidFill>
+                <a:latin typeface="Arial"/>
+              </a:rPr>
+              <a:t>, </a:t>
+            </a:r>
+            <a:r>
+              <a:rPr sz="1200" b="1" i="0">
+                <a:solidFill>
+                  <a:srgbClr val="2E9E4F"/>
+                </a:solidFill>
+                <a:latin typeface="Arial"/>
+              </a:rPr>
+              <a:t>0 / 103 decoys</a:t>
+            </a:r>
+            <a:r>
+              <a:rPr sz="1200" b="0" i="0">
+                <a:solidFill>
+                  <a:srgbClr val="1D2433"/>
+                </a:solidFill>
+                <a:latin typeface="Arial"/>
+              </a:rPr>
+              <a:t> accepted</a:t>
+            </a:r>
+          </a:p>
+        </p:txBody>
+      </p:sp>
+      <p:sp>
+        <p:nvSpPr>
+          <p:cNvPr id="19" name="Rounded Rectangle 18"/>
+          <p:cNvSpPr/>
+          <p:nvPr/>
+        </p:nvSpPr>
+        <p:spPr>
+          <a:xfrm>
+            <a:off x="4514088" y="5695950"/>
+            <a:ext cx="4568190" cy="304800"/>
+          </a:xfrm>
+          <a:prstGeom prst="roundRect">
+            <a:avLst>
+              <a:gd name="adj" fmla="val 50000"/>
+            </a:avLst>
+          </a:prstGeom>
+          <a:solidFill>
+            <a:srgbClr val="F5F7FA"/>
+          </a:solidFill>
+          <a:ln w="9525">
+            <a:solidFill>
+              <a:srgbClr val="E3E6EB"/>
+            </a:solidFill>
+          </a:ln>
+          <a:effectLst/>
+        </p:spPr>
+        <p:style>
+          <a:lnRef idx="1">
+            <a:schemeClr val="accent1"/>
+          </a:lnRef>
+          <a:fillRef idx="3">
+            <a:schemeClr val="accent1"/>
+          </a:fillRef>
+          <a:effectRef idx="2">
+            <a:schemeClr val="accent1"/>
+          </a:effectRef>
+          <a:fontRef idx="minor">
+            <a:schemeClr val="lt1"/>
+          </a:fontRef>
+        </p:style>
+        <p:txBody>
+          <a:bodyPr rtlCol="0" anchor="ctr"/>
+          <a:lstStyle/>
+          <a:p>
+            <a:pPr algn="ctr"/>
+          </a:p>
+        </p:txBody>
+      </p:sp>
+      <p:sp>
+        <p:nvSpPr>
+          <p:cNvPr id="20" name="TextBox 19"/>
+          <p:cNvSpPr txBox="1"/>
+          <p:nvPr/>
+        </p:nvSpPr>
+        <p:spPr>
+          <a:xfrm>
+            <a:off x="4514088" y="5695950"/>
+            <a:ext cx="4568190" cy="304800"/>
+          </a:xfrm>
+          <a:prstGeom prst="rect">
+            <a:avLst/>
+          </a:prstGeom>
+          <a:noFill/>
+        </p:spPr>
+        <p:txBody>
+          <a:bodyPr wrap="square" anchor="ctr" lIns="0" rIns="0" tIns="0" bIns="0">
+            <a:spAutoFit/>
+          </a:bodyPr>
+          <a:lstStyle/>
+          <a:p>
+            <a:pPr algn="ctr">
+              <a:spcAft>
+                <a:spcPts val="0"/>
+              </a:spcAft>
+            </a:pPr>
+            <a:r>
+              <a:rPr sz="1200" b="0" i="0">
+                <a:solidFill>
+                  <a:srgbClr val="1D2433"/>
+                </a:solidFill>
+                <a:latin typeface="Arial"/>
+              </a:rPr>
+              <a:t>Mixed or missing depth near a box can change </a:t>
+            </a:r>
+            <a:r>
+              <a:rPr sz="1200" b="1" i="0">
+                <a:solidFill>
+                  <a:srgbClr val="1F6FB4"/>
+                </a:solidFill>
+                <a:latin typeface="Arial"/>
+              </a:rPr>
+              <a:t>either cue</a:t>
+            </a:r>
+          </a:p>
+        </p:txBody>
+      </p:sp>
+    </p:spTree>
+  </p:cSld>
+  <p:clrMapOvr>
+    <a:masterClrMapping/>
+  </p:clrMapOvr>
+</p:sld>
+</file>
+
 <file path=ppt/slides/slide2.xml><?xml version="1.0" encoding="utf-8"?>
 <p:sld xmlns:a="http://schemas.openxmlformats.org/drawingml/2006/main" xmlns:p="http://schemas.openxmlformats.org/presentationml/2006/main" xmlns:r="http://schemas.openxmlformats.org/officeDocument/2006/relationships">
   <p:cSld>
@@ -17044,858 +22763,6 @@
                 <a:latin typeface="Arial"/>
               </a:rPr>
               <a:t>Stage 2</a:t>
-            </a:r>
-          </a:p>
-        </p:txBody>
-      </p:sp>
-    </p:spTree>
-  </p:cSld>
-  <p:clrMapOvr>
-    <a:masterClrMapping/>
-  </p:clrMapOvr>
-</p:sld>
-</file>
-
-<file path=ppt/slides/slide7.xml><?xml version="1.0" encoding="utf-8"?>
-<p:sld xmlns:a="http://schemas.openxmlformats.org/drawingml/2006/main" xmlns:p="http://schemas.openxmlformats.org/presentationml/2006/main" xmlns:r="http://schemas.openxmlformats.org/officeDocument/2006/relationships">
-  <p:cSld>
-    <p:bg>
-      <p:bgPr>
-        <a:solidFill>
-          <a:srgbClr val="FFFFFF"/>
-        </a:solidFill>
-        <a:effectLst/>
-      </p:bgPr>
-    </p:bg>
-    <p:spTree>
-      <p:nvGrpSpPr>
-        <p:cNvPr id="1" name=""/>
-        <p:cNvGrpSpPr/>
-        <p:nvPr/>
-      </p:nvGrpSpPr>
-      <p:grpSpPr/>
-      <p:sp>
-        <p:nvSpPr>
-          <p:cNvPr id="2" name="TextBox 1"/>
-          <p:cNvSpPr txBox="1"/>
-          <p:nvPr/>
-        </p:nvSpPr>
-        <p:spPr>
-          <a:xfrm>
-            <a:off x="533400" y="381000"/>
-            <a:ext cx="7620000" cy="190500"/>
-          </a:xfrm>
-          <a:prstGeom prst="rect">
-            <a:avLst/>
-          </a:prstGeom>
-          <a:noFill/>
-        </p:spPr>
-        <p:txBody>
-          <a:bodyPr wrap="square" anchor="t" lIns="0" rIns="0" tIns="0" bIns="0">
-            <a:spAutoFit/>
-          </a:bodyPr>
-          <a:lstStyle/>
-          <a:p>
-            <a:pPr algn="l">
-              <a:spcAft>
-                <a:spcPts val="400"/>
-              </a:spcAft>
-            </a:pPr>
-            <a:r>
-              <a:rPr sz="1125" b="1" i="0">
-                <a:solidFill>
-                  <a:srgbClr val="C0392B"/>
-                </a:solidFill>
-                <a:latin typeface="Arial"/>
-              </a:rPr>
-              <a:t>TASK 2 · REAL VS DECOY · 1 / 3</a:t>
-            </a:r>
-          </a:p>
-        </p:txBody>
-      </p:sp>
-      <p:sp>
-        <p:nvSpPr>
-          <p:cNvPr id="3" name="TextBox 2"/>
-          <p:cNvSpPr txBox="1"/>
-          <p:nvPr/>
-        </p:nvSpPr>
-        <p:spPr>
-          <a:xfrm>
-            <a:off x="6896100" y="381000"/>
-            <a:ext cx="4762500" cy="190500"/>
-          </a:xfrm>
-          <a:prstGeom prst="rect">
-            <a:avLst/>
-          </a:prstGeom>
-          <a:noFill/>
-        </p:spPr>
-        <p:txBody>
-          <a:bodyPr wrap="square" anchor="t" lIns="0" rIns="0" tIns="0" bIns="0">
-            <a:spAutoFit/>
-          </a:bodyPr>
-          <a:lstStyle/>
-          <a:p>
-            <a:pPr algn="r">
-              <a:spcAft>
-                <a:spcPts val="400"/>
-              </a:spcAft>
-            </a:pPr>
-            <a:r>
-              <a:rPr sz="1125" b="0" i="0">
-                <a:solidFill>
-                  <a:srgbClr val="5B6475"/>
-                </a:solidFill>
-                <a:latin typeface="Arial"/>
-              </a:rPr>
-              <a:t>Shravani Kuchi</a:t>
-            </a:r>
-          </a:p>
-        </p:txBody>
-      </p:sp>
-      <p:sp>
-        <p:nvSpPr>
-          <p:cNvPr id="4" name="TextBox 3"/>
-          <p:cNvSpPr txBox="1"/>
-          <p:nvPr/>
-        </p:nvSpPr>
-        <p:spPr>
-          <a:xfrm>
-            <a:off x="533400" y="590550"/>
-            <a:ext cx="11125200" cy="419100"/>
-          </a:xfrm>
-          <a:prstGeom prst="rect">
-            <a:avLst/>
-          </a:prstGeom>
-          <a:noFill/>
-        </p:spPr>
-        <p:txBody>
-          <a:bodyPr wrap="square" anchor="t" lIns="0" rIns="0" tIns="0" bIns="0">
-            <a:spAutoFit/>
-          </a:bodyPr>
-          <a:lstStyle/>
-          <a:p>
-            <a:pPr algn="l">
-              <a:spcAft>
-                <a:spcPts val="400"/>
-              </a:spcAft>
-            </a:pPr>
-            <a:r>
-              <a:rPr sz="2550" b="1" i="0">
-                <a:solidFill>
-                  <a:srgbClr val="1D2433"/>
-                </a:solidFill>
-                <a:latin typeface="Arial"/>
-              </a:rPr>
-              <a:t>Stage 2: Real Objects Accepted</a:t>
-            </a:r>
-          </a:p>
-        </p:txBody>
-      </p:sp>
-      <p:pic>
-        <p:nvPicPr>
-          <p:cNvPr id="5" name="Picture 4" descr="image-8-1.png"/>
-          <p:cNvPicPr>
-            <a:picLocks noChangeAspect="1"/>
-          </p:cNvPicPr>
-          <p:nvPr/>
-        </p:nvPicPr>
-        <p:blipFill>
-          <a:blip r:embed="rId2"/>
-          <a:stretch>
-            <a:fillRect/>
-          </a:stretch>
-        </p:blipFill>
-        <p:spPr>
-          <a:xfrm>
-            <a:off x="4194663" y="1181100"/>
-            <a:ext cx="3802673" cy="4476750"/>
-          </a:xfrm>
-          <a:prstGeom prst="rect">
-            <a:avLst/>
-          </a:prstGeom>
-          <a:ln w="9525">
-            <a:solidFill>
-              <a:srgbClr val="E3E6EB"/>
-            </a:solidFill>
-          </a:ln>
-        </p:spPr>
-      </p:pic>
-      <p:sp>
-        <p:nvSpPr>
-          <p:cNvPr id="6" name="Rounded Rectangle 5"/>
-          <p:cNvSpPr/>
-          <p:nvPr/>
-        </p:nvSpPr>
-        <p:spPr>
-          <a:xfrm>
-            <a:off x="533400" y="5829300"/>
-            <a:ext cx="3443478" cy="304800"/>
-          </a:xfrm>
-          <a:prstGeom prst="roundRect">
-            <a:avLst>
-              <a:gd name="adj" fmla="val 50000"/>
-            </a:avLst>
-          </a:prstGeom>
-          <a:solidFill>
-            <a:srgbClr val="F5F7FA"/>
-          </a:solidFill>
-          <a:ln w="9525">
-            <a:solidFill>
-              <a:srgbClr val="E3E6EB"/>
-            </a:solidFill>
-          </a:ln>
-          <a:effectLst/>
-        </p:spPr>
-        <p:style>
-          <a:lnRef idx="1">
-            <a:schemeClr val="accent1"/>
-          </a:lnRef>
-          <a:fillRef idx="3">
-            <a:schemeClr val="accent1"/>
-          </a:fillRef>
-          <a:effectRef idx="2">
-            <a:schemeClr val="accent1"/>
-          </a:effectRef>
-          <a:fontRef idx="minor">
-            <a:schemeClr val="lt1"/>
-          </a:fontRef>
-        </p:style>
-        <p:txBody>
-          <a:bodyPr rtlCol="0" anchor="ctr"/>
-          <a:lstStyle/>
-          <a:p>
-            <a:pPr algn="ctr"/>
-          </a:p>
-        </p:txBody>
-      </p:sp>
-      <p:sp>
-        <p:nvSpPr>
-          <p:cNvPr id="7" name="TextBox 6"/>
-          <p:cNvSpPr txBox="1"/>
-          <p:nvPr/>
-        </p:nvSpPr>
-        <p:spPr>
-          <a:xfrm>
-            <a:off x="533400" y="5829300"/>
-            <a:ext cx="3443478" cy="304800"/>
-          </a:xfrm>
-          <a:prstGeom prst="rect">
-            <a:avLst/>
-          </a:prstGeom>
-          <a:noFill/>
-        </p:spPr>
-        <p:txBody>
-          <a:bodyPr wrap="square" anchor="ctr" lIns="0" rIns="0" tIns="0" bIns="0">
-            <a:spAutoFit/>
-          </a:bodyPr>
-          <a:lstStyle/>
-          <a:p>
-            <a:pPr algn="ctr">
-              <a:spcAft>
-                <a:spcPts val="0"/>
-              </a:spcAft>
-            </a:pPr>
-            <a:r>
-              <a:rPr sz="1200" b="1" i="0">
-                <a:solidFill>
-                  <a:srgbClr val="2E9E4F"/>
-                </a:solidFill>
-                <a:latin typeface="Arial"/>
-              </a:rPr>
-              <a:t>43/45 real objects accepted (96% TPR)</a:t>
-            </a:r>
-          </a:p>
-        </p:txBody>
-      </p:sp>
-    </p:spTree>
-  </p:cSld>
-  <p:clrMapOvr>
-    <a:masterClrMapping/>
-  </p:clrMapOvr>
-</p:sld>
-</file>
-
-<file path=ppt/slides/slide8.xml><?xml version="1.0" encoding="utf-8"?>
-<p:sld xmlns:a="http://schemas.openxmlformats.org/drawingml/2006/main" xmlns:p="http://schemas.openxmlformats.org/presentationml/2006/main" xmlns:r="http://schemas.openxmlformats.org/officeDocument/2006/relationships">
-  <p:cSld>
-    <p:bg>
-      <p:bgPr>
-        <a:solidFill>
-          <a:srgbClr val="FFFFFF"/>
-        </a:solidFill>
-        <a:effectLst/>
-      </p:bgPr>
-    </p:bg>
-    <p:spTree>
-      <p:nvGrpSpPr>
-        <p:cNvPr id="1" name=""/>
-        <p:cNvGrpSpPr/>
-        <p:nvPr/>
-      </p:nvGrpSpPr>
-      <p:grpSpPr/>
-      <p:sp>
-        <p:nvSpPr>
-          <p:cNvPr id="2" name="TextBox 1"/>
-          <p:cNvSpPr txBox="1"/>
-          <p:nvPr/>
-        </p:nvSpPr>
-        <p:spPr>
-          <a:xfrm>
-            <a:off x="533400" y="381000"/>
-            <a:ext cx="7620000" cy="190500"/>
-          </a:xfrm>
-          <a:prstGeom prst="rect">
-            <a:avLst/>
-          </a:prstGeom>
-          <a:noFill/>
-        </p:spPr>
-        <p:txBody>
-          <a:bodyPr wrap="square" anchor="t" lIns="0" rIns="0" tIns="0" bIns="0">
-            <a:spAutoFit/>
-          </a:bodyPr>
-          <a:lstStyle/>
-          <a:p>
-            <a:pPr algn="l">
-              <a:spcAft>
-                <a:spcPts val="400"/>
-              </a:spcAft>
-            </a:pPr>
-            <a:r>
-              <a:rPr sz="1125" b="1" i="0">
-                <a:solidFill>
-                  <a:srgbClr val="C0392B"/>
-                </a:solidFill>
-                <a:latin typeface="Arial"/>
-              </a:rPr>
-              <a:t>TASK 2 · REAL VS DECOY · 2 / 3</a:t>
-            </a:r>
-          </a:p>
-        </p:txBody>
-      </p:sp>
-      <p:sp>
-        <p:nvSpPr>
-          <p:cNvPr id="3" name="TextBox 2"/>
-          <p:cNvSpPr txBox="1"/>
-          <p:nvPr/>
-        </p:nvSpPr>
-        <p:spPr>
-          <a:xfrm>
-            <a:off x="6896100" y="381000"/>
-            <a:ext cx="4762500" cy="190500"/>
-          </a:xfrm>
-          <a:prstGeom prst="rect">
-            <a:avLst/>
-          </a:prstGeom>
-          <a:noFill/>
-        </p:spPr>
-        <p:txBody>
-          <a:bodyPr wrap="square" anchor="t" lIns="0" rIns="0" tIns="0" bIns="0">
-            <a:spAutoFit/>
-          </a:bodyPr>
-          <a:lstStyle/>
-          <a:p>
-            <a:pPr algn="r">
-              <a:spcAft>
-                <a:spcPts val="400"/>
-              </a:spcAft>
-            </a:pPr>
-            <a:r>
-              <a:rPr sz="1125" b="0" i="0">
-                <a:solidFill>
-                  <a:srgbClr val="5B6475"/>
-                </a:solidFill>
-                <a:latin typeface="Arial"/>
-              </a:rPr>
-              <a:t>Shravani Kuchi</a:t>
-            </a:r>
-          </a:p>
-        </p:txBody>
-      </p:sp>
-      <p:sp>
-        <p:nvSpPr>
-          <p:cNvPr id="4" name="TextBox 3"/>
-          <p:cNvSpPr txBox="1"/>
-          <p:nvPr/>
-        </p:nvSpPr>
-        <p:spPr>
-          <a:xfrm>
-            <a:off x="533400" y="590550"/>
-            <a:ext cx="11125200" cy="419100"/>
-          </a:xfrm>
-          <a:prstGeom prst="rect">
-            <a:avLst/>
-          </a:prstGeom>
-          <a:noFill/>
-        </p:spPr>
-        <p:txBody>
-          <a:bodyPr wrap="square" anchor="t" lIns="0" rIns="0" tIns="0" bIns="0">
-            <a:spAutoFit/>
-          </a:bodyPr>
-          <a:lstStyle/>
-          <a:p>
-            <a:pPr algn="l">
-              <a:spcAft>
-                <a:spcPts val="400"/>
-              </a:spcAft>
-            </a:pPr>
-            <a:r>
-              <a:rPr sz="2550" b="1" i="0">
-                <a:solidFill>
-                  <a:srgbClr val="1D2433"/>
-                </a:solidFill>
-                <a:latin typeface="Arial"/>
-              </a:rPr>
-              <a:t>Stage 2: Perfect Decoy Rejection</a:t>
-            </a:r>
-          </a:p>
-        </p:txBody>
-      </p:sp>
-      <p:pic>
-        <p:nvPicPr>
-          <p:cNvPr id="5" name="Picture 4" descr="ev_decoys_rejected.png"/>
-          <p:cNvPicPr>
-            <a:picLocks noChangeAspect="1"/>
-          </p:cNvPicPr>
-          <p:nvPr/>
-        </p:nvPicPr>
-        <p:blipFill>
-          <a:blip r:embed="rId2"/>
-          <a:stretch>
-            <a:fillRect/>
-          </a:stretch>
-        </p:blipFill>
-        <p:spPr>
-          <a:xfrm>
-            <a:off x="3706535" y="1181100"/>
-            <a:ext cx="4778931" cy="4476750"/>
-          </a:xfrm>
-          <a:prstGeom prst="rect">
-            <a:avLst/>
-          </a:prstGeom>
-          <a:ln w="9525">
-            <a:solidFill>
-              <a:srgbClr val="E3E6EB"/>
-            </a:solidFill>
-          </a:ln>
-        </p:spPr>
-      </p:pic>
-      <p:sp>
-        <p:nvSpPr>
-          <p:cNvPr id="6" name="Rounded Rectangle 5"/>
-          <p:cNvSpPr/>
-          <p:nvPr/>
-        </p:nvSpPr>
-        <p:spPr>
-          <a:xfrm>
-            <a:off x="533400" y="5829300"/>
-            <a:ext cx="3102102" cy="304800"/>
-          </a:xfrm>
-          <a:prstGeom prst="roundRect">
-            <a:avLst>
-              <a:gd name="adj" fmla="val 50000"/>
-            </a:avLst>
-          </a:prstGeom>
-          <a:solidFill>
-            <a:srgbClr val="F5F7FA"/>
-          </a:solidFill>
-          <a:ln w="9525">
-            <a:solidFill>
-              <a:srgbClr val="E3E6EB"/>
-            </a:solidFill>
-          </a:ln>
-          <a:effectLst/>
-        </p:spPr>
-        <p:style>
-          <a:lnRef idx="1">
-            <a:schemeClr val="accent1"/>
-          </a:lnRef>
-          <a:fillRef idx="3">
-            <a:schemeClr val="accent1"/>
-          </a:fillRef>
-          <a:effectRef idx="2">
-            <a:schemeClr val="accent1"/>
-          </a:effectRef>
-          <a:fontRef idx="minor">
-            <a:schemeClr val="lt1"/>
-          </a:fontRef>
-        </p:style>
-        <p:txBody>
-          <a:bodyPr rtlCol="0" anchor="ctr"/>
-          <a:lstStyle/>
-          <a:p>
-            <a:pPr algn="ctr"/>
-          </a:p>
-        </p:txBody>
-      </p:sp>
-      <p:sp>
-        <p:nvSpPr>
-          <p:cNvPr id="7" name="TextBox 6"/>
-          <p:cNvSpPr txBox="1"/>
-          <p:nvPr/>
-        </p:nvSpPr>
-        <p:spPr>
-          <a:xfrm>
-            <a:off x="533400" y="5829300"/>
-            <a:ext cx="3102102" cy="304800"/>
-          </a:xfrm>
-          <a:prstGeom prst="rect">
-            <a:avLst/>
-          </a:prstGeom>
-          <a:noFill/>
-        </p:spPr>
-        <p:txBody>
-          <a:bodyPr wrap="square" anchor="ctr" lIns="0" rIns="0" tIns="0" bIns="0">
-            <a:spAutoFit/>
-          </a:bodyPr>
-          <a:lstStyle/>
-          <a:p>
-            <a:pPr algn="ctr">
-              <a:spcAft>
-                <a:spcPts val="0"/>
-              </a:spcAft>
-            </a:pPr>
-            <a:r>
-              <a:rPr sz="1200" b="1" i="0">
-                <a:solidFill>
-                  <a:srgbClr val="2E9E4F"/>
-                </a:solidFill>
-                <a:latin typeface="Arial"/>
-              </a:rPr>
-              <a:t>0% FPR - All 103 decoys rejected!</a:t>
-            </a:r>
-          </a:p>
-        </p:txBody>
-      </p:sp>
-    </p:spTree>
-  </p:cSld>
-  <p:clrMapOvr>
-    <a:masterClrMapping/>
-  </p:clrMapOvr>
-</p:sld>
-</file>
-
-<file path=ppt/slides/slide9.xml><?xml version="1.0" encoding="utf-8"?>
-<p:sld xmlns:a="http://schemas.openxmlformats.org/drawingml/2006/main" xmlns:p="http://schemas.openxmlformats.org/presentationml/2006/main" xmlns:r="http://schemas.openxmlformats.org/officeDocument/2006/relationships">
-  <p:cSld>
-    <p:bg>
-      <p:bgPr>
-        <a:solidFill>
-          <a:srgbClr val="FFFFFF"/>
-        </a:solidFill>
-        <a:effectLst/>
-      </p:bgPr>
-    </p:bg>
-    <p:spTree>
-      <p:nvGrpSpPr>
-        <p:cNvPr id="1" name=""/>
-        <p:cNvGrpSpPr/>
-        <p:nvPr/>
-      </p:nvGrpSpPr>
-      <p:grpSpPr/>
-      <p:sp>
-        <p:nvSpPr>
-          <p:cNvPr id="2" name="TextBox 1"/>
-          <p:cNvSpPr txBox="1"/>
-          <p:nvPr/>
-        </p:nvSpPr>
-        <p:spPr>
-          <a:xfrm>
-            <a:off x="533400" y="381000"/>
-            <a:ext cx="7620000" cy="190500"/>
-          </a:xfrm>
-          <a:prstGeom prst="rect">
-            <a:avLst/>
-          </a:prstGeom>
-          <a:noFill/>
-        </p:spPr>
-        <p:txBody>
-          <a:bodyPr wrap="square" anchor="t" lIns="0" rIns="0" tIns="0" bIns="0">
-            <a:spAutoFit/>
-          </a:bodyPr>
-          <a:lstStyle/>
-          <a:p>
-            <a:pPr algn="l">
-              <a:spcAft>
-                <a:spcPts val="400"/>
-              </a:spcAft>
-            </a:pPr>
-            <a:r>
-              <a:rPr sz="1125" b="1" i="0">
-                <a:solidFill>
-                  <a:srgbClr val="C0392B"/>
-                </a:solidFill>
-                <a:latin typeface="Arial"/>
-              </a:rPr>
-              <a:t>TASK 2 · REAL VS DECOY · 3 / 3</a:t>
-            </a:r>
-          </a:p>
-        </p:txBody>
-      </p:sp>
-      <p:sp>
-        <p:nvSpPr>
-          <p:cNvPr id="3" name="TextBox 2"/>
-          <p:cNvSpPr txBox="1"/>
-          <p:nvPr/>
-        </p:nvSpPr>
-        <p:spPr>
-          <a:xfrm>
-            <a:off x="6896100" y="381000"/>
-            <a:ext cx="4762500" cy="190500"/>
-          </a:xfrm>
-          <a:prstGeom prst="rect">
-            <a:avLst/>
-          </a:prstGeom>
-          <a:noFill/>
-        </p:spPr>
-        <p:txBody>
-          <a:bodyPr wrap="square" anchor="t" lIns="0" rIns="0" tIns="0" bIns="0">
-            <a:spAutoFit/>
-          </a:bodyPr>
-          <a:lstStyle/>
-          <a:p>
-            <a:pPr algn="r">
-              <a:spcAft>
-                <a:spcPts val="400"/>
-              </a:spcAft>
-            </a:pPr>
-            <a:r>
-              <a:rPr sz="1125" b="0" i="0">
-                <a:solidFill>
-                  <a:srgbClr val="5B6475"/>
-                </a:solidFill>
-                <a:latin typeface="Arial"/>
-              </a:rPr>
-              <a:t>Shravani Kuchi</a:t>
-            </a:r>
-          </a:p>
-        </p:txBody>
-      </p:sp>
-      <p:sp>
-        <p:nvSpPr>
-          <p:cNvPr id="4" name="TextBox 3"/>
-          <p:cNvSpPr txBox="1"/>
-          <p:nvPr/>
-        </p:nvSpPr>
-        <p:spPr>
-          <a:xfrm>
-            <a:off x="533400" y="590550"/>
-            <a:ext cx="11125200" cy="419100"/>
-          </a:xfrm>
-          <a:prstGeom prst="rect">
-            <a:avLst/>
-          </a:prstGeom>
-          <a:noFill/>
-        </p:spPr>
-        <p:txBody>
-          <a:bodyPr wrap="square" anchor="t" lIns="0" rIns="0" tIns="0" bIns="0">
-            <a:spAutoFit/>
-          </a:bodyPr>
-          <a:lstStyle/>
-          <a:p>
-            <a:pPr algn="l">
-              <a:spcAft>
-                <a:spcPts val="400"/>
-              </a:spcAft>
-            </a:pPr>
-            <a:r>
-              <a:rPr sz="2550" b="1" i="0">
-                <a:solidFill>
-                  <a:srgbClr val="1D2433"/>
-                </a:solidFill>
-                <a:latin typeface="Arial"/>
-              </a:rPr>
-              <a:t>Stage 2: Edge Cases - Missed Real Objects</a:t>
-            </a:r>
-          </a:p>
-        </p:txBody>
-      </p:sp>
-      <p:pic>
-        <p:nvPicPr>
-          <p:cNvPr id="5" name="Picture 4" descr="image-10-1.png"/>
-          <p:cNvPicPr>
-            <a:picLocks noChangeAspect="1"/>
-          </p:cNvPicPr>
-          <p:nvPr/>
-        </p:nvPicPr>
-        <p:blipFill>
-          <a:blip r:embed="rId2"/>
-          <a:stretch>
-            <a:fillRect/>
-          </a:stretch>
-        </p:blipFill>
-        <p:spPr>
-          <a:xfrm>
-            <a:off x="1518420" y="1181100"/>
-            <a:ext cx="3478261" cy="4095750"/>
-          </a:xfrm>
-          <a:prstGeom prst="rect">
-            <a:avLst/>
-          </a:prstGeom>
-          <a:ln w="9525">
-            <a:solidFill>
-              <a:srgbClr val="E3E6EB"/>
-            </a:solidFill>
-          </a:ln>
-        </p:spPr>
-      </p:pic>
-      <p:sp>
-        <p:nvSpPr>
-          <p:cNvPr id="6" name="TextBox 5"/>
-          <p:cNvSpPr txBox="1"/>
-          <p:nvPr/>
-        </p:nvSpPr>
-        <p:spPr>
-          <a:xfrm>
-            <a:off x="533400" y="5353050"/>
-            <a:ext cx="5448300" cy="247650"/>
-          </a:xfrm>
-          <a:prstGeom prst="rect">
-            <a:avLst/>
-          </a:prstGeom>
-          <a:noFill/>
-        </p:spPr>
-        <p:txBody>
-          <a:bodyPr wrap="square" anchor="t" lIns="0" rIns="0" tIns="0" bIns="0">
-            <a:spAutoFit/>
-          </a:bodyPr>
-          <a:lstStyle/>
-          <a:p>
-            <a:pPr algn="ctr">
-              <a:spcAft>
-                <a:spcPts val="400"/>
-              </a:spcAft>
-            </a:pPr>
-            <a:r>
-              <a:rPr sz="1350" b="1" i="0">
-                <a:solidFill>
-                  <a:srgbClr val="C0392B"/>
-                </a:solidFill>
-                <a:latin typeface="Arial"/>
-              </a:rPr>
-              <a:t>Real Missed (2 objects)</a:t>
-            </a:r>
-          </a:p>
-        </p:txBody>
-      </p:sp>
-      <p:pic>
-        <p:nvPicPr>
-          <p:cNvPr id="7" name="Picture 6" descr="image-10-2.png"/>
-          <p:cNvPicPr>
-            <a:picLocks noChangeAspect="1"/>
-          </p:cNvPicPr>
-          <p:nvPr/>
-        </p:nvPicPr>
-        <p:blipFill>
-          <a:blip r:embed="rId3"/>
-          <a:stretch>
-            <a:fillRect/>
-          </a:stretch>
-        </p:blipFill>
-        <p:spPr>
-          <a:xfrm>
-            <a:off x="7196859" y="1181100"/>
-            <a:ext cx="3475182" cy="4095750"/>
-          </a:xfrm>
-          <a:prstGeom prst="rect">
-            <a:avLst/>
-          </a:prstGeom>
-          <a:ln w="9525">
-            <a:solidFill>
-              <a:srgbClr val="E3E6EB"/>
-            </a:solidFill>
-          </a:ln>
-        </p:spPr>
-      </p:pic>
-      <p:sp>
-        <p:nvSpPr>
-          <p:cNvPr id="8" name="TextBox 7"/>
-          <p:cNvSpPr txBox="1"/>
-          <p:nvPr/>
-        </p:nvSpPr>
-        <p:spPr>
-          <a:xfrm>
-            <a:off x="6210300" y="5353050"/>
-            <a:ext cx="5448300" cy="247650"/>
-          </a:xfrm>
-          <a:prstGeom prst="rect">
-            <a:avLst/>
-          </a:prstGeom>
-          <a:noFill/>
-        </p:spPr>
-        <p:txBody>
-          <a:bodyPr wrap="square" anchor="t" lIns="0" rIns="0" tIns="0" bIns="0">
-            <a:spAutoFit/>
-          </a:bodyPr>
-          <a:lstStyle/>
-          <a:p>
-            <a:pPr algn="ctr">
-              <a:spcAft>
-                <a:spcPts val="400"/>
-              </a:spcAft>
-            </a:pPr>
-            <a:r>
-              <a:rPr sz="1350" b="1" i="0">
-                <a:solidFill>
-                  <a:srgbClr val="2E9E4F"/>
-                </a:solidFill>
-                <a:latin typeface="Arial"/>
-              </a:rPr>
-              <a:t>Rescued by Tracking</a:t>
-            </a:r>
-          </a:p>
-        </p:txBody>
-      </p:sp>
-      <p:sp>
-        <p:nvSpPr>
-          <p:cNvPr id="9" name="TextBox 8"/>
-          <p:cNvSpPr txBox="1"/>
-          <p:nvPr/>
-        </p:nvSpPr>
-        <p:spPr>
-          <a:xfrm>
-            <a:off x="533400" y="5772150"/>
-            <a:ext cx="11125200" cy="476250"/>
-          </a:xfrm>
-          <a:prstGeom prst="rect">
-            <a:avLst/>
-          </a:prstGeom>
-          <a:noFill/>
-        </p:spPr>
-        <p:txBody>
-          <a:bodyPr wrap="square" anchor="t" lIns="0" rIns="0" tIns="0" bIns="0">
-            <a:spAutoFit/>
-          </a:bodyPr>
-          <a:lstStyle/>
-          <a:p>
-            <a:pPr algn="ctr">
-              <a:spcAft>
-                <a:spcPts val="200"/>
-              </a:spcAft>
-            </a:pPr>
-            <a:r>
-              <a:rPr sz="1200" b="0" i="1">
-                <a:solidFill>
-                  <a:srgbClr val="5B6475"/>
-                </a:solidFill>
-                <a:latin typeface="Arial"/>
-              </a:rPr>
-              <a:t>Root cause: Colour/depth timing mismatch during camera motion</a:t>
-            </a:r>
-          </a:p>
-          <a:p>
-            <a:pPr algn="ctr">
-              <a:spcAft>
-                <a:spcPts val="200"/>
-              </a:spcAft>
-            </a:pPr>
-            <a:r>
-              <a:rPr sz="1200" b="0" i="1">
-                <a:solidFill>
-                  <a:srgbClr val="5B6475"/>
-                </a:solidFill>
-                <a:latin typeface="Arial"/>
-              </a:rPr>
-              <a:t>Solution: Stage 3 tracking recovers both!</a:t>
             </a:r>
           </a:p>
         </p:txBody>
